--- a/Feature_Engineering.pptx
+++ b/Feature_Engineering.pptx
@@ -5,16 +5,21 @@
     <p:sldMasterId id="2147483648" r:id="rId1"/>
   </p:sldMasterIdLst>
   <p:notesMasterIdLst>
-    <p:notesMasterId r:id="rId9"/>
+    <p:notesMasterId r:id="rId14"/>
   </p:notesMasterIdLst>
   <p:sldIdLst>
     <p:sldId id="333" r:id="rId2"/>
     <p:sldId id="336" r:id="rId3"/>
     <p:sldId id="334" r:id="rId4"/>
-    <p:sldId id="335" r:id="rId5"/>
-    <p:sldId id="339" r:id="rId6"/>
-    <p:sldId id="338" r:id="rId7"/>
-    <p:sldId id="337" r:id="rId8"/>
+    <p:sldId id="344" r:id="rId5"/>
+    <p:sldId id="335" r:id="rId6"/>
+    <p:sldId id="339" r:id="rId7"/>
+    <p:sldId id="338" r:id="rId8"/>
+    <p:sldId id="341" r:id="rId9"/>
+    <p:sldId id="340" r:id="rId10"/>
+    <p:sldId id="343" r:id="rId11"/>
+    <p:sldId id="342" r:id="rId12"/>
+    <p:sldId id="337" r:id="rId13"/>
   </p:sldIdLst>
   <p:sldSz cx="12192000" cy="6858000"/>
   <p:notesSz cx="6858000" cy="9144000"/>
@@ -203,7 +208,7 @@
           <a:p>
             <a:fld id="{C2E15B94-D9E4-E149-8081-23A720D1EE5F}" type="datetimeFigureOut">
               <a:rPr lang="en-US" smtClean="0"/>
-              <a:t>4/3/21</a:t>
+              <a:t>4/5/21</a:t>
             </a:fld>
             <a:endParaRPr lang="en-US"/>
           </a:p>
@@ -617,7 +622,7 @@
           <a:p>
             <a:fld id="{FBD852D7-E694-214E-8A12-510E0A0329D2}" type="datetimeFigureOut">
               <a:rPr lang="en-US" smtClean="0"/>
-              <a:t>4/3/21</a:t>
+              <a:t>4/5/21</a:t>
             </a:fld>
             <a:endParaRPr lang="en-US"/>
           </a:p>
@@ -815,7 +820,7 @@
           <a:p>
             <a:fld id="{FBD852D7-E694-214E-8A12-510E0A0329D2}" type="datetimeFigureOut">
               <a:rPr lang="en-US" smtClean="0"/>
-              <a:t>4/3/21</a:t>
+              <a:t>4/5/21</a:t>
             </a:fld>
             <a:endParaRPr lang="en-US"/>
           </a:p>
@@ -1023,7 +1028,7 @@
           <a:p>
             <a:fld id="{FBD852D7-E694-214E-8A12-510E0A0329D2}" type="datetimeFigureOut">
               <a:rPr lang="en-US" smtClean="0"/>
-              <a:t>4/3/21</a:t>
+              <a:t>4/5/21</a:t>
             </a:fld>
             <a:endParaRPr lang="en-US"/>
           </a:p>
@@ -1221,7 +1226,7 @@
           <a:p>
             <a:fld id="{FBD852D7-E694-214E-8A12-510E0A0329D2}" type="datetimeFigureOut">
               <a:rPr lang="en-US" smtClean="0"/>
-              <a:t>4/3/21</a:t>
+              <a:t>4/5/21</a:t>
             </a:fld>
             <a:endParaRPr lang="en-US"/>
           </a:p>
@@ -1496,7 +1501,7 @@
           <a:p>
             <a:fld id="{FBD852D7-E694-214E-8A12-510E0A0329D2}" type="datetimeFigureOut">
               <a:rPr lang="en-US" smtClean="0"/>
-              <a:t>4/3/21</a:t>
+              <a:t>4/5/21</a:t>
             </a:fld>
             <a:endParaRPr lang="en-US"/>
           </a:p>
@@ -1761,7 +1766,7 @@
           <a:p>
             <a:fld id="{FBD852D7-E694-214E-8A12-510E0A0329D2}" type="datetimeFigureOut">
               <a:rPr lang="en-US" smtClean="0"/>
-              <a:t>4/3/21</a:t>
+              <a:t>4/5/21</a:t>
             </a:fld>
             <a:endParaRPr lang="en-US"/>
           </a:p>
@@ -2173,7 +2178,7 @@
           <a:p>
             <a:fld id="{FBD852D7-E694-214E-8A12-510E0A0329D2}" type="datetimeFigureOut">
               <a:rPr lang="en-US" smtClean="0"/>
-              <a:t>4/3/21</a:t>
+              <a:t>4/5/21</a:t>
             </a:fld>
             <a:endParaRPr lang="en-US"/>
           </a:p>
@@ -2314,7 +2319,7 @@
           <a:p>
             <a:fld id="{FBD852D7-E694-214E-8A12-510E0A0329D2}" type="datetimeFigureOut">
               <a:rPr lang="en-US" smtClean="0"/>
-              <a:t>4/3/21</a:t>
+              <a:t>4/5/21</a:t>
             </a:fld>
             <a:endParaRPr lang="en-US"/>
           </a:p>
@@ -2427,7 +2432,7 @@
           <a:p>
             <a:fld id="{FBD852D7-E694-214E-8A12-510E0A0329D2}" type="datetimeFigureOut">
               <a:rPr lang="en-US" smtClean="0"/>
-              <a:t>4/3/21</a:t>
+              <a:t>4/5/21</a:t>
             </a:fld>
             <a:endParaRPr lang="en-US"/>
           </a:p>
@@ -2738,7 +2743,7 @@
           <a:p>
             <a:fld id="{FBD852D7-E694-214E-8A12-510E0A0329D2}" type="datetimeFigureOut">
               <a:rPr lang="en-US" smtClean="0"/>
-              <a:t>4/3/21</a:t>
+              <a:t>4/5/21</a:t>
             </a:fld>
             <a:endParaRPr lang="en-US"/>
           </a:p>
@@ -3026,7 +3031,7 @@
           <a:p>
             <a:fld id="{FBD852D7-E694-214E-8A12-510E0A0329D2}" type="datetimeFigureOut">
               <a:rPr lang="en-US" smtClean="0"/>
-              <a:t>4/3/21</a:t>
+              <a:t>4/5/21</a:t>
             </a:fld>
             <a:endParaRPr lang="en-US"/>
           </a:p>
@@ -3267,7 +3272,7 @@
           <a:p>
             <a:fld id="{FBD852D7-E694-214E-8A12-510E0A0329D2}" type="datetimeFigureOut">
               <a:rPr lang="en-US" smtClean="0"/>
-              <a:t>4/3/21</a:t>
+              <a:t>4/5/21</a:t>
             </a:fld>
             <a:endParaRPr lang="en-US"/>
           </a:p>
@@ -4139,7 +4144,7 @@
         </p:nvSpPr>
         <p:spPr>
           <a:xfrm>
-            <a:off x="52190" y="570363"/>
+            <a:off x="4482158" y="102516"/>
             <a:ext cx="3954986" cy="923330"/>
           </a:xfrm>
           <a:prstGeom prst="rect">
@@ -4438,8 +4443,8 @@
         </p:nvSpPr>
         <p:spPr>
           <a:xfrm>
-            <a:off x="4123751" y="847851"/>
-            <a:ext cx="4613019" cy="954107"/>
+            <a:off x="136367" y="564181"/>
+            <a:ext cx="3929589" cy="1169551"/>
           </a:xfrm>
           <a:prstGeom prst="rect">
             <a:avLst/>
@@ -4468,6 +4473,1516 @@
     <p:extLst>
       <p:ext uri="{BB962C8B-B14F-4D97-AF65-F5344CB8AC3E}">
         <p14:creationId xmlns:p14="http://schemas.microsoft.com/office/powerpoint/2010/main" val="1421258598"/>
+      </p:ext>
+    </p:extLst>
+  </p:cSld>
+  <p:clrMapOvr>
+    <a:masterClrMapping/>
+  </p:clrMapOvr>
+</p:sld>
+</file>
+
+<file path=ppt/slides/slide10.xml><?xml version="1.0" encoding="utf-8"?>
+<p:sld xmlns:a="http://schemas.openxmlformats.org/drawingml/2006/main" xmlns:r="http://schemas.openxmlformats.org/officeDocument/2006/relationships" xmlns:p="http://schemas.openxmlformats.org/presentationml/2006/main">
+  <p:cSld>
+    <p:spTree>
+      <p:nvGrpSpPr>
+        <p:cNvPr id="1" name=""/>
+        <p:cNvGrpSpPr/>
+        <p:nvPr/>
+      </p:nvGrpSpPr>
+      <p:grpSpPr>
+        <a:xfrm>
+          <a:off x="0" y="0"/>
+          <a:ext cx="0" cy="0"/>
+          <a:chOff x="0" y="0"/>
+          <a:chExt cx="0" cy="0"/>
+        </a:xfrm>
+      </p:grpSpPr>
+      <p:sp>
+        <p:nvSpPr>
+          <p:cNvPr id="2" name="TextBox 1">
+            <a:extLst>
+              <a:ext uri="{FF2B5EF4-FFF2-40B4-BE49-F238E27FC236}">
+                <a16:creationId xmlns:a16="http://schemas.microsoft.com/office/drawing/2014/main" id="{E3BCC4D4-9766-DE43-84A1-1155AD497BAB}"/>
+              </a:ext>
+            </a:extLst>
+          </p:cNvPr>
+          <p:cNvSpPr txBox="1"/>
+          <p:nvPr/>
+        </p:nvSpPr>
+        <p:spPr>
+          <a:xfrm>
+            <a:off x="2380488" y="258901"/>
+            <a:ext cx="8534400" cy="3170099"/>
+          </a:xfrm>
+          <a:prstGeom prst="rect">
+            <a:avLst/>
+          </a:prstGeom>
+          <a:noFill/>
+        </p:spPr>
+        <p:txBody>
+          <a:bodyPr wrap="square" rtlCol="0">
+            <a:spAutoFit/>
+          </a:bodyPr>
+          <a:lstStyle/>
+          <a:p>
+            <a:r>
+              <a:rPr lang="en-US" b="1" dirty="0">
+                <a:solidFill>
+                  <a:srgbClr val="FF0000"/>
+                </a:solidFill>
+              </a:rPr>
+              <a:t>Cynthia Rudin</a:t>
+            </a:r>
+            <a:r>
+              <a:rPr lang="en-US" sz="1400" dirty="0"/>
+              <a:t> - </a:t>
+            </a:r>
+            <a:r>
+              <a:rPr lang="en-US" sz="1400" b="1" dirty="0">
+                <a:solidFill>
+                  <a:srgbClr val="FF0000"/>
+                </a:solidFill>
+              </a:rPr>
+              <a:t>Interpretable Machine Learning</a:t>
+            </a:r>
+          </a:p>
+          <a:p>
+            <a:r>
+              <a:rPr lang="en-US" sz="1400" dirty="0"/>
+              <a:t>"Stop explaining black box machine learning models for high stakes decisions and use interpretable models instead"</a:t>
+            </a:r>
+          </a:p>
+          <a:p>
+            <a:r>
+              <a:rPr lang="en-US" sz="1400" dirty="0"/>
+              <a:t>Nature Machine Intelligence volume 1, pages206–215(2019)</a:t>
+            </a:r>
+          </a:p>
+          <a:p>
+            <a:r>
+              <a:rPr lang="en-US" sz="1400" dirty="0"/>
+              <a:t>- </a:t>
+            </a:r>
+            <a:r>
+              <a:rPr lang="en-US" sz="1400" dirty="0">
+                <a:hlinkClick r:id="rId2"/>
+              </a:rPr>
+              <a:t>https://www.nature.com/articles/s42256-019-0048-x</a:t>
+            </a:r>
+            <a:endParaRPr lang="en-US" sz="1400" dirty="0"/>
+          </a:p>
+          <a:p>
+            <a:endParaRPr lang="en-US" sz="1400" dirty="0"/>
+          </a:p>
+          <a:p>
+            <a:r>
+              <a:rPr lang="en-US" sz="1400" dirty="0"/>
+              <a:t>"Please Stop Explaining Black Box Models and Use Interpretable Models Instead"</a:t>
+            </a:r>
+          </a:p>
+          <a:p>
+            <a:r>
+              <a:rPr lang="en-US" sz="1400" dirty="0"/>
+              <a:t>- </a:t>
+            </a:r>
+            <a:r>
+              <a:rPr lang="en-US" sz="1400" dirty="0">
+                <a:hlinkClick r:id="rId3"/>
+              </a:rPr>
+              <a:t>https://www.youtube.com/watch?v=sl78EgrT4TY</a:t>
+            </a:r>
+            <a:endParaRPr lang="en-US" sz="1400" dirty="0"/>
+          </a:p>
+          <a:p>
+            <a:endParaRPr lang="en-US" sz="1400" dirty="0"/>
+          </a:p>
+          <a:p>
+            <a:r>
+              <a:rPr lang="en-US" sz="1400" dirty="0"/>
+              <a:t>Why People Love Black Boxes (Cynthia Rudin, 2019) :</a:t>
+            </a:r>
+          </a:p>
+          <a:p>
+            <a:pPr marL="285750" indent="-285750">
+              <a:buFont typeface="Arial" panose="020B0604020202020204" pitchFamily="34" charset="0"/>
+              <a:buChar char="•"/>
+            </a:pPr>
+            <a:r>
+              <a:rPr lang="en-US" sz="1400" dirty="0"/>
+              <a:t>they allow companies to make $$</a:t>
+            </a:r>
+          </a:p>
+          <a:p>
+            <a:pPr marL="285750" indent="-285750">
+              <a:buFont typeface="Arial" panose="020B0604020202020204" pitchFamily="34" charset="0"/>
+              <a:buChar char="•"/>
+            </a:pPr>
+            <a:r>
+              <a:rPr lang="en-US" sz="1400" dirty="0"/>
+              <a:t>they are "magical" and "uncover things"</a:t>
+            </a:r>
+          </a:p>
+          <a:p>
+            <a:pPr marL="285750" indent="-285750">
+              <a:buFont typeface="Arial" panose="020B0604020202020204" pitchFamily="34" charset="0"/>
+              <a:buChar char="•"/>
+            </a:pPr>
+            <a:r>
+              <a:rPr lang="en-US" sz="1400" dirty="0"/>
+              <a:t>they are easy to train, an excuse not to do any feature engineering</a:t>
+            </a:r>
+          </a:p>
+          <a:p>
+            <a:pPr marL="285750" indent="-285750">
+              <a:buFont typeface="Arial" panose="020B0604020202020204" pitchFamily="34" charset="0"/>
+              <a:buChar char="•"/>
+            </a:pPr>
+            <a:r>
+              <a:rPr lang="en-US" sz="1400" dirty="0"/>
+              <a:t>people think they are more accurate</a:t>
+            </a:r>
+          </a:p>
+          <a:p>
+            <a:pPr marL="285750" indent="-285750">
+              <a:buFont typeface="Arial" panose="020B0604020202020204" pitchFamily="34" charset="0"/>
+              <a:buChar char="•"/>
+            </a:pPr>
+            <a:r>
+              <a:rPr lang="en-US" sz="1400" dirty="0"/>
+              <a:t>we don't even teach interpretable ML</a:t>
+            </a:r>
+          </a:p>
+        </p:txBody>
+      </p:sp>
+      <p:pic>
+        <p:nvPicPr>
+          <p:cNvPr id="1026" name="Picture 2" descr="Cynthia Rudin, PhD – Dr. Francesca Dominici">
+            <a:extLst>
+              <a:ext uri="{FF2B5EF4-FFF2-40B4-BE49-F238E27FC236}">
+                <a16:creationId xmlns:a16="http://schemas.microsoft.com/office/drawing/2014/main" id="{924E638E-3176-7047-B8B7-9893C57A9148}"/>
+              </a:ext>
+            </a:extLst>
+          </p:cNvPr>
+          <p:cNvPicPr>
+            <a:picLocks noChangeAspect="1" noChangeArrowheads="1"/>
+          </p:cNvPicPr>
+          <p:nvPr/>
+        </p:nvPicPr>
+        <p:blipFill>
+          <a:blip r:embed="rId4" cstate="email">
+            <a:extLst>
+              <a:ext uri="{28A0092B-C50C-407E-A947-70E740481C1C}">
+                <a14:useLocalDpi xmlns:a14="http://schemas.microsoft.com/office/drawing/2010/main"/>
+              </a:ext>
+            </a:extLst>
+          </a:blip>
+          <a:srcRect/>
+          <a:stretch>
+            <a:fillRect/>
+          </a:stretch>
+        </p:blipFill>
+        <p:spPr bwMode="auto">
+          <a:xfrm>
+            <a:off x="99918" y="94311"/>
+            <a:ext cx="1807718" cy="1888139"/>
+          </a:xfrm>
+          <a:prstGeom prst="rect">
+            <a:avLst/>
+          </a:prstGeom>
+          <a:noFill/>
+          <a:extLst>
+            <a:ext uri="{909E8E84-426E-40DD-AFC4-6F175D3DCCD1}">
+              <a14:hiddenFill xmlns:a14="http://schemas.microsoft.com/office/drawing/2010/main">
+                <a:solidFill>
+                  <a:srgbClr val="FFFFFF"/>
+                </a:solidFill>
+              </a14:hiddenFill>
+            </a:ext>
+          </a:extLst>
+        </p:spPr>
+      </p:pic>
+      <p:sp>
+        <p:nvSpPr>
+          <p:cNvPr id="3" name="TextBox 2">
+            <a:extLst>
+              <a:ext uri="{FF2B5EF4-FFF2-40B4-BE49-F238E27FC236}">
+                <a16:creationId xmlns:a16="http://schemas.microsoft.com/office/drawing/2014/main" id="{DF7B0848-0623-2E4D-BF95-FD2C948BA777}"/>
+              </a:ext>
+            </a:extLst>
+          </p:cNvPr>
+          <p:cNvSpPr txBox="1"/>
+          <p:nvPr/>
+        </p:nvSpPr>
+        <p:spPr>
+          <a:xfrm>
+            <a:off x="0" y="1982450"/>
+            <a:ext cx="2001870" cy="1446550"/>
+          </a:xfrm>
+          <a:prstGeom prst="rect">
+            <a:avLst/>
+          </a:prstGeom>
+          <a:noFill/>
+        </p:spPr>
+        <p:txBody>
+          <a:bodyPr wrap="square" rtlCol="0">
+            <a:spAutoFit/>
+          </a:bodyPr>
+          <a:lstStyle/>
+          <a:p>
+            <a:r>
+              <a:rPr lang="en-US" b="1" dirty="0"/>
+              <a:t>Cynthia Rudin</a:t>
+            </a:r>
+          </a:p>
+          <a:p>
+            <a:r>
+              <a:rPr lang="en-US" sz="1400" dirty="0"/>
+              <a:t>Professor at Duke University,</a:t>
+            </a:r>
+          </a:p>
+          <a:p>
+            <a:r>
+              <a:rPr lang="en-US" sz="1400" dirty="0"/>
+              <a:t>Prediction Analysis Lab,</a:t>
+            </a:r>
+          </a:p>
+          <a:p>
+            <a:r>
+              <a:rPr lang="en-US" sz="1400" dirty="0"/>
+              <a:t>interpretable machine learning </a:t>
+            </a:r>
+          </a:p>
+        </p:txBody>
+      </p:sp>
+      <p:sp>
+        <p:nvSpPr>
+          <p:cNvPr id="6" name="TextBox 5">
+            <a:extLst>
+              <a:ext uri="{FF2B5EF4-FFF2-40B4-BE49-F238E27FC236}">
+                <a16:creationId xmlns:a16="http://schemas.microsoft.com/office/drawing/2014/main" id="{F6110E56-2FAC-AE44-AC8B-F670E765E879}"/>
+              </a:ext>
+            </a:extLst>
+          </p:cNvPr>
+          <p:cNvSpPr txBox="1"/>
+          <p:nvPr/>
+        </p:nvSpPr>
+        <p:spPr>
+          <a:xfrm>
+            <a:off x="539496" y="4301476"/>
+            <a:ext cx="6894576" cy="2462213"/>
+          </a:xfrm>
+          <a:prstGeom prst="rect">
+            <a:avLst/>
+          </a:prstGeom>
+          <a:noFill/>
+        </p:spPr>
+        <p:txBody>
+          <a:bodyPr wrap="square" rtlCol="0">
+            <a:spAutoFit/>
+          </a:bodyPr>
+          <a:lstStyle/>
+          <a:p>
+            <a:r>
+              <a:rPr lang="en-US" sz="1400" b="1" dirty="0" err="1">
+                <a:solidFill>
+                  <a:srgbClr val="FF0000"/>
+                </a:solidFill>
+              </a:rPr>
+              <a:t>Conrastive</a:t>
+            </a:r>
+            <a:r>
+              <a:rPr lang="en-US" sz="1400" b="1" dirty="0">
+                <a:solidFill>
+                  <a:srgbClr val="FF0000"/>
+                </a:solidFill>
+              </a:rPr>
+              <a:t> Learning:</a:t>
+            </a:r>
+            <a:r>
+              <a:rPr lang="en-US" sz="1400" dirty="0"/>
+              <a:t> </a:t>
+            </a:r>
+            <a:br>
+              <a:rPr lang="en-US" sz="1400" dirty="0"/>
+            </a:br>
+            <a:r>
+              <a:rPr lang="en-US" sz="1400" dirty="0"/>
+              <a:t>  Stage 1: find/train a contrastive representation of data.</a:t>
+            </a:r>
+          </a:p>
+          <a:p>
+            <a:r>
+              <a:rPr lang="en-US" sz="1400" dirty="0"/>
+              <a:t>           </a:t>
+            </a:r>
+            <a:r>
+              <a:rPr lang="en-US" sz="1400" dirty="0" err="1"/>
+              <a:t>Contrasive</a:t>
+            </a:r>
+            <a:r>
+              <a:rPr lang="en-US" sz="1400" dirty="0"/>
+              <a:t> = Polarized. Get "cats" close to each other, and father from "dogs".</a:t>
+            </a:r>
+          </a:p>
+          <a:p>
+            <a:r>
+              <a:rPr lang="en-US" sz="1400" dirty="0"/>
+              <a:t>  Stage 2: use </a:t>
+            </a:r>
+            <a:r>
+              <a:rPr lang="en-US" sz="1400" dirty="0" err="1"/>
+              <a:t>softmax</a:t>
+            </a:r>
+            <a:r>
+              <a:rPr lang="en-US" sz="1400" dirty="0"/>
+              <a:t> and cross-entropy to find separation (classification) of polarized data</a:t>
+            </a:r>
+          </a:p>
+          <a:p>
+            <a:endParaRPr lang="en-US" sz="1400" dirty="0"/>
+          </a:p>
+          <a:p>
+            <a:r>
+              <a:rPr lang="en-US" sz="1400" b="1" dirty="0">
+                <a:solidFill>
+                  <a:srgbClr val="FF0000"/>
+                </a:solidFill>
+              </a:rPr>
+              <a:t>Self-supervised learning</a:t>
+            </a:r>
+            <a:r>
+              <a:rPr lang="en-US" sz="1400" dirty="0"/>
+              <a:t> - automatically creates labels</a:t>
+            </a:r>
+          </a:p>
+          <a:p>
+            <a:r>
+              <a:rPr lang="en-US" sz="1400" dirty="0"/>
+              <a:t>  trains using those labels, generates representations,</a:t>
+            </a:r>
+          </a:p>
+          <a:p>
+            <a:r>
+              <a:rPr lang="en-US" sz="1400" dirty="0"/>
+              <a:t>  then uses these representations for other tasks</a:t>
+            </a:r>
+          </a:p>
+          <a:p>
+            <a:r>
+              <a:rPr lang="en-US" sz="1400" dirty="0"/>
+              <a:t>  Examples how labels can be created:</a:t>
+            </a:r>
+          </a:p>
+          <a:p>
+            <a:r>
+              <a:rPr lang="en-US" sz="1400" dirty="0"/>
+              <a:t>    - remove word, and learn to predict it</a:t>
+            </a:r>
+          </a:p>
+          <a:p>
+            <a:r>
+              <a:rPr lang="en-US" sz="1400" dirty="0"/>
+              <a:t>    - rotate picture, and learn to predict original picture</a:t>
+            </a:r>
+          </a:p>
+        </p:txBody>
+      </p:sp>
+      <p:sp>
+        <p:nvSpPr>
+          <p:cNvPr id="7" name="TextBox 6">
+            <a:extLst>
+              <a:ext uri="{FF2B5EF4-FFF2-40B4-BE49-F238E27FC236}">
+                <a16:creationId xmlns:a16="http://schemas.microsoft.com/office/drawing/2014/main" id="{AFB6E498-6659-5141-9191-AFF862132421}"/>
+              </a:ext>
+            </a:extLst>
+          </p:cNvPr>
+          <p:cNvSpPr txBox="1"/>
+          <p:nvPr/>
+        </p:nvSpPr>
+        <p:spPr>
+          <a:xfrm>
+            <a:off x="8272169" y="4301476"/>
+            <a:ext cx="4066135" cy="830997"/>
+          </a:xfrm>
+          <a:prstGeom prst="rect">
+            <a:avLst/>
+          </a:prstGeom>
+          <a:noFill/>
+        </p:spPr>
+        <p:txBody>
+          <a:bodyPr wrap="square" rtlCol="0">
+            <a:spAutoFit/>
+          </a:bodyPr>
+          <a:lstStyle/>
+          <a:p>
+            <a:r>
+              <a:rPr lang="en-US" sz="1200" b="1" dirty="0">
+                <a:solidFill>
+                  <a:srgbClr val="FF0000"/>
+                </a:solidFill>
+              </a:rPr>
+              <a:t>LIME Framework</a:t>
+            </a:r>
+          </a:p>
+          <a:p>
+            <a:r>
+              <a:rPr lang="en-US" sz="1200" dirty="0"/>
+              <a:t>Interpretable Machine Learning Using LIME Framework </a:t>
+            </a:r>
+            <a:br>
+              <a:rPr lang="en-US" sz="1200" dirty="0"/>
+            </a:br>
+            <a:r>
+              <a:rPr lang="en-US" sz="1200" dirty="0"/>
+              <a:t>by Kasia </a:t>
+            </a:r>
+            <a:r>
+              <a:rPr lang="en-US" sz="1200" dirty="0" err="1"/>
+              <a:t>Kulma</a:t>
+            </a:r>
+            <a:r>
+              <a:rPr lang="en-US" sz="1200" dirty="0"/>
+              <a:t> (PhD), Data Scientist, Aviva - 2017</a:t>
+            </a:r>
+          </a:p>
+          <a:p>
+            <a:r>
+              <a:rPr lang="en-US" sz="1200" dirty="0"/>
+              <a:t>- </a:t>
+            </a:r>
+            <a:r>
+              <a:rPr lang="en-US" sz="1200" dirty="0">
+                <a:hlinkClick r:id="rId5"/>
+              </a:rPr>
+              <a:t>https://www.youtube.com/watch?v=CY3t11vuuOM</a:t>
+            </a:r>
+            <a:r>
+              <a:rPr lang="en-US" sz="1200" dirty="0"/>
+              <a:t> </a:t>
+            </a:r>
+          </a:p>
+        </p:txBody>
+      </p:sp>
+    </p:spTree>
+    <p:extLst>
+      <p:ext uri="{BB962C8B-B14F-4D97-AF65-F5344CB8AC3E}">
+        <p14:creationId xmlns:p14="http://schemas.microsoft.com/office/powerpoint/2010/main" val="3360333779"/>
+      </p:ext>
+    </p:extLst>
+  </p:cSld>
+  <p:clrMapOvr>
+    <a:masterClrMapping/>
+  </p:clrMapOvr>
+</p:sld>
+</file>
+
+<file path=ppt/slides/slide11.xml><?xml version="1.0" encoding="utf-8"?>
+<p:sld xmlns:a="http://schemas.openxmlformats.org/drawingml/2006/main" xmlns:r="http://schemas.openxmlformats.org/officeDocument/2006/relationships" xmlns:p="http://schemas.openxmlformats.org/presentationml/2006/main">
+  <p:cSld>
+    <p:spTree>
+      <p:nvGrpSpPr>
+        <p:cNvPr id="1" name=""/>
+        <p:cNvGrpSpPr/>
+        <p:nvPr/>
+      </p:nvGrpSpPr>
+      <p:grpSpPr>
+        <a:xfrm>
+          <a:off x="0" y="0"/>
+          <a:ext cx="0" cy="0"/>
+          <a:chOff x="0" y="0"/>
+          <a:chExt cx="0" cy="0"/>
+        </a:xfrm>
+      </p:grpSpPr>
+      <p:sp>
+        <p:nvSpPr>
+          <p:cNvPr id="2" name="TextBox 1">
+            <a:extLst>
+              <a:ext uri="{FF2B5EF4-FFF2-40B4-BE49-F238E27FC236}">
+                <a16:creationId xmlns:a16="http://schemas.microsoft.com/office/drawing/2014/main" id="{E3BCC4D4-9766-DE43-84A1-1155AD497BAB}"/>
+              </a:ext>
+            </a:extLst>
+          </p:cNvPr>
+          <p:cNvSpPr txBox="1"/>
+          <p:nvPr/>
+        </p:nvSpPr>
+        <p:spPr>
+          <a:xfrm>
+            <a:off x="2351974" y="987438"/>
+            <a:ext cx="4182938" cy="954107"/>
+          </a:xfrm>
+          <a:prstGeom prst="rect">
+            <a:avLst/>
+          </a:prstGeom>
+          <a:noFill/>
+        </p:spPr>
+        <p:txBody>
+          <a:bodyPr wrap="square" rtlCol="0">
+            <a:spAutoFit/>
+          </a:bodyPr>
+          <a:lstStyle/>
+          <a:p>
+            <a:r>
+              <a:rPr lang="en-US" sz="1400" dirty="0"/>
+              <a:t>The </a:t>
+            </a:r>
+            <a:r>
+              <a:rPr lang="en-US" sz="1400" b="1" dirty="0">
+                <a:solidFill>
+                  <a:srgbClr val="FF0000"/>
+                </a:solidFill>
+              </a:rPr>
+              <a:t>Shapley Value</a:t>
+            </a:r>
+            <a:r>
+              <a:rPr lang="en-US" sz="1400" dirty="0"/>
+              <a:t>, coined by Lloyd Shapley (1953), </a:t>
+            </a:r>
+          </a:p>
+          <a:p>
+            <a:r>
+              <a:rPr lang="en-US" sz="1400" dirty="0"/>
+              <a:t>is a method for assigning payouts to players </a:t>
+            </a:r>
+          </a:p>
+          <a:p>
+            <a:r>
+              <a:rPr lang="en-US" sz="1400" dirty="0"/>
+              <a:t>depending on their contribution to the total </a:t>
+            </a:r>
+          </a:p>
+          <a:p>
+            <a:r>
+              <a:rPr lang="en-US" sz="1400" dirty="0"/>
+              <a:t>payout - </a:t>
+            </a:r>
+            <a:r>
+              <a:rPr lang="en-US" sz="1400" dirty="0">
+                <a:hlinkClick r:id="rId2"/>
+              </a:rPr>
+              <a:t>https://en.wikipedia.org/wiki/Lloyd_Shapley</a:t>
+            </a:r>
+            <a:r>
+              <a:rPr lang="en-US" sz="1400" dirty="0"/>
+              <a:t> </a:t>
+            </a:r>
+          </a:p>
+        </p:txBody>
+      </p:sp>
+      <p:sp>
+        <p:nvSpPr>
+          <p:cNvPr id="3" name="TextBox 2">
+            <a:extLst>
+              <a:ext uri="{FF2B5EF4-FFF2-40B4-BE49-F238E27FC236}">
+                <a16:creationId xmlns:a16="http://schemas.microsoft.com/office/drawing/2014/main" id="{538DAFCA-D339-7E4B-A4CF-82E1792EEBDE}"/>
+              </a:ext>
+            </a:extLst>
+          </p:cNvPr>
+          <p:cNvSpPr txBox="1"/>
+          <p:nvPr/>
+        </p:nvSpPr>
+        <p:spPr>
+          <a:xfrm>
+            <a:off x="145984" y="19735"/>
+            <a:ext cx="8888288" cy="523220"/>
+          </a:xfrm>
+          <a:prstGeom prst="rect">
+            <a:avLst/>
+          </a:prstGeom>
+          <a:noFill/>
+        </p:spPr>
+        <p:txBody>
+          <a:bodyPr wrap="square" rtlCol="0">
+            <a:spAutoFit/>
+          </a:bodyPr>
+          <a:lstStyle/>
+          <a:p>
+            <a:r>
+              <a:rPr lang="en-US" sz="2800" b="1" dirty="0"/>
+              <a:t>Shapley Value and SHAP (</a:t>
+            </a:r>
+            <a:r>
+              <a:rPr lang="en-US" sz="2800" b="1" dirty="0" err="1"/>
+              <a:t>SHapley</a:t>
+            </a:r>
+            <a:r>
+              <a:rPr lang="en-US" sz="2800" b="1" dirty="0"/>
+              <a:t> Additive </a:t>
+            </a:r>
+            <a:r>
+              <a:rPr lang="en-US" sz="2800" b="1" dirty="0" err="1"/>
+              <a:t>exPlanations</a:t>
+            </a:r>
+            <a:r>
+              <a:rPr lang="en-US" sz="2800" b="1" dirty="0"/>
+              <a:t>)</a:t>
+            </a:r>
+            <a:endParaRPr lang="el-GR" sz="2800" b="1" dirty="0">
+              <a:solidFill>
+                <a:srgbClr val="0070C0"/>
+              </a:solidFill>
+            </a:endParaRPr>
+          </a:p>
+        </p:txBody>
+      </p:sp>
+      <p:pic>
+        <p:nvPicPr>
+          <p:cNvPr id="2050" name="Picture 2" descr="Lloyd S. Shapley, Nobel Laureate in Economics, Dies at 92 | RAND">
+            <a:extLst>
+              <a:ext uri="{FF2B5EF4-FFF2-40B4-BE49-F238E27FC236}">
+                <a16:creationId xmlns:a16="http://schemas.microsoft.com/office/drawing/2014/main" id="{C93D0DE9-2692-6748-B031-DA8A5776A15F}"/>
+              </a:ext>
+            </a:extLst>
+          </p:cNvPr>
+          <p:cNvPicPr>
+            <a:picLocks noChangeAspect="1" noChangeArrowheads="1"/>
+          </p:cNvPicPr>
+          <p:nvPr/>
+        </p:nvPicPr>
+        <p:blipFill rotWithShape="1">
+          <a:blip r:embed="rId3" cstate="email">
+            <a:extLst>
+              <a:ext uri="{28A0092B-C50C-407E-A947-70E740481C1C}">
+                <a14:useLocalDpi xmlns:a14="http://schemas.microsoft.com/office/drawing/2010/main"/>
+              </a:ext>
+            </a:extLst>
+          </a:blip>
+          <a:srcRect/>
+          <a:stretch/>
+        </p:blipFill>
+        <p:spPr bwMode="auto">
+          <a:xfrm>
+            <a:off x="834101" y="674535"/>
+            <a:ext cx="1133856" cy="1622234"/>
+          </a:xfrm>
+          <a:prstGeom prst="rect">
+            <a:avLst/>
+          </a:prstGeom>
+          <a:noFill/>
+          <a:extLst>
+            <a:ext uri="{909E8E84-426E-40DD-AFC4-6F175D3DCCD1}">
+              <a14:hiddenFill xmlns:a14="http://schemas.microsoft.com/office/drawing/2010/main">
+                <a:solidFill>
+                  <a:srgbClr val="FFFFFF"/>
+                </a:solidFill>
+              </a14:hiddenFill>
+            </a:ext>
+          </a:extLst>
+        </p:spPr>
+      </p:pic>
+      <p:sp>
+        <p:nvSpPr>
+          <p:cNvPr id="4" name="TextBox 3">
+            <a:extLst>
+              <a:ext uri="{FF2B5EF4-FFF2-40B4-BE49-F238E27FC236}">
+                <a16:creationId xmlns:a16="http://schemas.microsoft.com/office/drawing/2014/main" id="{7A91226F-C0C4-2846-81D7-B28ECEE818A6}"/>
+              </a:ext>
+            </a:extLst>
+          </p:cNvPr>
+          <p:cNvSpPr txBox="1"/>
+          <p:nvPr/>
+        </p:nvSpPr>
+        <p:spPr>
+          <a:xfrm>
+            <a:off x="145984" y="2345306"/>
+            <a:ext cx="2462401" cy="954107"/>
+          </a:xfrm>
+          <a:prstGeom prst="rect">
+            <a:avLst/>
+          </a:prstGeom>
+          <a:noFill/>
+        </p:spPr>
+        <p:txBody>
+          <a:bodyPr wrap="square" rtlCol="0">
+            <a:spAutoFit/>
+          </a:bodyPr>
+          <a:lstStyle/>
+          <a:p>
+            <a:pPr algn="ctr"/>
+            <a:r>
+              <a:rPr lang="en-US" sz="1400" b="1" dirty="0">
+                <a:solidFill>
+                  <a:srgbClr val="FF0000"/>
+                </a:solidFill>
+              </a:rPr>
+              <a:t>Lloyd Stowell Shapley</a:t>
+            </a:r>
+          </a:p>
+          <a:p>
+            <a:pPr algn="ctr"/>
+            <a:r>
+              <a:rPr lang="en-US" sz="1400" dirty="0"/>
+              <a:t>1923 - 2016</a:t>
+            </a:r>
+          </a:p>
+          <a:p>
+            <a:pPr algn="ctr"/>
+            <a:r>
+              <a:rPr lang="en-US" sz="1400" dirty="0"/>
+              <a:t>American mathematician and Nobel Prize-winning economist</a:t>
+            </a:r>
+          </a:p>
+        </p:txBody>
+      </p:sp>
+      <p:pic>
+        <p:nvPicPr>
+          <p:cNvPr id="5" name="Picture 4">
+            <a:extLst>
+              <a:ext uri="{FF2B5EF4-FFF2-40B4-BE49-F238E27FC236}">
+                <a16:creationId xmlns:a16="http://schemas.microsoft.com/office/drawing/2014/main" id="{3E270533-5493-AB45-87F5-E108AFAD3DF1}"/>
+              </a:ext>
+            </a:extLst>
+          </p:cNvPr>
+          <p:cNvPicPr>
+            <a:picLocks noChangeAspect="1"/>
+          </p:cNvPicPr>
+          <p:nvPr/>
+        </p:nvPicPr>
+        <p:blipFill rotWithShape="1">
+          <a:blip r:embed="rId4" cstate="email">
+            <a:extLst>
+              <a:ext uri="{28A0092B-C50C-407E-A947-70E740481C1C}">
+                <a14:useLocalDpi xmlns:a14="http://schemas.microsoft.com/office/drawing/2010/main"/>
+              </a:ext>
+            </a:extLst>
+          </a:blip>
+          <a:srcRect/>
+          <a:stretch/>
+        </p:blipFill>
+        <p:spPr>
+          <a:xfrm>
+            <a:off x="3303652" y="3918958"/>
+            <a:ext cx="1292352" cy="1622234"/>
+          </a:xfrm>
+          <a:prstGeom prst="rect">
+            <a:avLst/>
+          </a:prstGeom>
+        </p:spPr>
+      </p:pic>
+      <p:sp>
+        <p:nvSpPr>
+          <p:cNvPr id="6" name="TextBox 5">
+            <a:extLst>
+              <a:ext uri="{FF2B5EF4-FFF2-40B4-BE49-F238E27FC236}">
+                <a16:creationId xmlns:a16="http://schemas.microsoft.com/office/drawing/2014/main" id="{097938B6-8AD1-9841-B607-D0FC6858A390}"/>
+              </a:ext>
+            </a:extLst>
+          </p:cNvPr>
+          <p:cNvSpPr txBox="1"/>
+          <p:nvPr/>
+        </p:nvSpPr>
+        <p:spPr>
+          <a:xfrm>
+            <a:off x="2657858" y="5541192"/>
+            <a:ext cx="2462402" cy="1107996"/>
+          </a:xfrm>
+          <a:prstGeom prst="rect">
+            <a:avLst/>
+          </a:prstGeom>
+          <a:noFill/>
+        </p:spPr>
+        <p:txBody>
+          <a:bodyPr wrap="square" rtlCol="0">
+            <a:spAutoFit/>
+          </a:bodyPr>
+          <a:lstStyle/>
+          <a:p>
+            <a:pPr algn="ctr"/>
+            <a:r>
+              <a:rPr lang="en-US" sz="1400" b="1" dirty="0">
+                <a:solidFill>
+                  <a:srgbClr val="FF0000"/>
+                </a:solidFill>
+              </a:rPr>
+              <a:t>Scott Lundberg</a:t>
+            </a:r>
+          </a:p>
+          <a:p>
+            <a:pPr algn="ctr"/>
+            <a:r>
+              <a:rPr lang="en-US" sz="1400" dirty="0"/>
+              <a:t>Univ. of Washington</a:t>
+            </a:r>
+          </a:p>
+          <a:p>
+            <a:pPr algn="ctr"/>
+            <a:r>
+              <a:rPr lang="en-US" sz="1400" dirty="0"/>
+              <a:t>Microsoft</a:t>
+            </a:r>
+          </a:p>
+          <a:p>
+            <a:pPr algn="ctr"/>
+            <a:r>
+              <a:rPr lang="en-US" sz="1200" dirty="0">
+                <a:hlinkClick r:id="rId5"/>
+              </a:rPr>
+              <a:t>https://scottlundberg.com/</a:t>
+            </a:r>
+            <a:r>
+              <a:rPr lang="en-US" sz="1200" dirty="0"/>
+              <a:t> </a:t>
+            </a:r>
+          </a:p>
+          <a:p>
+            <a:pPr algn="ctr"/>
+            <a:r>
+              <a:rPr lang="en-US" sz="1200" dirty="0">
+                <a:hlinkClick r:id="rId6"/>
+              </a:rPr>
+              <a:t>https://github.com/slundberg/shap</a:t>
+            </a:r>
+            <a:r>
+              <a:rPr lang="en-US" sz="1200" dirty="0"/>
+              <a:t>  </a:t>
+            </a:r>
+          </a:p>
+        </p:txBody>
+      </p:sp>
+      <p:pic>
+        <p:nvPicPr>
+          <p:cNvPr id="2052" name="Picture 4" descr="Su-In Lee | UW College of Engineering">
+            <a:extLst>
+              <a:ext uri="{FF2B5EF4-FFF2-40B4-BE49-F238E27FC236}">
+                <a16:creationId xmlns:a16="http://schemas.microsoft.com/office/drawing/2014/main" id="{995F5233-AFD1-2E45-B6A1-B556C7E5C84E}"/>
+              </a:ext>
+            </a:extLst>
+          </p:cNvPr>
+          <p:cNvPicPr>
+            <a:picLocks noChangeAspect="1" noChangeArrowheads="1"/>
+          </p:cNvPicPr>
+          <p:nvPr/>
+        </p:nvPicPr>
+        <p:blipFill rotWithShape="1">
+          <a:blip r:embed="rId7" cstate="email">
+            <a:extLst>
+              <a:ext uri="{28A0092B-C50C-407E-A947-70E740481C1C}">
+                <a14:useLocalDpi xmlns:a14="http://schemas.microsoft.com/office/drawing/2010/main"/>
+              </a:ext>
+            </a:extLst>
+          </a:blip>
+          <a:srcRect/>
+          <a:stretch/>
+        </p:blipFill>
+        <p:spPr bwMode="auto">
+          <a:xfrm>
+            <a:off x="5400676" y="3918958"/>
+            <a:ext cx="1194816" cy="1536755"/>
+          </a:xfrm>
+          <a:prstGeom prst="rect">
+            <a:avLst/>
+          </a:prstGeom>
+          <a:noFill/>
+          <a:extLst>
+            <a:ext uri="{909E8E84-426E-40DD-AFC4-6F175D3DCCD1}">
+              <a14:hiddenFill xmlns:a14="http://schemas.microsoft.com/office/drawing/2010/main">
+                <a:solidFill>
+                  <a:srgbClr val="FFFFFF"/>
+                </a:solidFill>
+              </a14:hiddenFill>
+            </a:ext>
+          </a:extLst>
+        </p:spPr>
+      </p:pic>
+      <p:sp>
+        <p:nvSpPr>
+          <p:cNvPr id="9" name="TextBox 8">
+            <a:extLst>
+              <a:ext uri="{FF2B5EF4-FFF2-40B4-BE49-F238E27FC236}">
+                <a16:creationId xmlns:a16="http://schemas.microsoft.com/office/drawing/2014/main" id="{AA809280-CAA8-3E4A-945F-D61C70E8772E}"/>
+              </a:ext>
+            </a:extLst>
+          </p:cNvPr>
+          <p:cNvSpPr txBox="1"/>
+          <p:nvPr/>
+        </p:nvSpPr>
+        <p:spPr>
+          <a:xfrm>
+            <a:off x="4765548" y="5541192"/>
+            <a:ext cx="2524887" cy="677108"/>
+          </a:xfrm>
+          <a:prstGeom prst="rect">
+            <a:avLst/>
+          </a:prstGeom>
+          <a:noFill/>
+        </p:spPr>
+        <p:txBody>
+          <a:bodyPr wrap="square" rtlCol="0">
+            <a:spAutoFit/>
+          </a:bodyPr>
+          <a:lstStyle/>
+          <a:p>
+            <a:pPr algn="ctr"/>
+            <a:r>
+              <a:rPr lang="en-US" sz="1400" b="1" dirty="0" err="1">
+                <a:solidFill>
+                  <a:srgbClr val="FF0000"/>
+                </a:solidFill>
+              </a:rPr>
+              <a:t>Su</a:t>
+            </a:r>
+            <a:r>
+              <a:rPr lang="en-US" sz="1400" b="1" dirty="0">
+                <a:solidFill>
+                  <a:srgbClr val="FF0000"/>
+                </a:solidFill>
+              </a:rPr>
+              <a:t>-In Lee</a:t>
+            </a:r>
+          </a:p>
+          <a:p>
+            <a:pPr algn="ctr"/>
+            <a:r>
+              <a:rPr lang="en-US" sz="1200" dirty="0"/>
+              <a:t>Computer Science &amp; Engineering</a:t>
+            </a:r>
+          </a:p>
+          <a:p>
+            <a:pPr algn="ctr"/>
+            <a:r>
+              <a:rPr lang="en-US" sz="1200" dirty="0"/>
+              <a:t>Univ. of Washington</a:t>
+            </a:r>
+          </a:p>
+        </p:txBody>
+      </p:sp>
+      <p:sp>
+        <p:nvSpPr>
+          <p:cNvPr id="10" name="TextBox 9">
+            <a:extLst>
+              <a:ext uri="{FF2B5EF4-FFF2-40B4-BE49-F238E27FC236}">
+                <a16:creationId xmlns:a16="http://schemas.microsoft.com/office/drawing/2014/main" id="{0AAE13E0-7676-7644-B5D6-E96361547722}"/>
+              </a:ext>
+            </a:extLst>
+          </p:cNvPr>
+          <p:cNvSpPr txBox="1"/>
+          <p:nvPr/>
+        </p:nvSpPr>
+        <p:spPr>
+          <a:xfrm>
+            <a:off x="7497700" y="3591423"/>
+            <a:ext cx="4926270" cy="2893100"/>
+          </a:xfrm>
+          <a:prstGeom prst="rect">
+            <a:avLst/>
+          </a:prstGeom>
+          <a:noFill/>
+        </p:spPr>
+        <p:txBody>
+          <a:bodyPr wrap="square" rtlCol="0">
+            <a:spAutoFit/>
+          </a:bodyPr>
+          <a:lstStyle/>
+          <a:p>
+            <a:r>
+              <a:rPr lang="en-US" sz="1400" b="1" dirty="0">
+                <a:solidFill>
+                  <a:srgbClr val="FF0000"/>
+                </a:solidFill>
+              </a:rPr>
+              <a:t>SHAP (</a:t>
+            </a:r>
+            <a:r>
+              <a:rPr lang="en-US" sz="1400" b="1" dirty="0" err="1">
+                <a:solidFill>
+                  <a:srgbClr val="FF0000"/>
+                </a:solidFill>
+              </a:rPr>
+              <a:t>SHapley</a:t>
+            </a:r>
+            <a:r>
+              <a:rPr lang="en-US" sz="1400" b="1" dirty="0">
+                <a:solidFill>
+                  <a:srgbClr val="FF0000"/>
+                </a:solidFill>
+              </a:rPr>
+              <a:t> Additive </a:t>
+            </a:r>
+            <a:r>
+              <a:rPr lang="en-US" sz="1400" b="1" dirty="0" err="1">
+                <a:solidFill>
+                  <a:srgbClr val="FF0000"/>
+                </a:solidFill>
+              </a:rPr>
+              <a:t>exPlanations</a:t>
+            </a:r>
+            <a:r>
+              <a:rPr lang="en-US" sz="1400" b="1" dirty="0">
+                <a:solidFill>
+                  <a:srgbClr val="FF0000"/>
+                </a:solidFill>
+              </a:rPr>
+              <a:t>)</a:t>
+            </a:r>
+            <a:r>
+              <a:rPr lang="en-US" sz="1400" dirty="0"/>
+              <a:t> </a:t>
+            </a:r>
+          </a:p>
+          <a:p>
+            <a:r>
+              <a:rPr lang="en-US" sz="1400" dirty="0"/>
+              <a:t>by Lundberg and Lee (2016) </a:t>
+            </a:r>
+          </a:p>
+          <a:p>
+            <a:r>
+              <a:rPr lang="en-US" sz="1400" dirty="0"/>
+              <a:t>is a method to explain individual predictions.</a:t>
+            </a:r>
+          </a:p>
+          <a:p>
+            <a:endParaRPr lang="en-US" sz="1400" dirty="0"/>
+          </a:p>
+          <a:p>
+            <a:r>
+              <a:rPr lang="en-US" sz="1400" b="1" dirty="0">
+                <a:solidFill>
+                  <a:srgbClr val="FF0000"/>
+                </a:solidFill>
+              </a:rPr>
+              <a:t>SHAP</a:t>
+            </a:r>
+            <a:r>
+              <a:rPr lang="en-US" sz="1400" dirty="0"/>
+              <a:t> authors proposed </a:t>
+            </a:r>
+            <a:r>
+              <a:rPr lang="en-US" sz="1400" b="1" dirty="0" err="1">
+                <a:solidFill>
+                  <a:srgbClr val="FF0000"/>
+                </a:solidFill>
+              </a:rPr>
+              <a:t>KernelSHAP</a:t>
+            </a:r>
+            <a:r>
+              <a:rPr lang="en-US" sz="1400" dirty="0"/>
+              <a:t>, an alternative, </a:t>
+            </a:r>
+          </a:p>
+          <a:p>
+            <a:r>
+              <a:rPr lang="en-US" sz="1400" dirty="0"/>
+              <a:t>kernel-based estimation approach for Shapley values </a:t>
+            </a:r>
+          </a:p>
+          <a:p>
+            <a:r>
+              <a:rPr lang="en-US" sz="1400" dirty="0"/>
+              <a:t>inspired by local surrogate models. </a:t>
+            </a:r>
+          </a:p>
+          <a:p>
+            <a:endParaRPr lang="en-US" sz="1400" dirty="0"/>
+          </a:p>
+          <a:p>
+            <a:r>
+              <a:rPr lang="en-US" sz="1400" dirty="0"/>
+              <a:t>And they proposed </a:t>
+            </a:r>
+            <a:r>
+              <a:rPr lang="en-US" sz="1400" b="1" dirty="0" err="1">
+                <a:solidFill>
+                  <a:srgbClr val="FF0000"/>
+                </a:solidFill>
+              </a:rPr>
+              <a:t>TreeSHAP</a:t>
+            </a:r>
+            <a:r>
+              <a:rPr lang="en-US" sz="1400" dirty="0"/>
+              <a:t>, </a:t>
+            </a:r>
+          </a:p>
+          <a:p>
+            <a:r>
+              <a:rPr lang="en-US" sz="1400" dirty="0"/>
+              <a:t>an efficient estimation approach for tree-based models. </a:t>
+            </a:r>
+          </a:p>
+          <a:p>
+            <a:endParaRPr lang="en-US" sz="1400" dirty="0"/>
+          </a:p>
+          <a:p>
+            <a:r>
+              <a:rPr lang="en-US" sz="1400" dirty="0"/>
+              <a:t>Also, </a:t>
+            </a:r>
+            <a:r>
+              <a:rPr lang="en-US" sz="1400" b="1" dirty="0">
+                <a:solidFill>
+                  <a:srgbClr val="FF0000"/>
+                </a:solidFill>
+              </a:rPr>
+              <a:t>SHAP</a:t>
+            </a:r>
+            <a:r>
+              <a:rPr lang="en-US" sz="1400" dirty="0"/>
+              <a:t> comes with many global interpretation </a:t>
+            </a:r>
+          </a:p>
+          <a:p>
+            <a:r>
+              <a:rPr lang="en-US" sz="1400" dirty="0"/>
+              <a:t>methods based on aggregations of </a:t>
+            </a:r>
+            <a:r>
+              <a:rPr lang="en-US" sz="1400" b="1" dirty="0">
+                <a:solidFill>
+                  <a:srgbClr val="FF0000"/>
+                </a:solidFill>
+              </a:rPr>
+              <a:t>Shapley</a:t>
+            </a:r>
+            <a:r>
+              <a:rPr lang="en-US" sz="1400" dirty="0"/>
+              <a:t> values.</a:t>
+            </a:r>
+          </a:p>
+        </p:txBody>
+      </p:sp>
+      <p:pic>
+        <p:nvPicPr>
+          <p:cNvPr id="2054" name="Picture 6" descr="Explain Your Model with the SHAP Values | by Dr. Dataman | Towards Data  Science">
+            <a:extLst>
+              <a:ext uri="{FF2B5EF4-FFF2-40B4-BE49-F238E27FC236}">
+                <a16:creationId xmlns:a16="http://schemas.microsoft.com/office/drawing/2014/main" id="{48224121-4A7A-144D-8F02-E8F3864410BB}"/>
+              </a:ext>
+            </a:extLst>
+          </p:cNvPr>
+          <p:cNvPicPr>
+            <a:picLocks noChangeAspect="1" noChangeArrowheads="1"/>
+          </p:cNvPicPr>
+          <p:nvPr/>
+        </p:nvPicPr>
+        <p:blipFill>
+          <a:blip r:embed="rId8" cstate="email">
+            <a:extLst>
+              <a:ext uri="{28A0092B-C50C-407E-A947-70E740481C1C}">
+                <a14:useLocalDpi xmlns:a14="http://schemas.microsoft.com/office/drawing/2010/main"/>
+              </a:ext>
+            </a:extLst>
+          </a:blip>
+          <a:srcRect/>
+          <a:stretch>
+            <a:fillRect/>
+          </a:stretch>
+        </p:blipFill>
+        <p:spPr bwMode="auto">
+          <a:xfrm>
+            <a:off x="8105327" y="1043537"/>
+            <a:ext cx="3252572" cy="2047304"/>
+          </a:xfrm>
+          <a:prstGeom prst="rect">
+            <a:avLst/>
+          </a:prstGeom>
+          <a:noFill/>
+          <a:extLst>
+            <a:ext uri="{909E8E84-426E-40DD-AFC4-6F175D3DCCD1}">
+              <a14:hiddenFill xmlns:a14="http://schemas.microsoft.com/office/drawing/2010/main">
+                <a:solidFill>
+                  <a:srgbClr val="FFFFFF"/>
+                </a:solidFill>
+              </a14:hiddenFill>
+            </a:ext>
+          </a:extLst>
+        </p:spPr>
+      </p:pic>
+    </p:spTree>
+    <p:extLst>
+      <p:ext uri="{BB962C8B-B14F-4D97-AF65-F5344CB8AC3E}">
+        <p14:creationId xmlns:p14="http://schemas.microsoft.com/office/powerpoint/2010/main" val="3532945109"/>
+      </p:ext>
+    </p:extLst>
+  </p:cSld>
+  <p:clrMapOvr>
+    <a:masterClrMapping/>
+  </p:clrMapOvr>
+</p:sld>
+</file>
+
+<file path=ppt/slides/slide12.xml><?xml version="1.0" encoding="utf-8"?>
+<p:sld xmlns:a="http://schemas.openxmlformats.org/drawingml/2006/main" xmlns:r="http://schemas.openxmlformats.org/officeDocument/2006/relationships" xmlns:p="http://schemas.openxmlformats.org/presentationml/2006/main">
+  <p:cSld>
+    <p:spTree>
+      <p:nvGrpSpPr>
+        <p:cNvPr id="1" name=""/>
+        <p:cNvGrpSpPr/>
+        <p:nvPr/>
+      </p:nvGrpSpPr>
+      <p:grpSpPr>
+        <a:xfrm>
+          <a:off x="0" y="0"/>
+          <a:ext cx="0" cy="0"/>
+          <a:chOff x="0" y="0"/>
+          <a:chExt cx="0" cy="0"/>
+        </a:xfrm>
+      </p:grpSpPr>
+      <p:sp>
+        <p:nvSpPr>
+          <p:cNvPr id="4" name="TextBox 3">
+            <a:extLst>
+              <a:ext uri="{FF2B5EF4-FFF2-40B4-BE49-F238E27FC236}">
+                <a16:creationId xmlns:a16="http://schemas.microsoft.com/office/drawing/2014/main" id="{D1E58F78-8F27-2D4A-BD36-154CD23B3E50}"/>
+              </a:ext>
+            </a:extLst>
+          </p:cNvPr>
+          <p:cNvSpPr txBox="1"/>
+          <p:nvPr/>
+        </p:nvSpPr>
+        <p:spPr>
+          <a:xfrm>
+            <a:off x="0" y="0"/>
+            <a:ext cx="3135086" cy="523220"/>
+          </a:xfrm>
+          <a:prstGeom prst="rect">
+            <a:avLst/>
+          </a:prstGeom>
+          <a:noFill/>
+        </p:spPr>
+        <p:txBody>
+          <a:bodyPr wrap="square" rtlCol="0">
+            <a:spAutoFit/>
+          </a:bodyPr>
+          <a:lstStyle/>
+          <a:p>
+            <a:r>
+              <a:rPr lang="en-US" sz="2800" b="1" dirty="0"/>
+              <a:t>More Resources</a:t>
+            </a:r>
+            <a:endParaRPr lang="el-GR" sz="2800" b="1" dirty="0">
+              <a:solidFill>
+                <a:srgbClr val="0070C0"/>
+              </a:solidFill>
+            </a:endParaRPr>
+          </a:p>
+        </p:txBody>
+      </p:sp>
+      <p:sp>
+        <p:nvSpPr>
+          <p:cNvPr id="2" name="TextBox 1">
+            <a:extLst>
+              <a:ext uri="{FF2B5EF4-FFF2-40B4-BE49-F238E27FC236}">
+                <a16:creationId xmlns:a16="http://schemas.microsoft.com/office/drawing/2014/main" id="{F14F1150-0EE7-4D40-865A-EF7356C76267}"/>
+              </a:ext>
+            </a:extLst>
+          </p:cNvPr>
+          <p:cNvSpPr txBox="1"/>
+          <p:nvPr/>
+        </p:nvSpPr>
+        <p:spPr>
+          <a:xfrm>
+            <a:off x="562096" y="1181500"/>
+            <a:ext cx="10683837" cy="2677656"/>
+          </a:xfrm>
+          <a:prstGeom prst="rect">
+            <a:avLst/>
+          </a:prstGeom>
+          <a:noFill/>
+        </p:spPr>
+        <p:txBody>
+          <a:bodyPr wrap="square" rtlCol="0">
+            <a:spAutoFit/>
+          </a:bodyPr>
+          <a:lstStyle/>
+          <a:p>
+            <a:pPr marL="285750" indent="-285750">
+              <a:buFont typeface="Arial" panose="020B0604020202020204" pitchFamily="34" charset="0"/>
+              <a:buChar char="•"/>
+            </a:pPr>
+            <a:r>
+              <a:rPr lang="en-US" sz="1400" dirty="0">
+                <a:hlinkClick r:id="rId2"/>
+              </a:rPr>
+              <a:t>https://stackoverflow.com/questions/65472200/when-should-data-binning-be-used-in-data-processing</a:t>
+            </a:r>
+            <a:r>
+              <a:rPr lang="en-US" sz="1400" dirty="0"/>
+              <a:t> </a:t>
+            </a:r>
+          </a:p>
+          <a:p>
+            <a:pPr marL="285750" indent="-285750">
+              <a:buFont typeface="Arial" panose="020B0604020202020204" pitchFamily="34" charset="0"/>
+              <a:buChar char="•"/>
+            </a:pPr>
+            <a:r>
+              <a:rPr lang="en-US" sz="1400" dirty="0">
+                <a:hlinkClick r:id="rId3"/>
+              </a:rPr>
+              <a:t>https://docs.tibco.com/pub/spotfire/7.0.1/doc/html/bin/bin_what_is_binning.htm</a:t>
+            </a:r>
+            <a:r>
+              <a:rPr lang="en-US" sz="1400" dirty="0"/>
+              <a:t> </a:t>
+            </a:r>
+          </a:p>
+          <a:p>
+            <a:pPr marL="285750" indent="-285750">
+              <a:buFont typeface="Arial" panose="020B0604020202020204" pitchFamily="34" charset="0"/>
+              <a:buChar char="•"/>
+            </a:pPr>
+            <a:r>
+              <a:rPr lang="en-US" sz="1400" dirty="0">
+                <a:hlinkClick r:id="rId4"/>
+              </a:rPr>
+              <a:t>https://cxl.com/blog/outliers/</a:t>
+            </a:r>
+            <a:r>
+              <a:rPr lang="en-US" sz="1400" dirty="0"/>
+              <a:t> </a:t>
+            </a:r>
+          </a:p>
+          <a:p>
+            <a:pPr marL="285750" indent="-285750">
+              <a:buFont typeface="Arial" panose="020B0604020202020204" pitchFamily="34" charset="0"/>
+              <a:buChar char="•"/>
+            </a:pPr>
+            <a:r>
+              <a:rPr lang="en-US" sz="1400" dirty="0">
+                <a:hlinkClick r:id="rId5"/>
+              </a:rPr>
+              <a:t>https://en.wikipedia.org/wiki/Data_binning</a:t>
+            </a:r>
+            <a:r>
+              <a:rPr lang="en-US" sz="1400" dirty="0"/>
+              <a:t> </a:t>
+            </a:r>
+          </a:p>
+          <a:p>
+            <a:pPr marL="285750" indent="-285750">
+              <a:buFont typeface="Arial" panose="020B0604020202020204" pitchFamily="34" charset="0"/>
+              <a:buChar char="•"/>
+            </a:pPr>
+            <a:r>
+              <a:rPr lang="en-US" sz="1400" dirty="0">
+                <a:hlinkClick r:id="rId6"/>
+              </a:rPr>
+              <a:t>https://www.simplypsychology.org/boxplots.html</a:t>
+            </a:r>
+            <a:r>
+              <a:rPr lang="en-US" sz="1400" dirty="0"/>
+              <a:t> </a:t>
+            </a:r>
+          </a:p>
+          <a:p>
+            <a:pPr marL="285750" indent="-285750">
+              <a:buFont typeface="Arial" panose="020B0604020202020204" pitchFamily="34" charset="0"/>
+              <a:buChar char="•"/>
+            </a:pPr>
+            <a:r>
+              <a:rPr lang="en-US" sz="1400" dirty="0">
+                <a:hlinkClick r:id="rId7"/>
+              </a:rPr>
+              <a:t>https://www.researchgate.net/figure/Examples-of-various-outliers-found-in-regression-analysis-Case-1-is-an-outlier-with_fig2_50946372</a:t>
+            </a:r>
+            <a:r>
+              <a:rPr lang="en-US" sz="1400" dirty="0"/>
+              <a:t> </a:t>
+            </a:r>
+          </a:p>
+          <a:p>
+            <a:pPr marL="285750" indent="-285750">
+              <a:buFont typeface="Arial" panose="020B0604020202020204" pitchFamily="34" charset="0"/>
+              <a:buChar char="•"/>
+            </a:pPr>
+            <a:r>
+              <a:rPr lang="en-US" sz="1400" dirty="0">
+                <a:hlinkClick r:id="rId8"/>
+              </a:rPr>
+              <a:t>https://probabilityandstats.wordpress.com/2015/05/09/the-skewness-of-a-probability-distribution/</a:t>
+            </a:r>
+            <a:r>
+              <a:rPr lang="en-US" sz="1400" dirty="0"/>
+              <a:t> </a:t>
+            </a:r>
+          </a:p>
+          <a:p>
+            <a:pPr marL="285750" indent="-285750">
+              <a:buFont typeface="Arial" panose="020B0604020202020204" pitchFamily="34" charset="0"/>
+              <a:buChar char="•"/>
+            </a:pPr>
+            <a:r>
+              <a:rPr lang="en-US" sz="1400" dirty="0">
+                <a:hlinkClick r:id="rId9"/>
+              </a:rPr>
+              <a:t>https://towardsdatascience.com/feature-engineering-for-machine-learning-3a5e293a5114</a:t>
+            </a:r>
+            <a:r>
+              <a:rPr lang="en-US" sz="1400" dirty="0"/>
+              <a:t> </a:t>
+            </a:r>
+          </a:p>
+          <a:p>
+            <a:pPr marL="285750" indent="-285750">
+              <a:buFont typeface="Arial" panose="020B0604020202020204" pitchFamily="34" charset="0"/>
+              <a:buChar char="•"/>
+            </a:pPr>
+            <a:r>
+              <a:rPr lang="en-US" sz="1400" dirty="0">
+                <a:hlinkClick r:id="rId10"/>
+              </a:rPr>
+              <a:t>https://www.kaggle.com/ryanholbrook/what-is-feature-engineering</a:t>
+            </a:r>
+            <a:r>
+              <a:rPr lang="en-US" sz="1400" dirty="0"/>
+              <a:t> </a:t>
+            </a:r>
+          </a:p>
+          <a:p>
+            <a:pPr marL="285750" indent="-285750">
+              <a:buFont typeface="Arial" panose="020B0604020202020204" pitchFamily="34" charset="0"/>
+              <a:buChar char="•"/>
+            </a:pPr>
+            <a:r>
+              <a:rPr lang="en-US" sz="1400" dirty="0">
+                <a:hlinkClick r:id="rId11"/>
+              </a:rPr>
+              <a:t>https://medium.com/@kyawsawhtoon/log-transformation-purpose-and-interpretation-9444b4b049c9</a:t>
+            </a:r>
+            <a:r>
+              <a:rPr lang="en-US" sz="1400" dirty="0"/>
+              <a:t> </a:t>
+            </a:r>
+          </a:p>
+          <a:p>
+            <a:pPr marL="285750" indent="-285750">
+              <a:buFont typeface="Arial" panose="020B0604020202020204" pitchFamily="34" charset="0"/>
+              <a:buChar char="•"/>
+            </a:pPr>
+            <a:r>
+              <a:rPr lang="en-US" sz="1400" dirty="0">
+                <a:hlinkClick r:id="rId12"/>
+              </a:rPr>
+              <a:t>https://machinelearningmastery.com/why-one-hot-encode-data-in-machine-learning/</a:t>
+            </a:r>
+            <a:r>
+              <a:rPr lang="en-US" sz="1400" dirty="0"/>
+              <a:t> </a:t>
+            </a:r>
+          </a:p>
+          <a:p>
+            <a:pPr marL="285750" indent="-285750">
+              <a:buFont typeface="Arial" panose="020B0604020202020204" pitchFamily="34" charset="0"/>
+              <a:buChar char="•"/>
+            </a:pPr>
+            <a:r>
+              <a:rPr lang="en-US" sz="1400" dirty="0">
+                <a:hlinkClick r:id="rId13"/>
+              </a:rPr>
+              <a:t>https://www.kaggle.com/dansbecker/using-categorical-data-with-one-hot-encoding</a:t>
+            </a:r>
+            <a:r>
+              <a:rPr lang="en-US" sz="1400" dirty="0"/>
+              <a:t> </a:t>
+            </a:r>
+          </a:p>
+        </p:txBody>
+      </p:sp>
+    </p:spTree>
+    <p:extLst>
+      <p:ext uri="{BB962C8B-B14F-4D97-AF65-F5344CB8AC3E}">
+        <p14:creationId xmlns:p14="http://schemas.microsoft.com/office/powerpoint/2010/main" val="2185265922"/>
       </p:ext>
     </p:extLst>
   </p:cSld>
@@ -5331,8 +6846,8 @@
         </p:nvSpPr>
         <p:spPr>
           <a:xfrm>
-            <a:off x="414974" y="622180"/>
-            <a:ext cx="9987809" cy="5262979"/>
+            <a:off x="2662671" y="1058494"/>
+            <a:ext cx="9334257" cy="5478423"/>
           </a:xfrm>
           <a:prstGeom prst="rect">
             <a:avLst/>
@@ -5650,20 +7165,375 @@
             </a:r>
           </a:p>
           <a:p>
-            <a:pPr marL="285750" indent="-285750">
-              <a:buFont typeface="Arial" panose="020B0604020202020204" pitchFamily="34" charset="0"/>
-              <a:buChar char="•"/>
-            </a:pPr>
             <a:endParaRPr lang="en-US" sz="1400" dirty="0"/>
           </a:p>
           <a:p>
-            <a:endParaRPr lang="en-US" sz="1400" dirty="0"/>
+            <a:pPr marL="285750" indent="-285750">
+              <a:buFont typeface="Arial" panose="020B0604020202020204" pitchFamily="34" charset="0"/>
+              <a:buChar char="•"/>
+            </a:pPr>
+            <a:r>
+              <a:rPr lang="en-US" sz="1400" b="1" dirty="0" err="1">
+                <a:solidFill>
+                  <a:srgbClr val="FF0000"/>
+                </a:solidFill>
+              </a:rPr>
+              <a:t>PyCaret</a:t>
+            </a:r>
+            <a:r>
+              <a:rPr lang="en-US" sz="1400" b="1" dirty="0">
+                <a:solidFill>
+                  <a:srgbClr val="FF0000"/>
+                </a:solidFill>
+              </a:rPr>
+              <a:t> </a:t>
+            </a:r>
+            <a:br>
+              <a:rPr lang="en-US" sz="1400" dirty="0"/>
+            </a:br>
+            <a:r>
+              <a:rPr lang="en-US" sz="1400" dirty="0"/>
+              <a:t>- </a:t>
+            </a:r>
+            <a:r>
+              <a:rPr lang="en-US" sz="1400" dirty="0">
+                <a:hlinkClick r:id="rId10"/>
+              </a:rPr>
+              <a:t>https://pycaret.org/</a:t>
+            </a:r>
+            <a:r>
+              <a:rPr lang="en-US" sz="1400" dirty="0"/>
+              <a:t> </a:t>
+            </a:r>
           </a:p>
           <a:p>
             <a:endParaRPr lang="en-US" sz="1400" dirty="0"/>
           </a:p>
         </p:txBody>
       </p:sp>
+      <p:pic>
+        <p:nvPicPr>
+          <p:cNvPr id="1026" name="Picture 2" descr="Why Automated Feature Engineering Will Change the Way You Do Machine  Learning - KDnuggets">
+            <a:extLst>
+              <a:ext uri="{FF2B5EF4-FFF2-40B4-BE49-F238E27FC236}">
+                <a16:creationId xmlns:a16="http://schemas.microsoft.com/office/drawing/2014/main" id="{E4176DE1-2F07-8F4B-A168-6E2DC16F0D55}"/>
+              </a:ext>
+            </a:extLst>
+          </p:cNvPr>
+          <p:cNvPicPr>
+            <a:picLocks noChangeAspect="1" noChangeArrowheads="1"/>
+          </p:cNvPicPr>
+          <p:nvPr/>
+        </p:nvPicPr>
+        <p:blipFill>
+          <a:blip r:embed="rId11" cstate="email">
+            <a:extLst>
+              <a:ext uri="{28A0092B-C50C-407E-A947-70E740481C1C}">
+                <a14:useLocalDpi xmlns:a14="http://schemas.microsoft.com/office/drawing/2010/main"/>
+              </a:ext>
+            </a:extLst>
+          </a:blip>
+          <a:srcRect/>
+          <a:stretch>
+            <a:fillRect/>
+          </a:stretch>
+        </p:blipFill>
+        <p:spPr bwMode="auto">
+          <a:xfrm>
+            <a:off x="611411" y="2264693"/>
+            <a:ext cx="1900925" cy="441965"/>
+          </a:xfrm>
+          <a:prstGeom prst="rect">
+            <a:avLst/>
+          </a:prstGeom>
+          <a:noFill/>
+          <a:extLst>
+            <a:ext uri="{909E8E84-426E-40DD-AFC4-6F175D3DCCD1}">
+              <a14:hiddenFill xmlns:a14="http://schemas.microsoft.com/office/drawing/2010/main">
+                <a:solidFill>
+                  <a:srgbClr val="FFFFFF"/>
+                </a:solidFill>
+              </a14:hiddenFill>
+            </a:ext>
+          </a:extLst>
+        </p:spPr>
+      </p:pic>
+      <p:pic>
+        <p:nvPicPr>
+          <p:cNvPr id="1028" name="Picture 4" descr="GitHub - blue-yonder/tsfresh: Automatic extraction of relevant features  from time series:">
+            <a:extLst>
+              <a:ext uri="{FF2B5EF4-FFF2-40B4-BE49-F238E27FC236}">
+                <a16:creationId xmlns:a16="http://schemas.microsoft.com/office/drawing/2014/main" id="{9B97A621-6342-C045-8B7D-AD476ABB887C}"/>
+              </a:ext>
+            </a:extLst>
+          </p:cNvPr>
+          <p:cNvPicPr>
+            <a:picLocks noChangeAspect="1" noChangeArrowheads="1"/>
+          </p:cNvPicPr>
+          <p:nvPr/>
+        </p:nvPicPr>
+        <p:blipFill rotWithShape="1">
+          <a:blip r:embed="rId12" cstate="email">
+            <a:extLst>
+              <a:ext uri="{28A0092B-C50C-407E-A947-70E740481C1C}">
+                <a14:useLocalDpi xmlns:a14="http://schemas.microsoft.com/office/drawing/2010/main"/>
+              </a:ext>
+            </a:extLst>
+          </a:blip>
+          <a:srcRect/>
+          <a:stretch/>
+        </p:blipFill>
+        <p:spPr bwMode="auto">
+          <a:xfrm>
+            <a:off x="1113973" y="2892219"/>
+            <a:ext cx="895799" cy="557737"/>
+          </a:xfrm>
+          <a:prstGeom prst="rect">
+            <a:avLst/>
+          </a:prstGeom>
+          <a:noFill/>
+          <a:extLst>
+            <a:ext uri="{909E8E84-426E-40DD-AFC4-6F175D3DCCD1}">
+              <a14:hiddenFill xmlns:a14="http://schemas.microsoft.com/office/drawing/2010/main">
+                <a:solidFill>
+                  <a:srgbClr val="FFFFFF"/>
+                </a:solidFill>
+              </a14:hiddenFill>
+            </a:ext>
+          </a:extLst>
+        </p:spPr>
+      </p:pic>
+      <p:pic>
+        <p:nvPicPr>
+          <p:cNvPr id="1030" name="Picture 6" descr="GitHub - cod3licious/autofeat: Linear Prediction Model with Automated  Feature Engineering and Selection Capabilities">
+            <a:extLst>
+              <a:ext uri="{FF2B5EF4-FFF2-40B4-BE49-F238E27FC236}">
+                <a16:creationId xmlns:a16="http://schemas.microsoft.com/office/drawing/2014/main" id="{B40C633B-D0CE-4146-AF8A-E40E5D1FFE62}"/>
+              </a:ext>
+            </a:extLst>
+          </p:cNvPr>
+          <p:cNvPicPr>
+            <a:picLocks noChangeAspect="1" noChangeArrowheads="1"/>
+          </p:cNvPicPr>
+          <p:nvPr/>
+        </p:nvPicPr>
+        <p:blipFill>
+          <a:blip r:embed="rId13" cstate="email">
+            <a:extLst>
+              <a:ext uri="{28A0092B-C50C-407E-A947-70E740481C1C}">
+                <a14:useLocalDpi xmlns:a14="http://schemas.microsoft.com/office/drawing/2010/main"/>
+              </a:ext>
+            </a:extLst>
+          </a:blip>
+          <a:srcRect/>
+          <a:stretch>
+            <a:fillRect/>
+          </a:stretch>
+        </p:blipFill>
+        <p:spPr bwMode="auto">
+          <a:xfrm>
+            <a:off x="1788387" y="3845279"/>
+            <a:ext cx="731520" cy="731520"/>
+          </a:xfrm>
+          <a:prstGeom prst="rect">
+            <a:avLst/>
+          </a:prstGeom>
+          <a:noFill/>
+          <a:extLst>
+            <a:ext uri="{909E8E84-426E-40DD-AFC4-6F175D3DCCD1}">
+              <a14:hiddenFill xmlns:a14="http://schemas.microsoft.com/office/drawing/2010/main">
+                <a:solidFill>
+                  <a:srgbClr val="FFFFFF"/>
+                </a:solidFill>
+              </a14:hiddenFill>
+            </a:ext>
+          </a:extLst>
+        </p:spPr>
+      </p:pic>
+      <p:pic>
+        <p:nvPicPr>
+          <p:cNvPr id="1032" name="Picture 8" descr="GitHub - mrzResearchArena/PyFeat: A Python-based Effective Feature  Generation Tool from DNA, RNA, and Protein Sequences">
+            <a:extLst>
+              <a:ext uri="{FF2B5EF4-FFF2-40B4-BE49-F238E27FC236}">
+                <a16:creationId xmlns:a16="http://schemas.microsoft.com/office/drawing/2014/main" id="{341908BB-9065-A242-B68C-39B35D35C877}"/>
+              </a:ext>
+            </a:extLst>
+          </p:cNvPr>
+          <p:cNvPicPr>
+            <a:picLocks noChangeAspect="1" noChangeArrowheads="1"/>
+          </p:cNvPicPr>
+          <p:nvPr/>
+        </p:nvPicPr>
+        <p:blipFill rotWithShape="1">
+          <a:blip r:embed="rId14" cstate="email">
+            <a:extLst>
+              <a:ext uri="{28A0092B-C50C-407E-A947-70E740481C1C}">
+                <a14:useLocalDpi xmlns:a14="http://schemas.microsoft.com/office/drawing/2010/main"/>
+              </a:ext>
+            </a:extLst>
+          </a:blip>
+          <a:srcRect/>
+          <a:stretch/>
+        </p:blipFill>
+        <p:spPr bwMode="auto">
+          <a:xfrm>
+            <a:off x="758194" y="4500808"/>
+            <a:ext cx="1267968" cy="745559"/>
+          </a:xfrm>
+          <a:prstGeom prst="rect">
+            <a:avLst/>
+          </a:prstGeom>
+          <a:noFill/>
+          <a:extLst>
+            <a:ext uri="{909E8E84-426E-40DD-AFC4-6F175D3DCCD1}">
+              <a14:hiddenFill xmlns:a14="http://schemas.microsoft.com/office/drawing/2010/main">
+                <a:solidFill>
+                  <a:srgbClr val="FFFFFF"/>
+                </a:solidFill>
+              </a14:hiddenFill>
+            </a:ext>
+          </a:extLst>
+        </p:spPr>
+      </p:pic>
+      <p:pic>
+        <p:nvPicPr>
+          <p:cNvPr id="8" name="Picture 2" descr="H2O.ai is the Open Source Leader in AI and ML">
+            <a:extLst>
+              <a:ext uri="{FF2B5EF4-FFF2-40B4-BE49-F238E27FC236}">
+                <a16:creationId xmlns:a16="http://schemas.microsoft.com/office/drawing/2014/main" id="{A26920B0-525F-924C-81F0-59BB78FE02CA}"/>
+              </a:ext>
+            </a:extLst>
+          </p:cNvPr>
+          <p:cNvPicPr>
+            <a:picLocks noChangeAspect="1" noChangeArrowheads="1"/>
+          </p:cNvPicPr>
+          <p:nvPr/>
+        </p:nvPicPr>
+        <p:blipFill>
+          <a:blip r:embed="rId15" cstate="email">
+            <a:extLst>
+              <a:ext uri="{28A0092B-C50C-407E-A947-70E740481C1C}">
+                <a14:useLocalDpi xmlns:a14="http://schemas.microsoft.com/office/drawing/2010/main"/>
+              </a:ext>
+            </a:extLst>
+          </a:blip>
+          <a:srcRect/>
+          <a:stretch>
+            <a:fillRect/>
+          </a:stretch>
+        </p:blipFill>
+        <p:spPr bwMode="auto">
+          <a:xfrm>
+            <a:off x="1776195" y="5173215"/>
+            <a:ext cx="731520" cy="731520"/>
+          </a:xfrm>
+          <a:prstGeom prst="rect">
+            <a:avLst/>
+          </a:prstGeom>
+          <a:noFill/>
+          <a:extLst>
+            <a:ext uri="{909E8E84-426E-40DD-AFC4-6F175D3DCCD1}">
+              <a14:hiddenFill xmlns:a14="http://schemas.microsoft.com/office/drawing/2010/main">
+                <a:solidFill>
+                  <a:srgbClr val="FFFFFF"/>
+                </a:solidFill>
+              </a14:hiddenFill>
+            </a:ext>
+          </a:extLst>
+        </p:spPr>
+      </p:pic>
+      <p:pic>
+        <p:nvPicPr>
+          <p:cNvPr id="1034" name="Picture 10" descr="Kolmogorov–Smirnov test - Wikipedia">
+            <a:extLst>
+              <a:ext uri="{FF2B5EF4-FFF2-40B4-BE49-F238E27FC236}">
+                <a16:creationId xmlns:a16="http://schemas.microsoft.com/office/drawing/2014/main" id="{23D56247-5297-944E-AB16-AB518618EF07}"/>
+              </a:ext>
+            </a:extLst>
+          </p:cNvPr>
+          <p:cNvPicPr>
+            <a:picLocks noChangeAspect="1" noChangeArrowheads="1"/>
+          </p:cNvPicPr>
+          <p:nvPr/>
+        </p:nvPicPr>
+        <p:blipFill>
+          <a:blip r:embed="rId16" cstate="email">
+            <a:extLst>
+              <a:ext uri="{28A0092B-C50C-407E-A947-70E740481C1C}">
+                <a14:useLocalDpi xmlns:a14="http://schemas.microsoft.com/office/drawing/2010/main"/>
+              </a:ext>
+            </a:extLst>
+          </a:blip>
+          <a:srcRect/>
+          <a:stretch>
+            <a:fillRect/>
+          </a:stretch>
+        </p:blipFill>
+        <p:spPr bwMode="auto">
+          <a:xfrm>
+            <a:off x="1011186" y="1144331"/>
+            <a:ext cx="1101374" cy="906798"/>
+          </a:xfrm>
+          <a:prstGeom prst="rect">
+            <a:avLst/>
+          </a:prstGeom>
+          <a:noFill/>
+          <a:extLst>
+            <a:ext uri="{909E8E84-426E-40DD-AFC4-6F175D3DCCD1}">
+              <a14:hiddenFill xmlns:a14="http://schemas.microsoft.com/office/drawing/2010/main">
+                <a:solidFill>
+                  <a:srgbClr val="FFFFFF"/>
+                </a:solidFill>
+              </a14:hiddenFill>
+            </a:ext>
+          </a:extLst>
+        </p:spPr>
+      </p:pic>
+      <p:pic>
+        <p:nvPicPr>
+          <p:cNvPr id="1036" name="Picture 12" descr="GitHub - pycaret/pycaret: An open-source, low-code machine learning library  in Python">
+            <a:extLst>
+              <a:ext uri="{FF2B5EF4-FFF2-40B4-BE49-F238E27FC236}">
+                <a16:creationId xmlns:a16="http://schemas.microsoft.com/office/drawing/2014/main" id="{3C1C91C6-4780-374A-B5F5-271178C9F89C}"/>
+              </a:ext>
+            </a:extLst>
+          </p:cNvPr>
+          <p:cNvPicPr>
+            <a:picLocks noChangeAspect="1" noChangeArrowheads="1"/>
+          </p:cNvPicPr>
+          <p:nvPr/>
+        </p:nvPicPr>
+        <p:blipFill rotWithShape="1">
+          <a:blip r:embed="rId17" cstate="email">
+            <a:extLst>
+              <a:ext uri="{28A0092B-C50C-407E-A947-70E740481C1C}">
+                <a14:useLocalDpi xmlns:a14="http://schemas.microsoft.com/office/drawing/2010/main"/>
+              </a:ext>
+            </a:extLst>
+          </a:blip>
+          <a:srcRect/>
+          <a:stretch/>
+        </p:blipFill>
+        <p:spPr bwMode="auto">
+          <a:xfrm>
+            <a:off x="632210" y="6036281"/>
+            <a:ext cx="1393952" cy="260938"/>
+          </a:xfrm>
+          <a:prstGeom prst="rect">
+            <a:avLst/>
+          </a:prstGeom>
+          <a:noFill/>
+          <a:extLst>
+            <a:ext uri="{909E8E84-426E-40DD-AFC4-6F175D3DCCD1}">
+              <a14:hiddenFill xmlns:a14="http://schemas.microsoft.com/office/drawing/2010/main">
+                <a:solidFill>
+                  <a:srgbClr val="FFFFFF"/>
+                </a:solidFill>
+              </a14:hiddenFill>
+            </a:ext>
+          </a:extLst>
+        </p:spPr>
+      </p:pic>
     </p:spTree>
     <p:extLst>
       <p:ext uri="{BB962C8B-B14F-4D97-AF65-F5344CB8AC3E}">
@@ -5696,10 +7566,10 @@
       </p:grpSpPr>
       <p:sp>
         <p:nvSpPr>
-          <p:cNvPr id="4" name="TextBox 3">
-            <a:extLst>
-              <a:ext uri="{FF2B5EF4-FFF2-40B4-BE49-F238E27FC236}">
-                <a16:creationId xmlns:a16="http://schemas.microsoft.com/office/drawing/2014/main" id="{D1E58F78-8F27-2D4A-BD36-154CD23B3E50}"/>
+          <p:cNvPr id="2" name="TextBox 1">
+            <a:extLst>
+              <a:ext uri="{FF2B5EF4-FFF2-40B4-BE49-F238E27FC236}">
+                <a16:creationId xmlns:a16="http://schemas.microsoft.com/office/drawing/2014/main" id="{94A46AC6-B54C-BA45-9E4E-F2C6C36BF92C}"/>
               </a:ext>
             </a:extLst>
           </p:cNvPr>
@@ -5708,8 +7578,8 @@
         </p:nvSpPr>
         <p:spPr>
           <a:xfrm>
-            <a:off x="-1" y="0"/>
-            <a:ext cx="5943601" cy="523220"/>
+            <a:off x="121920" y="693908"/>
+            <a:ext cx="11594592" cy="5693866"/>
           </a:xfrm>
           <a:prstGeom prst="rect">
             <a:avLst/>
@@ -5722,15 +7592,477 @@
           </a:bodyPr>
           <a:lstStyle/>
           <a:p>
-            <a:r>
-              <a:rPr lang="en-US" sz="2800" b="1" dirty="0"/>
-              <a:t>Extracting Features from Text - part 1</a:t>
-            </a:r>
-            <a:endParaRPr lang="el-GR" sz="2800" b="1" dirty="0">
-              <a:solidFill>
-                <a:srgbClr val="0070C0"/>
-              </a:solidFill>
-            </a:endParaRPr>
+            <a:pPr marL="171450" indent="-171450">
+              <a:buFont typeface="Arial" panose="020B0604020202020204" pitchFamily="34" charset="0"/>
+              <a:buChar char="•"/>
+            </a:pPr>
+            <a:r>
+              <a:rPr lang="en-US" sz="1400" b="1" dirty="0">
+                <a:solidFill>
+                  <a:srgbClr val="FF0000"/>
+                </a:solidFill>
+              </a:rPr>
+              <a:t>Google tesseract OCR</a:t>
+            </a:r>
+            <a:r>
+              <a:rPr lang="en-US" sz="1400" dirty="0"/>
+              <a:t> (HP 1985-2005, </a:t>
+            </a:r>
+            <a:r>
+              <a:rPr lang="en-US" sz="1400" dirty="0" err="1"/>
+              <a:t>Opensorced</a:t>
+            </a:r>
+            <a:r>
+              <a:rPr lang="en-US" sz="1400" dirty="0"/>
+              <a:t> in 2005, then developed by Google)</a:t>
+            </a:r>
+            <a:br>
+              <a:rPr lang="en-US" sz="1400" dirty="0"/>
+            </a:br>
+            <a:r>
+              <a:rPr lang="en-US" sz="1400" dirty="0"/>
+              <a:t> - </a:t>
+            </a:r>
+            <a:r>
+              <a:rPr lang="en-US" sz="1400" dirty="0">
+                <a:hlinkClick r:id="rId2"/>
+              </a:rPr>
+              <a:t>https://github.com/tesseract-ocr/tesseract</a:t>
+            </a:r>
+            <a:br>
+              <a:rPr lang="en-US" sz="1400" dirty="0"/>
+            </a:br>
+            <a:r>
+              <a:rPr lang="en-US" sz="1400" dirty="0"/>
+              <a:t> - </a:t>
+            </a:r>
+            <a:r>
+              <a:rPr lang="en-US" sz="1400" dirty="0">
+                <a:hlinkClick r:id="rId3"/>
+              </a:rPr>
+              <a:t>https://tesseract-ocr.github.io/tessdoc/Command-Line-Usage</a:t>
+            </a:r>
+            <a:br>
+              <a:rPr lang="en-US" sz="1400" dirty="0"/>
+            </a:br>
+            <a:r>
+              <a:rPr lang="en-US" sz="1400" dirty="0"/>
+              <a:t> - </a:t>
+            </a:r>
+            <a:r>
+              <a:rPr lang="en-US" sz="1400" dirty="0">
+                <a:hlinkClick r:id="rId4"/>
+              </a:rPr>
+              <a:t>https://github.com/madmaze/pytesseract</a:t>
+            </a:r>
+            <a:br>
+              <a:rPr lang="en-US" sz="1400" dirty="0"/>
+            </a:br>
+            <a:r>
+              <a:rPr lang="en-US" sz="1400" dirty="0"/>
+              <a:t> - https://</a:t>
+            </a:r>
+            <a:r>
+              <a:rPr lang="en-US" sz="1400" dirty="0" err="1"/>
+              <a:t>www.pyimagesearch.com</a:t>
+            </a:r>
+            <a:r>
+              <a:rPr lang="en-US" sz="1400" dirty="0"/>
+              <a:t>/2017/07/10/using-tesseract-</a:t>
+            </a:r>
+            <a:r>
+              <a:rPr lang="en-US" sz="1400" dirty="0" err="1"/>
+              <a:t>ocr</a:t>
+            </a:r>
+            <a:r>
+              <a:rPr lang="en-US" sz="1400" dirty="0"/>
+              <a:t>-python/</a:t>
+            </a:r>
+          </a:p>
+          <a:p>
+            <a:pPr marL="171450" indent="-171450">
+              <a:buFont typeface="Arial" panose="020B0604020202020204" pitchFamily="34" charset="0"/>
+              <a:buChar char="•"/>
+            </a:pPr>
+            <a:r>
+              <a:rPr lang="en-US" sz="1400" b="1" dirty="0" err="1">
+                <a:solidFill>
+                  <a:srgbClr val="FF0000"/>
+                </a:solidFill>
+              </a:rPr>
+              <a:t>gvision</a:t>
+            </a:r>
+            <a:r>
+              <a:rPr lang="en-US" sz="1400" dirty="0"/>
+              <a:t> - </a:t>
+            </a:r>
+            <a:r>
+              <a:rPr lang="en-US" sz="1400" dirty="0">
+                <a:hlinkClick r:id="rId5"/>
+              </a:rPr>
+              <a:t>https://cloud.google.com/vision</a:t>
+            </a:r>
+            <a:r>
+              <a:rPr lang="en-US" sz="1400" dirty="0"/>
+              <a:t> </a:t>
+            </a:r>
+          </a:p>
+          <a:p>
+            <a:pPr marL="171450" indent="-171450">
+              <a:buFont typeface="Arial" panose="020B0604020202020204" pitchFamily="34" charset="0"/>
+              <a:buChar char="•"/>
+            </a:pPr>
+            <a:r>
+              <a:rPr lang="en-US" sz="1400" b="1" dirty="0">
+                <a:solidFill>
+                  <a:srgbClr val="FF0000"/>
+                </a:solidFill>
+              </a:rPr>
+              <a:t>Document AI</a:t>
+            </a:r>
+            <a:r>
+              <a:rPr lang="en-US" sz="1400" dirty="0"/>
+              <a:t> - </a:t>
+            </a:r>
+            <a:r>
+              <a:rPr lang="en-US" sz="1400" dirty="0">
+                <a:hlinkClick r:id="rId6"/>
+              </a:rPr>
+              <a:t>https://cloud.google.com/solutions/document-ai</a:t>
+            </a:r>
+            <a:r>
+              <a:rPr lang="en-US" sz="1400" dirty="0"/>
+              <a:t> </a:t>
+            </a:r>
+          </a:p>
+          <a:p>
+            <a:pPr marL="171450" indent="-171450">
+              <a:buFont typeface="Arial" panose="020B0604020202020204" pitchFamily="34" charset="0"/>
+              <a:buChar char="•"/>
+            </a:pPr>
+            <a:r>
+              <a:rPr lang="en-US" sz="1400" b="1" dirty="0">
+                <a:solidFill>
+                  <a:srgbClr val="FF0000"/>
+                </a:solidFill>
+              </a:rPr>
+              <a:t>AWS </a:t>
+            </a:r>
+            <a:r>
+              <a:rPr lang="en-US" sz="1400" b="1" dirty="0" err="1">
+                <a:solidFill>
+                  <a:srgbClr val="FF0000"/>
+                </a:solidFill>
+              </a:rPr>
+              <a:t>Textract</a:t>
+            </a:r>
+            <a:r>
+              <a:rPr lang="en-US" sz="1400" dirty="0"/>
+              <a:t> - </a:t>
+            </a:r>
+            <a:r>
+              <a:rPr lang="en-US" sz="1400" dirty="0">
+                <a:hlinkClick r:id="rId7"/>
+              </a:rPr>
+              <a:t>https://aws.amazon.com/textract/</a:t>
+            </a:r>
+            <a:r>
+              <a:rPr lang="en-US" sz="1400" dirty="0"/>
+              <a:t> </a:t>
+            </a:r>
+          </a:p>
+          <a:p>
+            <a:pPr marL="171450" indent="-171450">
+              <a:buFont typeface="Arial" panose="020B0604020202020204" pitchFamily="34" charset="0"/>
+              <a:buChar char="•"/>
+            </a:pPr>
+            <a:r>
+              <a:rPr lang="en-US" sz="1400" b="1" dirty="0">
+                <a:solidFill>
+                  <a:srgbClr val="FF0000"/>
+                </a:solidFill>
+              </a:rPr>
+              <a:t>Microsoft cognitive services</a:t>
+            </a:r>
+            <a:br>
+              <a:rPr lang="en-US" sz="1400" b="1" dirty="0">
+                <a:solidFill>
+                  <a:srgbClr val="FF0000"/>
+                </a:solidFill>
+              </a:rPr>
+            </a:br>
+            <a:r>
+              <a:rPr lang="en-US" sz="1400" dirty="0"/>
+              <a:t> - </a:t>
+            </a:r>
+            <a:r>
+              <a:rPr lang="en-US" sz="1400" dirty="0">
+                <a:hlinkClick r:id="rId8"/>
+              </a:rPr>
+              <a:t>https://azure.microsoft.com/is-is/services/cognitive-services/form-recognizer/</a:t>
+            </a:r>
+            <a:r>
+              <a:rPr lang="en-US" sz="1400" dirty="0"/>
+              <a:t> </a:t>
+            </a:r>
+            <a:br>
+              <a:rPr lang="en-US" sz="1400" dirty="0"/>
+            </a:br>
+            <a:r>
+              <a:rPr lang="en-US" sz="1400" dirty="0"/>
+              <a:t> - </a:t>
+            </a:r>
+            <a:r>
+              <a:rPr lang="en-US" sz="1400" dirty="0">
+                <a:hlinkClick r:id="rId9"/>
+              </a:rPr>
+              <a:t>https://docs.microsoft.com/en-us/azure/cognitive-services/text-analytics/overview</a:t>
+            </a:r>
+            <a:r>
+              <a:rPr lang="en-US" sz="1400" dirty="0"/>
+              <a:t> </a:t>
+            </a:r>
+            <a:br>
+              <a:rPr lang="en-US" sz="1400" dirty="0"/>
+            </a:br>
+            <a:r>
+              <a:rPr lang="en-US" sz="1400" dirty="0"/>
+              <a:t> - </a:t>
+            </a:r>
+            <a:r>
+              <a:rPr lang="en-US" sz="1400" dirty="0">
+                <a:hlinkClick r:id="rId10"/>
+              </a:rPr>
+              <a:t>https://azure.microsoft.com/en-ca/services/cognitive-services/text-analytics/</a:t>
+            </a:r>
+            <a:r>
+              <a:rPr lang="en-US" sz="1400" dirty="0"/>
+              <a:t>  </a:t>
+            </a:r>
+          </a:p>
+          <a:p>
+            <a:pPr marL="171450" indent="-171450">
+              <a:buFont typeface="Arial" panose="020B0604020202020204" pitchFamily="34" charset="0"/>
+              <a:buChar char="•"/>
+            </a:pPr>
+            <a:r>
+              <a:rPr lang="en-US" sz="1400" b="1" dirty="0">
+                <a:solidFill>
+                  <a:srgbClr val="FF0000"/>
+                </a:solidFill>
+              </a:rPr>
+              <a:t>H2O Driverless AI</a:t>
+            </a:r>
+            <a:r>
+              <a:rPr lang="en-US" sz="1400" dirty="0"/>
+              <a:t>: Mark Landry NYC 2019 - H2O.ai - </a:t>
+            </a:r>
+            <a:r>
+              <a:rPr lang="en-US" sz="1400" dirty="0" err="1"/>
+              <a:t>OCR.ai</a:t>
+            </a:r>
+            <a:r>
+              <a:rPr lang="en-US" sz="1400" dirty="0"/>
+              <a:t>: Creating AI to Read Documents</a:t>
+            </a:r>
+            <a:br>
+              <a:rPr lang="en-US" sz="1400" dirty="0"/>
+            </a:br>
+            <a:r>
+              <a:rPr lang="en-US" sz="1400" dirty="0"/>
+              <a:t> - </a:t>
+            </a:r>
+            <a:r>
+              <a:rPr lang="en-US" sz="1400" dirty="0">
+                <a:hlinkClick r:id="rId11"/>
+              </a:rPr>
+              <a:t>https://www.youtube.com/watch?v=LczYc2o0dNo</a:t>
+            </a:r>
+            <a:r>
+              <a:rPr lang="en-US" sz="1400" dirty="0"/>
+              <a:t> </a:t>
+            </a:r>
+          </a:p>
+          <a:p>
+            <a:pPr marL="171450" indent="-171450">
+              <a:buFont typeface="Arial" panose="020B0604020202020204" pitchFamily="34" charset="0"/>
+              <a:buChar char="•"/>
+            </a:pPr>
+            <a:r>
+              <a:rPr lang="en-US" sz="1400" dirty="0"/>
+              <a:t>Open Source: </a:t>
+            </a:r>
+            <a:r>
+              <a:rPr lang="en-US" sz="1400" dirty="0">
+                <a:hlinkClick r:id="rId12"/>
+              </a:rPr>
+              <a:t>https://www.softwareadvice.com/resources/easiest-to-use-free-and-open-source-text-analysis-software/</a:t>
+            </a:r>
+            <a:r>
+              <a:rPr lang="en-US" sz="1400" dirty="0"/>
+              <a:t> </a:t>
+            </a:r>
+          </a:p>
+          <a:p>
+            <a:pPr marL="628650" lvl="1" indent="-171450">
+              <a:buFont typeface="Arial" panose="020B0604020202020204" pitchFamily="34" charset="0"/>
+              <a:buChar char="•"/>
+            </a:pPr>
+            <a:r>
+              <a:rPr lang="en-US" sz="1400" dirty="0"/>
+              <a:t>AYLIEN Text Analysis Software, </a:t>
+            </a:r>
+            <a:r>
+              <a:rPr lang="en-US" sz="1400" dirty="0" err="1"/>
+              <a:t>Keatext</a:t>
+            </a:r>
+            <a:r>
+              <a:rPr lang="en-US" sz="1400" dirty="0"/>
+              <a:t> Software, KNIME Analytics Platform Software, Refinitiv Intelligent Tagging</a:t>
+            </a:r>
+          </a:p>
+          <a:p>
+            <a:pPr marL="171450" indent="-171450">
+              <a:buFont typeface="Arial" panose="020B0604020202020204" pitchFamily="34" charset="0"/>
+              <a:buChar char="•"/>
+            </a:pPr>
+            <a:r>
+              <a:rPr lang="en-US" sz="1400" dirty="0"/>
+              <a:t>The Top 33 Information Extraction Open Source Projects - </a:t>
+            </a:r>
+            <a:r>
+              <a:rPr lang="en-US" sz="1400" dirty="0">
+                <a:hlinkClick r:id="rId13"/>
+              </a:rPr>
+              <a:t>https://awesomeopensource.com/projects/information-extraction</a:t>
+            </a:r>
+            <a:r>
+              <a:rPr lang="en-US" sz="1400" dirty="0"/>
+              <a:t> </a:t>
+            </a:r>
+          </a:p>
+          <a:p>
+            <a:pPr marL="171450" indent="-171450">
+              <a:buFont typeface="Arial" panose="020B0604020202020204" pitchFamily="34" charset="0"/>
+              <a:buChar char="•"/>
+            </a:pPr>
+            <a:r>
+              <a:rPr lang="en-US" sz="1400" b="1" dirty="0">
+                <a:solidFill>
+                  <a:srgbClr val="FF0000"/>
+                </a:solidFill>
+              </a:rPr>
+              <a:t>Bloomberg</a:t>
+            </a:r>
+            <a:r>
+              <a:rPr lang="en-US" sz="1400" dirty="0"/>
+              <a:t> - information extraction, David Rosenberg, 2018</a:t>
+            </a:r>
+            <a:br>
+              <a:rPr lang="en-US" sz="1400" dirty="0"/>
+            </a:br>
+            <a:r>
+              <a:rPr lang="en-US" sz="1400" dirty="0"/>
+              <a:t>- </a:t>
+            </a:r>
+            <a:r>
+              <a:rPr lang="en-US" sz="1400" dirty="0">
+                <a:hlinkClick r:id="rId14"/>
+              </a:rPr>
+              <a:t>https://twimlai.com/twiml-talk-126-information-extraction-natural-document-formats-david-rosenberg/</a:t>
+            </a:r>
+            <a:r>
+              <a:rPr lang="en-US" sz="1400" dirty="0"/>
+              <a:t> </a:t>
+            </a:r>
+          </a:p>
+          <a:p>
+            <a:pPr marL="171450" indent="-171450">
+              <a:buFont typeface="Arial" panose="020B0604020202020204" pitchFamily="34" charset="0"/>
+              <a:buChar char="•"/>
+            </a:pPr>
+            <a:r>
+              <a:rPr lang="en-US" sz="1400" dirty="0"/>
+              <a:t>Extract from chart images: </a:t>
+            </a:r>
+            <a:br>
+              <a:rPr lang="en-US" sz="1400" dirty="0"/>
+            </a:br>
+            <a:r>
+              <a:rPr lang="en-US" sz="1400" dirty="0"/>
+              <a:t>- </a:t>
+            </a:r>
+            <a:r>
+              <a:rPr lang="en-US" sz="1400" dirty="0">
+                <a:hlinkClick r:id="rId15"/>
+              </a:rPr>
+              <a:t>https://www.microsoft.com/en-us/research/wp-content/uploads/2017/02/ChartSense-CHI2017.pdf</a:t>
+            </a:r>
+            <a:r>
+              <a:rPr lang="en-US" sz="1400" dirty="0"/>
+              <a:t> </a:t>
+            </a:r>
+          </a:p>
+          <a:p>
+            <a:pPr marL="171450" indent="-171450">
+              <a:buFont typeface="Arial" panose="020B0604020202020204" pitchFamily="34" charset="0"/>
+              <a:buChar char="•"/>
+            </a:pPr>
+            <a:r>
+              <a:rPr lang="en-US" sz="1400" dirty="0"/>
+              <a:t>Bloomberg - Information Extraction with Character-level Neural Networks and Free Noisy Supervision2017</a:t>
+            </a:r>
+            <a:br>
+              <a:rPr lang="en-US" sz="1400" dirty="0"/>
+            </a:br>
+            <a:r>
+              <a:rPr lang="en-US" sz="1400" dirty="0"/>
+              <a:t> - </a:t>
+            </a:r>
+            <a:r>
+              <a:rPr lang="en-US" sz="1400" dirty="0">
+                <a:hlinkClick r:id="rId16"/>
+              </a:rPr>
+              <a:t>https://arxiv.org/pdf/1612.04118.pdf</a:t>
+            </a:r>
+            <a:r>
+              <a:rPr lang="en-US" sz="1400" dirty="0"/>
+              <a:t> - </a:t>
+            </a:r>
+          </a:p>
+          <a:p>
+            <a:pPr marL="171450" indent="-171450">
+              <a:buFont typeface="Arial" panose="020B0604020202020204" pitchFamily="34" charset="0"/>
+              <a:buChar char="•"/>
+            </a:pPr>
+            <a:r>
+              <a:rPr lang="en-US" sz="1400" dirty="0"/>
+              <a:t>Best method to extract numerical data from product descriptions, 2018</a:t>
+            </a:r>
+            <a:br>
+              <a:rPr lang="en-US" sz="1400" dirty="0"/>
+            </a:br>
+            <a:r>
+              <a:rPr lang="en-US" sz="1400" dirty="0"/>
+              <a:t> - </a:t>
+            </a:r>
+            <a:r>
+              <a:rPr lang="en-US" sz="1400" dirty="0">
+                <a:hlinkClick r:id="rId17"/>
+              </a:rPr>
+              <a:t>https://www.reddit.com/r/MachineLearning/comments/8f98z1/d_best_method_to_extract_numerical_data_from/</a:t>
+            </a:r>
+            <a:endParaRPr lang="en-US" sz="1400" dirty="0"/>
+          </a:p>
+          <a:p>
+            <a:pPr marL="171450" indent="-171450">
+              <a:buFont typeface="Arial" panose="020B0604020202020204" pitchFamily="34" charset="0"/>
+              <a:buChar char="•"/>
+            </a:pPr>
+            <a:r>
+              <a:rPr lang="en-US" sz="1400" dirty="0"/>
+              <a:t>... </a:t>
+            </a:r>
           </a:p>
         </p:txBody>
       </p:sp>
@@ -5739,7 +8071,7 @@
           <p:cNvPr id="3" name="TextBox 2">
             <a:extLst>
               <a:ext uri="{FF2B5EF4-FFF2-40B4-BE49-F238E27FC236}">
-                <a16:creationId xmlns:a16="http://schemas.microsoft.com/office/drawing/2014/main" id="{1D4B9042-755B-8142-9C51-9DBAA5CBE393}"/>
+                <a16:creationId xmlns:a16="http://schemas.microsoft.com/office/drawing/2014/main" id="{69839A4E-8255-F949-B17B-59D08F3FFA8A}"/>
               </a:ext>
             </a:extLst>
           </p:cNvPr>
@@ -5748,8 +8080,8 @@
         </p:nvSpPr>
         <p:spPr>
           <a:xfrm>
-            <a:off x="1010596" y="866120"/>
-            <a:ext cx="8810297" cy="5693866"/>
+            <a:off x="0" y="0"/>
+            <a:ext cx="6998208" cy="523220"/>
           </a:xfrm>
           <a:prstGeom prst="rect">
             <a:avLst/>
@@ -5762,443 +8094,22 @@
           </a:bodyPr>
           <a:lstStyle/>
           <a:p>
-            <a:pPr marL="285750" indent="-285750">
-              <a:buFont typeface="Arial" panose="020B0604020202020204" pitchFamily="34" charset="0"/>
-              <a:buChar char="•"/>
-            </a:pPr>
-            <a:r>
-              <a:rPr lang="en-US" sz="1400" b="1" dirty="0">
-                <a:solidFill>
-                  <a:srgbClr val="FF0000"/>
-                </a:solidFill>
-              </a:rPr>
-              <a:t>Text Cleaning</a:t>
-            </a:r>
-            <a:r>
-              <a:rPr lang="en-US" sz="1400" dirty="0"/>
-              <a:t>:</a:t>
-            </a:r>
-          </a:p>
-          <a:p>
-            <a:pPr marL="742950" lvl="1" indent="-285750">
-              <a:buFont typeface="Arial" panose="020B0604020202020204" pitchFamily="34" charset="0"/>
-              <a:buChar char="•"/>
-            </a:pPr>
-            <a:r>
-              <a:rPr lang="en-US" sz="1400" dirty="0"/>
-              <a:t>Converting words into lowercase</a:t>
-            </a:r>
-          </a:p>
-          <a:p>
-            <a:pPr marL="742950" lvl="1" indent="-285750">
-              <a:buFont typeface="Arial" panose="020B0604020202020204" pitchFamily="34" charset="0"/>
-              <a:buChar char="•"/>
-            </a:pPr>
-            <a:r>
-              <a:rPr lang="en-US" sz="1400" dirty="0"/>
-              <a:t>Removing leading and trailing whitespaces, punctuation, stop words (a, an, the, ...)</a:t>
-            </a:r>
-          </a:p>
-          <a:p>
-            <a:pPr marL="742950" lvl="1" indent="-285750">
-              <a:buFont typeface="Arial" panose="020B0604020202020204" pitchFamily="34" charset="0"/>
-              <a:buChar char="•"/>
-            </a:pPr>
-            <a:r>
-              <a:rPr lang="en-US" sz="1400" dirty="0"/>
-              <a:t>Expanding contractions (don’t -&gt; do not)</a:t>
-            </a:r>
-          </a:p>
-          <a:p>
-            <a:pPr marL="742950" lvl="1" indent="-285750">
-              <a:buFont typeface="Arial" panose="020B0604020202020204" pitchFamily="34" charset="0"/>
-              <a:buChar char="•"/>
-            </a:pPr>
-            <a:r>
-              <a:rPr lang="en-US" sz="1400" dirty="0"/>
-              <a:t>Removing special characters (numbers, emojis, </a:t>
-            </a:r>
-            <a:r>
-              <a:rPr lang="en-US" sz="1400" dirty="0" err="1"/>
-              <a:t>etc</a:t>
-            </a:r>
-            <a:r>
-              <a:rPr lang="en-US" sz="1400" dirty="0"/>
-              <a:t>), HTML/XML tags</a:t>
-            </a:r>
-          </a:p>
-          <a:p>
-            <a:pPr marL="742950" lvl="1" indent="-285750">
-              <a:buFont typeface="Arial" panose="020B0604020202020204" pitchFamily="34" charset="0"/>
-              <a:buChar char="•"/>
-            </a:pPr>
-            <a:r>
-              <a:rPr lang="en-US" sz="1400" dirty="0"/>
-              <a:t>Replacing accented characters (such as </a:t>
-            </a:r>
-            <a:r>
-              <a:rPr lang="en-US" sz="1400" dirty="0" err="1"/>
-              <a:t>é</a:t>
-            </a:r>
-            <a:r>
-              <a:rPr lang="en-US" sz="1400" dirty="0"/>
-              <a:t>)</a:t>
-            </a:r>
-          </a:p>
-          <a:p>
-            <a:pPr marL="742950" lvl="1" indent="-285750">
-              <a:buFont typeface="Arial" panose="020B0604020202020204" pitchFamily="34" charset="0"/>
-              <a:buChar char="•"/>
-            </a:pPr>
-            <a:r>
-              <a:rPr lang="en-US" sz="1400" dirty="0"/>
-              <a:t>Correcting spelling errors</a:t>
-            </a:r>
-          </a:p>
-          <a:p>
-            <a:pPr marL="285750" indent="-285750">
-              <a:buFont typeface="Arial" panose="020B0604020202020204" pitchFamily="34" charset="0"/>
-              <a:buChar char="•"/>
-            </a:pPr>
-            <a:r>
-              <a:rPr lang="en-US" sz="1400" b="1" dirty="0">
-                <a:solidFill>
-                  <a:srgbClr val="FF0000"/>
-                </a:solidFill>
-              </a:rPr>
-              <a:t>Tokenizing</a:t>
-            </a:r>
-            <a:r>
-              <a:rPr lang="en-US" sz="1400" dirty="0"/>
-              <a:t> - split text into tokens</a:t>
-            </a:r>
-          </a:p>
-          <a:p>
-            <a:pPr marL="285750" indent="-285750">
-              <a:buFont typeface="Arial" panose="020B0604020202020204" pitchFamily="34" charset="0"/>
-              <a:buChar char="•"/>
-            </a:pPr>
-            <a:r>
-              <a:rPr lang="en-US" sz="1400" b="1" dirty="0">
-                <a:solidFill>
-                  <a:srgbClr val="FF0000"/>
-                </a:solidFill>
-              </a:rPr>
-              <a:t>Stemming</a:t>
-            </a:r>
-            <a:r>
-              <a:rPr lang="en-US" sz="1400" dirty="0"/>
-              <a:t> &amp; </a:t>
-            </a:r>
-            <a:r>
-              <a:rPr lang="en-US" sz="1400" b="1" dirty="0">
-                <a:solidFill>
-                  <a:srgbClr val="FF0000"/>
-                </a:solidFill>
-              </a:rPr>
-              <a:t>Lemmatization</a:t>
-            </a:r>
-            <a:r>
-              <a:rPr lang="en-US" sz="1400" dirty="0"/>
-              <a:t> - convert word into base forms:</a:t>
-            </a:r>
-          </a:p>
-          <a:p>
-            <a:pPr marL="742950" lvl="1" indent="-285750">
-              <a:buFont typeface="Arial" panose="020B0604020202020204" pitchFamily="34" charset="0"/>
-              <a:buChar char="•"/>
-            </a:pPr>
-            <a:r>
-              <a:rPr lang="en-US" sz="1400" dirty="0"/>
-              <a:t>Stemming  - essentially chops off letters from the end until the stem is reached</a:t>
-            </a:r>
-          </a:p>
-          <a:p>
-            <a:pPr marL="742950" lvl="1" indent="-285750">
-              <a:buFont typeface="Arial" panose="020B0604020202020204" pitchFamily="34" charset="0"/>
-              <a:buChar char="•"/>
-            </a:pPr>
-            <a:r>
-              <a:rPr lang="en-US" sz="1400" dirty="0"/>
-              <a:t>Lemmatization – more advanced:  "was" → "be", "mice" → "mouse"</a:t>
-            </a:r>
-          </a:p>
-          <a:p>
-            <a:pPr marL="285750" indent="-285750">
-              <a:buFont typeface="Arial" panose="020B0604020202020204" pitchFamily="34" charset="0"/>
-              <a:buChar char="•"/>
-            </a:pPr>
-            <a:r>
-              <a:rPr lang="en-US" sz="1400" b="1" dirty="0">
-                <a:solidFill>
-                  <a:srgbClr val="FF0000"/>
-                </a:solidFill>
-              </a:rPr>
-              <a:t>POS tagging</a:t>
-            </a:r>
-            <a:r>
-              <a:rPr lang="en-US" sz="1400" dirty="0"/>
-              <a:t> (Part-Of-Speech). Careful – same word may get different POS tag in different contexts.</a:t>
-            </a:r>
-            <a:br>
-              <a:rPr lang="en-US" sz="1400" dirty="0"/>
-            </a:br>
-            <a:r>
-              <a:rPr lang="en-US" sz="1400" dirty="0"/>
-              <a:t>For example: </a:t>
-            </a:r>
-            <a:r>
-              <a:rPr lang="en-US" sz="1400" b="1" dirty="0">
-                <a:solidFill>
-                  <a:srgbClr val="FF0000"/>
-                </a:solidFill>
-              </a:rPr>
-              <a:t>bear</a:t>
-            </a:r>
-            <a:r>
-              <a:rPr lang="en-US" sz="1400" dirty="0"/>
-              <a:t> is an animal (noun), please </a:t>
-            </a:r>
-            <a:r>
-              <a:rPr lang="en-US" sz="1400" b="1" dirty="0">
-                <a:solidFill>
-                  <a:srgbClr val="FF0000"/>
-                </a:solidFill>
-              </a:rPr>
-              <a:t>bear</a:t>
-            </a:r>
-            <a:r>
-              <a:rPr lang="en-US" sz="1400" dirty="0"/>
-              <a:t> with me (verb)</a:t>
-            </a:r>
-          </a:p>
-          <a:p>
-            <a:pPr marL="285750" indent="-285750">
-              <a:buFont typeface="Arial" panose="020B0604020202020204" pitchFamily="34" charset="0"/>
-              <a:buChar char="•"/>
-            </a:pPr>
-            <a:r>
-              <a:rPr lang="en-US" sz="1400" b="1" dirty="0">
-                <a:solidFill>
-                  <a:srgbClr val="FF0000"/>
-                </a:solidFill>
-              </a:rPr>
-              <a:t>Sentiment analysis</a:t>
-            </a:r>
-          </a:p>
-          <a:p>
-            <a:pPr marL="285750" indent="-285750">
-              <a:buFont typeface="Arial" panose="020B0604020202020204" pitchFamily="34" charset="0"/>
-              <a:buChar char="•"/>
-            </a:pPr>
-            <a:r>
-              <a:rPr lang="en-US" sz="1400" b="1" dirty="0">
-                <a:solidFill>
-                  <a:srgbClr val="FF0000"/>
-                </a:solidFill>
-              </a:rPr>
-              <a:t>Word Sense Disambiguation</a:t>
-            </a:r>
-            <a:r>
-              <a:rPr lang="en-US" sz="1400" dirty="0"/>
-              <a:t> by asking questions (chatbot)</a:t>
-            </a:r>
-          </a:p>
-          <a:p>
-            <a:pPr marL="285750" indent="-285750">
-              <a:buFont typeface="Arial" panose="020B0604020202020204" pitchFamily="34" charset="0"/>
-              <a:buChar char="•"/>
-            </a:pPr>
-            <a:r>
-              <a:rPr lang="en-US" sz="1400" b="1" dirty="0">
-                <a:solidFill>
-                  <a:srgbClr val="FF0000"/>
-                </a:solidFill>
-              </a:rPr>
-              <a:t>Name Entity Recognition</a:t>
-            </a:r>
-            <a:r>
-              <a:rPr lang="en-US" sz="1400" dirty="0"/>
-              <a:t> - identify/categorize names of persons, organizations, locations, expression of times, quantities, monetary values, percentages, etc.</a:t>
-            </a:r>
-          </a:p>
-          <a:p>
-            <a:pPr marL="285750" indent="-285750">
-              <a:buFont typeface="Arial" panose="020B0604020202020204" pitchFamily="34" charset="0"/>
-              <a:buChar char="•"/>
-            </a:pPr>
-            <a:r>
-              <a:rPr lang="en-US" sz="1400" b="1" dirty="0">
-                <a:solidFill>
-                  <a:srgbClr val="FF0000"/>
-                </a:solidFill>
-              </a:rPr>
-              <a:t>Bag of Words</a:t>
-            </a:r>
-            <a:r>
-              <a:rPr lang="en-US" sz="1400" dirty="0"/>
-              <a:t>(</a:t>
-            </a:r>
-            <a:r>
-              <a:rPr lang="en-US" sz="1400" dirty="0" err="1"/>
-              <a:t>BoW</a:t>
-            </a:r>
-            <a:r>
-              <a:rPr lang="en-US" sz="1400" dirty="0"/>
-              <a:t>) – calculate frequency of each word (drawback - doesn't understand order of words)</a:t>
-            </a:r>
-          </a:p>
-          <a:p>
-            <a:pPr marL="285750" indent="-285750">
-              <a:buFont typeface="Arial" panose="020B0604020202020204" pitchFamily="34" charset="0"/>
-              <a:buChar char="•"/>
-            </a:pPr>
-            <a:r>
-              <a:rPr lang="en-US" sz="1400" b="1" dirty="0">
-                <a:solidFill>
-                  <a:srgbClr val="FF0000"/>
-                </a:solidFill>
-              </a:rPr>
-              <a:t>N-gram</a:t>
-            </a:r>
-            <a:r>
-              <a:rPr lang="en-US" sz="1400" dirty="0"/>
-              <a:t> - set of N  sequential word tokens in a given document (</a:t>
-            </a:r>
-            <a:r>
-              <a:rPr lang="en-US" sz="1400" dirty="0" err="1"/>
-              <a:t>BoW</a:t>
-            </a:r>
-            <a:r>
-              <a:rPr lang="en-US" sz="1400" dirty="0"/>
-              <a:t> is basically a unigram model (N=1))</a:t>
-            </a:r>
-            <a:br>
-              <a:rPr lang="en-US" sz="1400" dirty="0"/>
-            </a:br>
-            <a:r>
-              <a:rPr lang="en-US" sz="1400" dirty="0"/>
-              <a:t>Problems with N-grams:</a:t>
-            </a:r>
-          </a:p>
-          <a:p>
-            <a:pPr marL="742950" lvl="1" indent="-285750">
-              <a:buFont typeface="Arial" panose="020B0604020202020204" pitchFamily="34" charset="0"/>
-              <a:buChar char="•"/>
-            </a:pPr>
-            <a:r>
-              <a:rPr lang="en-US" sz="1400" dirty="0"/>
-              <a:t>very high-dimensional and sparse set (difficult to train a model)</a:t>
-            </a:r>
-          </a:p>
-          <a:p>
-            <a:pPr marL="742950" lvl="1" indent="-285750">
-              <a:buFont typeface="Arial" panose="020B0604020202020204" pitchFamily="34" charset="0"/>
-              <a:buChar char="•"/>
-            </a:pPr>
-            <a:r>
-              <a:rPr lang="en-US" sz="1400" dirty="0"/>
-              <a:t>observation to appear equidistant from all the others</a:t>
-            </a:r>
-          </a:p>
-          <a:p>
-            <a:pPr marL="285750" indent="-285750">
-              <a:buFont typeface="Arial" panose="020B0604020202020204" pitchFamily="34" charset="0"/>
-              <a:buChar char="•"/>
-            </a:pPr>
-            <a:r>
-              <a:rPr lang="en-US" sz="1400" b="1" dirty="0">
-                <a:solidFill>
-                  <a:srgbClr val="FF0000"/>
-                </a:solidFill>
-              </a:rPr>
-              <a:t>TF-IDF</a:t>
-            </a:r>
-            <a:r>
-              <a:rPr lang="en-US" sz="1400" dirty="0"/>
-              <a:t> (Term Frequency-Inverse Document Frequency) – better than N-grams</a:t>
-            </a:r>
-          </a:p>
-          <a:p>
-            <a:pPr marL="285750" indent="-285750">
-              <a:buFont typeface="Arial" panose="020B0604020202020204" pitchFamily="34" charset="0"/>
-              <a:buChar char="•"/>
-            </a:pPr>
-            <a:r>
-              <a:rPr lang="en-US" sz="1400" b="1" dirty="0">
-                <a:solidFill>
-                  <a:srgbClr val="FF0000"/>
-                </a:solidFill>
-              </a:rPr>
-              <a:t>Word embeddings</a:t>
-            </a:r>
-            <a:r>
-              <a:rPr lang="en-US" sz="1400" dirty="0"/>
-              <a:t> – even better. Maps words into an n-dimensional vector space (using deep learning).</a:t>
-            </a:r>
-            <a:br>
-              <a:rPr lang="en-US" sz="1400" dirty="0"/>
-            </a:br>
-            <a:r>
-              <a:rPr lang="en-US" sz="1400" dirty="0"/>
-              <a:t>Examples: </a:t>
-            </a:r>
-            <a:r>
-              <a:rPr lang="en-US" sz="1400" b="1" dirty="0">
-                <a:solidFill>
-                  <a:srgbClr val="0070C0"/>
-                </a:solidFill>
-              </a:rPr>
-              <a:t>Word2Vec</a:t>
-            </a:r>
-            <a:r>
-              <a:rPr lang="en-US" sz="1400" dirty="0"/>
-              <a:t> by Google, </a:t>
-            </a:r>
-            <a:r>
-              <a:rPr lang="en-US" sz="1400" b="1" dirty="0" err="1">
-                <a:solidFill>
-                  <a:srgbClr val="0070C0"/>
-                </a:solidFill>
-              </a:rPr>
-              <a:t>Fasttext</a:t>
-            </a:r>
-            <a:r>
-              <a:rPr lang="en-US" sz="1400" b="1" dirty="0">
-                <a:solidFill>
-                  <a:srgbClr val="0070C0"/>
-                </a:solidFill>
-              </a:rPr>
-              <a:t> </a:t>
-            </a:r>
-            <a:r>
-              <a:rPr lang="en-US" sz="1400" dirty="0"/>
-              <a:t>by Facebook, </a:t>
-            </a:r>
-            <a:r>
-              <a:rPr lang="en-US" sz="1400" b="1" dirty="0">
-                <a:solidFill>
-                  <a:srgbClr val="0070C0"/>
-                </a:solidFill>
-              </a:rPr>
-              <a:t>Glove</a:t>
-            </a:r>
-            <a:r>
-              <a:rPr lang="en-US" sz="1400" dirty="0"/>
-              <a:t> by </a:t>
-            </a:r>
-            <a:r>
-              <a:rPr lang="en-US" sz="1400" dirty="0" err="1"/>
-              <a:t>Standford</a:t>
-            </a:r>
-            <a:endParaRPr lang="en-US" sz="1400" dirty="0"/>
+            <a:r>
+              <a:rPr lang="en-US" sz="2800" b="1" dirty="0"/>
+              <a:t>Feature Extraction from Documents – OCR</a:t>
+            </a:r>
+            <a:endParaRPr lang="el-GR" sz="2800" b="1" dirty="0">
+              <a:solidFill>
+                <a:srgbClr val="0070C0"/>
+              </a:solidFill>
+            </a:endParaRPr>
           </a:p>
         </p:txBody>
       </p:sp>
     </p:spTree>
     <p:extLst>
       <p:ext uri="{BB962C8B-B14F-4D97-AF65-F5344CB8AC3E}">
-        <p14:creationId xmlns:p14="http://schemas.microsoft.com/office/powerpoint/2010/main" val="3852478175"/>
+        <p14:creationId xmlns:p14="http://schemas.microsoft.com/office/powerpoint/2010/main" val="3220948565"/>
       </p:ext>
     </p:extLst>
   </p:cSld>
@@ -6255,7 +8166,7 @@
           <a:p>
             <a:r>
               <a:rPr lang="en-US" sz="2800" b="1" dirty="0"/>
-              <a:t>Extracting Features from Text - part 2</a:t>
+              <a:t>Extracting Features from Text - part 1</a:t>
             </a:r>
             <a:endParaRPr lang="el-GR" sz="2800" b="1" dirty="0">
               <a:solidFill>
@@ -6279,8 +8190,8 @@
         </p:nvSpPr>
         <p:spPr>
           <a:xfrm>
-            <a:off x="181922" y="751821"/>
-            <a:ext cx="6061716" cy="4832092"/>
+            <a:off x="1010596" y="866120"/>
+            <a:ext cx="8810297" cy="5693866"/>
           </a:xfrm>
           <a:prstGeom prst="rect">
             <a:avLst/>
@@ -6293,96 +8204,282 @@
           </a:bodyPr>
           <a:lstStyle/>
           <a:p>
-            <a:r>
-              <a:rPr lang="en-US" sz="1400" b="1" dirty="0"/>
-              <a:t>Resources:</a:t>
-            </a:r>
-          </a:p>
-          <a:p>
-            <a:pPr marL="285750" indent="-285750">
-              <a:buFont typeface="Arial" panose="020B0604020202020204" pitchFamily="34" charset="0"/>
-              <a:buChar char="•"/>
-            </a:pPr>
-            <a:endParaRPr lang="en-US" sz="1400" dirty="0"/>
-          </a:p>
-          <a:p>
-            <a:pPr marL="285750" indent="-285750">
-              <a:buFont typeface="Arial" panose="020B0604020202020204" pitchFamily="34" charset="0"/>
-              <a:buChar char="•"/>
-            </a:pPr>
-            <a:r>
-              <a:rPr lang="en-US" sz="1400" dirty="0"/>
-              <a:t>Continuous Numeric Data. Strategies for working with continuous … - by </a:t>
+            <a:pPr marL="285750" indent="-285750">
+              <a:buFont typeface="Arial" panose="020B0604020202020204" pitchFamily="34" charset="0"/>
+              <a:buChar char="•"/>
+            </a:pPr>
+            <a:r>
+              <a:rPr lang="en-US" sz="1400" b="1" dirty="0">
+                <a:solidFill>
+                  <a:srgbClr val="FF0000"/>
+                </a:solidFill>
+              </a:rPr>
+              <a:t>Text Cleaning</a:t>
+            </a:r>
+            <a:r>
+              <a:rPr lang="en-US" sz="1400" dirty="0"/>
+              <a:t>:</a:t>
+            </a:r>
+          </a:p>
+          <a:p>
+            <a:pPr marL="742950" lvl="1" indent="-285750">
+              <a:buFont typeface="Arial" panose="020B0604020202020204" pitchFamily="34" charset="0"/>
+              <a:buChar char="•"/>
+            </a:pPr>
+            <a:r>
+              <a:rPr lang="en-US" sz="1400" dirty="0"/>
+              <a:t>Converting words into lowercase</a:t>
+            </a:r>
+          </a:p>
+          <a:p>
+            <a:pPr marL="742950" lvl="1" indent="-285750">
+              <a:buFont typeface="Arial" panose="020B0604020202020204" pitchFamily="34" charset="0"/>
+              <a:buChar char="•"/>
+            </a:pPr>
+            <a:r>
+              <a:rPr lang="en-US" sz="1400" dirty="0"/>
+              <a:t>Removing leading and trailing whitespaces, punctuation, stop words (a, an, the, ...)</a:t>
+            </a:r>
+          </a:p>
+          <a:p>
+            <a:pPr marL="742950" lvl="1" indent="-285750">
+              <a:buFont typeface="Arial" panose="020B0604020202020204" pitchFamily="34" charset="0"/>
+              <a:buChar char="•"/>
+            </a:pPr>
+            <a:r>
+              <a:rPr lang="en-US" sz="1400" dirty="0"/>
+              <a:t>Expanding contractions (don’t -&gt; do not)</a:t>
+            </a:r>
+          </a:p>
+          <a:p>
+            <a:pPr marL="742950" lvl="1" indent="-285750">
+              <a:buFont typeface="Arial" panose="020B0604020202020204" pitchFamily="34" charset="0"/>
+              <a:buChar char="•"/>
+            </a:pPr>
+            <a:r>
+              <a:rPr lang="en-US" sz="1400" dirty="0"/>
+              <a:t>Removing special characters (numbers, emojis, </a:t>
             </a:r>
             <a:r>
               <a:rPr lang="en-US" sz="1400" dirty="0" err="1"/>
-              <a:t>Dipanjan</a:t>
-            </a:r>
-            <a:r>
-              <a:rPr lang="en-US" sz="1400" dirty="0"/>
-              <a:t> (DJ) Sarkar </a:t>
+              <a:t>etc</a:t>
+            </a:r>
+            <a:r>
+              <a:rPr lang="en-US" sz="1400" dirty="0"/>
+              <a:t>), HTML/XML tags</a:t>
+            </a:r>
+          </a:p>
+          <a:p>
+            <a:pPr marL="742950" lvl="1" indent="-285750">
+              <a:buFont typeface="Arial" panose="020B0604020202020204" pitchFamily="34" charset="0"/>
+              <a:buChar char="•"/>
+            </a:pPr>
+            <a:r>
+              <a:rPr lang="en-US" sz="1400" dirty="0"/>
+              <a:t>Replacing accented characters (such as </a:t>
+            </a:r>
+            <a:r>
+              <a:rPr lang="en-US" sz="1400" dirty="0" err="1"/>
+              <a:t>é</a:t>
+            </a:r>
+            <a:r>
+              <a:rPr lang="en-US" sz="1400" dirty="0"/>
+              <a:t>)</a:t>
+            </a:r>
+          </a:p>
+          <a:p>
+            <a:pPr marL="742950" lvl="1" indent="-285750">
+              <a:buFont typeface="Arial" panose="020B0604020202020204" pitchFamily="34" charset="0"/>
+              <a:buChar char="•"/>
+            </a:pPr>
+            <a:r>
+              <a:rPr lang="en-US" sz="1400" dirty="0"/>
+              <a:t>Correcting spelling errors</a:t>
+            </a:r>
+          </a:p>
+          <a:p>
+            <a:pPr marL="285750" indent="-285750">
+              <a:buFont typeface="Arial" panose="020B0604020202020204" pitchFamily="34" charset="0"/>
+              <a:buChar char="•"/>
+            </a:pPr>
+            <a:r>
+              <a:rPr lang="en-US" sz="1400" b="1" dirty="0">
+                <a:solidFill>
+                  <a:srgbClr val="FF0000"/>
+                </a:solidFill>
+              </a:rPr>
+              <a:t>Tokenizing</a:t>
+            </a:r>
+            <a:r>
+              <a:rPr lang="en-US" sz="1400" dirty="0"/>
+              <a:t> - split text into tokens</a:t>
+            </a:r>
+          </a:p>
+          <a:p>
+            <a:pPr marL="285750" indent="-285750">
+              <a:buFont typeface="Arial" panose="020B0604020202020204" pitchFamily="34" charset="0"/>
+              <a:buChar char="•"/>
+            </a:pPr>
+            <a:r>
+              <a:rPr lang="en-US" sz="1400" b="1" dirty="0">
+                <a:solidFill>
+                  <a:srgbClr val="FF0000"/>
+                </a:solidFill>
+              </a:rPr>
+              <a:t>Stemming</a:t>
+            </a:r>
+            <a:r>
+              <a:rPr lang="en-US" sz="1400" dirty="0"/>
+              <a:t> &amp; </a:t>
+            </a:r>
+            <a:r>
+              <a:rPr lang="en-US" sz="1400" b="1" dirty="0">
+                <a:solidFill>
+                  <a:srgbClr val="FF0000"/>
+                </a:solidFill>
+              </a:rPr>
+              <a:t>Lemmatization</a:t>
+            </a:r>
+            <a:r>
+              <a:rPr lang="en-US" sz="1400" dirty="0"/>
+              <a:t> - convert word into base forms:</a:t>
+            </a:r>
+          </a:p>
+          <a:p>
+            <a:pPr marL="742950" lvl="1" indent="-285750">
+              <a:buFont typeface="Arial" panose="020B0604020202020204" pitchFamily="34" charset="0"/>
+              <a:buChar char="•"/>
+            </a:pPr>
+            <a:r>
+              <a:rPr lang="en-US" sz="1400" dirty="0"/>
+              <a:t>Stemming  - essentially chops off letters from the end until the stem is reached</a:t>
+            </a:r>
+          </a:p>
+          <a:p>
+            <a:pPr marL="742950" lvl="1" indent="-285750">
+              <a:buFont typeface="Arial" panose="020B0604020202020204" pitchFamily="34" charset="0"/>
+              <a:buChar char="•"/>
+            </a:pPr>
+            <a:r>
+              <a:rPr lang="en-US" sz="1400" dirty="0"/>
+              <a:t>Lemmatization – more advanced:  "was" → "be", "mice" → "mouse"</a:t>
+            </a:r>
+          </a:p>
+          <a:p>
+            <a:pPr marL="285750" indent="-285750">
+              <a:buFont typeface="Arial" panose="020B0604020202020204" pitchFamily="34" charset="0"/>
+              <a:buChar char="•"/>
+            </a:pPr>
+            <a:r>
+              <a:rPr lang="en-US" sz="1400" b="1" dirty="0">
+                <a:solidFill>
+                  <a:srgbClr val="FF0000"/>
+                </a:solidFill>
+              </a:rPr>
+              <a:t>POS tagging</a:t>
+            </a:r>
+            <a:r>
+              <a:rPr lang="en-US" sz="1400" dirty="0"/>
+              <a:t> (Part-Of-Speech). Careful – same word may get different POS tag in different contexts.</a:t>
             </a:r>
             <a:br>
               <a:rPr lang="en-US" sz="1400" dirty="0"/>
             </a:br>
             <a:r>
               <a:rPr lang="en-US" sz="1400" dirty="0"/>
-              <a:t>- </a:t>
-            </a:r>
-            <a:r>
-              <a:rPr lang="en-US" sz="1400" dirty="0">
-                <a:hlinkClick r:id="rId2"/>
-              </a:rPr>
-              <a:t>https://towardsdatascience.com/understanding-feature-engineering-part-1-continuous-numeric-data-da4e47099a7b</a:t>
-            </a:r>
-            <a:r>
-              <a:rPr lang="en-US" sz="1400" dirty="0"/>
-              <a:t> </a:t>
-            </a:r>
-          </a:p>
-          <a:p>
-            <a:pPr marL="285750" indent="-285750">
-              <a:buFont typeface="Arial" panose="020B0604020202020204" pitchFamily="34" charset="0"/>
-              <a:buChar char="•"/>
-            </a:pPr>
-            <a:r>
-              <a:rPr lang="en-US" sz="1400" dirty="0"/>
-              <a:t>Traditional Methods for Text Data - by </a:t>
-            </a:r>
-            <a:r>
-              <a:rPr lang="en-US" sz="1400" dirty="0" err="1"/>
-              <a:t>Dipanjan</a:t>
-            </a:r>
-            <a:r>
-              <a:rPr lang="en-US" sz="1400" dirty="0"/>
-              <a:t> (DJ) Sarkar</a:t>
-            </a:r>
-            <a:br>
-              <a:rPr lang="en-US" sz="1400" dirty="0"/>
-            </a:br>
-            <a:r>
-              <a:rPr lang="en-US" sz="1400" dirty="0"/>
-              <a:t> - </a:t>
-            </a:r>
-            <a:r>
-              <a:rPr lang="en-US" sz="1400" dirty="0">
-                <a:hlinkClick r:id="rId3"/>
-              </a:rPr>
-              <a:t>https://towardsdatascience.com/understanding-feature-engineering-part-3-traditional-methods-for-text-data-f6f7d70acd41</a:t>
-            </a:r>
-            <a:r>
-              <a:rPr lang="en-US" sz="1400" dirty="0"/>
-              <a:t> </a:t>
-            </a:r>
-          </a:p>
-          <a:p>
-            <a:pPr marL="285750" indent="-285750">
-              <a:buFont typeface="Arial" panose="020B0604020202020204" pitchFamily="34" charset="0"/>
-              <a:buChar char="•"/>
-            </a:pPr>
-            <a:r>
-              <a:rPr lang="en-US" sz="1400" dirty="0"/>
-              <a:t>Text Vectorization: Bag of Words (</a:t>
+              <a:t>For example: </a:t>
+            </a:r>
+            <a:r>
+              <a:rPr lang="en-US" sz="1400" b="1" dirty="0">
+                <a:solidFill>
+                  <a:srgbClr val="FF0000"/>
+                </a:solidFill>
+              </a:rPr>
+              <a:t>bear</a:t>
+            </a:r>
+            <a:r>
+              <a:rPr lang="en-US" sz="1400" dirty="0"/>
+              <a:t> is an animal (noun), please </a:t>
+            </a:r>
+            <a:r>
+              <a:rPr lang="en-US" sz="1400" b="1" dirty="0">
+                <a:solidFill>
+                  <a:srgbClr val="FF0000"/>
+                </a:solidFill>
+              </a:rPr>
+              <a:t>bear</a:t>
+            </a:r>
+            <a:r>
+              <a:rPr lang="en-US" sz="1400" dirty="0"/>
+              <a:t> with me (verb)</a:t>
+            </a:r>
+          </a:p>
+          <a:p>
+            <a:pPr marL="285750" indent="-285750">
+              <a:buFont typeface="Arial" panose="020B0604020202020204" pitchFamily="34" charset="0"/>
+              <a:buChar char="•"/>
+            </a:pPr>
+            <a:r>
+              <a:rPr lang="en-US" sz="1400" b="1" dirty="0">
+                <a:solidFill>
+                  <a:srgbClr val="FF0000"/>
+                </a:solidFill>
+              </a:rPr>
+              <a:t>Sentiment analysis</a:t>
+            </a:r>
+          </a:p>
+          <a:p>
+            <a:pPr marL="285750" indent="-285750">
+              <a:buFont typeface="Arial" panose="020B0604020202020204" pitchFamily="34" charset="0"/>
+              <a:buChar char="•"/>
+            </a:pPr>
+            <a:r>
+              <a:rPr lang="en-US" sz="1400" b="1" dirty="0">
+                <a:solidFill>
+                  <a:srgbClr val="FF0000"/>
+                </a:solidFill>
+              </a:rPr>
+              <a:t>Word Sense Disambiguation</a:t>
+            </a:r>
+            <a:r>
+              <a:rPr lang="en-US" sz="1400" dirty="0"/>
+              <a:t> by asking questions (chatbot)</a:t>
+            </a:r>
+          </a:p>
+          <a:p>
+            <a:pPr marL="285750" indent="-285750">
+              <a:buFont typeface="Arial" panose="020B0604020202020204" pitchFamily="34" charset="0"/>
+              <a:buChar char="•"/>
+            </a:pPr>
+            <a:r>
+              <a:rPr lang="en-US" sz="1400" b="1" dirty="0">
+                <a:solidFill>
+                  <a:srgbClr val="FF0000"/>
+                </a:solidFill>
+              </a:rPr>
+              <a:t>Name Entity Recognition</a:t>
+            </a:r>
+            <a:r>
+              <a:rPr lang="en-US" sz="1400" dirty="0"/>
+              <a:t> - identify/categorize names of persons, organizations, locations, expression of times, quantities, monetary values, percentages, etc.</a:t>
+            </a:r>
+          </a:p>
+          <a:p>
+            <a:pPr marL="285750" indent="-285750">
+              <a:buFont typeface="Arial" panose="020B0604020202020204" pitchFamily="34" charset="0"/>
+              <a:buChar char="•"/>
+            </a:pPr>
+            <a:r>
+              <a:rPr lang="en-US" sz="1400" b="1" dirty="0">
+                <a:solidFill>
+                  <a:srgbClr val="FF0000"/>
+                </a:solidFill>
+              </a:rPr>
+              <a:t>Bag of Words</a:t>
+            </a:r>
+            <a:r>
+              <a:rPr lang="en-US" sz="1400" dirty="0"/>
+              <a:t>(</a:t>
             </a:r>
             <a:r>
               <a:rPr lang="en-US" sz="1400" dirty="0" err="1"/>
@@ -6390,531 +8487,160 @@
             </a:r>
             <a:r>
               <a:rPr lang="en-US" sz="1400" dirty="0"/>
-              <a:t>) - by Vaibhav </a:t>
+              <a:t>) – calculate frequency of each word (drawback - doesn't understand order of words)</a:t>
+            </a:r>
+          </a:p>
+          <a:p>
+            <a:pPr marL="285750" indent="-285750">
+              <a:buFont typeface="Arial" panose="020B0604020202020204" pitchFamily="34" charset="0"/>
+              <a:buChar char="•"/>
+            </a:pPr>
+            <a:r>
+              <a:rPr lang="en-US" sz="1400" b="1" dirty="0">
+                <a:solidFill>
+                  <a:srgbClr val="FF0000"/>
+                </a:solidFill>
+              </a:rPr>
+              <a:t>N-gram</a:t>
+            </a:r>
+            <a:r>
+              <a:rPr lang="en-US" sz="1400" dirty="0"/>
+              <a:t> - set of N  sequential word tokens in a given document (</a:t>
             </a:r>
             <a:r>
               <a:rPr lang="en-US" sz="1400" dirty="0" err="1"/>
-              <a:t>Jayaswal</a:t>
+              <a:t>BoW</a:t>
+            </a:r>
+            <a:r>
+              <a:rPr lang="en-US" sz="1400" dirty="0"/>
+              <a:t> is basically a unigram model (N=1))</a:t>
             </a:r>
             <a:br>
               <a:rPr lang="en-US" sz="1400" dirty="0"/>
             </a:br>
             <a:r>
               <a:rPr lang="en-US" sz="1400" dirty="0"/>
-              <a:t> - </a:t>
-            </a:r>
-            <a:r>
-              <a:rPr lang="en-US" sz="1400" dirty="0">
-                <a:hlinkClick r:id="rId4"/>
-              </a:rPr>
-              <a:t>https://towardsdatascience.com/text-vectorization-bag-of-words-bow-441d1bfce897</a:t>
-            </a:r>
-            <a:r>
-              <a:rPr lang="en-US" sz="1400" dirty="0"/>
+              <a:t>Problems with N-grams:</a:t>
+            </a:r>
+          </a:p>
+          <a:p>
+            <a:pPr marL="742950" lvl="1" indent="-285750">
+              <a:buFont typeface="Arial" panose="020B0604020202020204" pitchFamily="34" charset="0"/>
+              <a:buChar char="•"/>
+            </a:pPr>
+            <a:r>
+              <a:rPr lang="en-US" sz="1400" dirty="0"/>
+              <a:t>very high-dimensional and sparse set (difficult to train a model)</a:t>
+            </a:r>
+          </a:p>
+          <a:p>
+            <a:pPr marL="742950" lvl="1" indent="-285750">
+              <a:buFont typeface="Arial" panose="020B0604020202020204" pitchFamily="34" charset="0"/>
+              <a:buChar char="•"/>
+            </a:pPr>
+            <a:r>
+              <a:rPr lang="en-US" sz="1400" dirty="0"/>
+              <a:t>observation to appear equidistant from all the others</a:t>
+            </a:r>
+          </a:p>
+          <a:p>
+            <a:pPr marL="285750" indent="-285750">
+              <a:buFont typeface="Arial" panose="020B0604020202020204" pitchFamily="34" charset="0"/>
+              <a:buChar char="•"/>
+            </a:pPr>
+            <a:r>
+              <a:rPr lang="en-US" sz="1400" b="1" dirty="0">
+                <a:solidFill>
+                  <a:srgbClr val="FF0000"/>
+                </a:solidFill>
+              </a:rPr>
+              <a:t>TF-IDF</a:t>
+            </a:r>
+            <a:r>
+              <a:rPr lang="en-US" sz="1400" dirty="0"/>
+              <a:t> (Term Frequency-Inverse Document Frequency) – better than N-grams</a:t>
+            </a:r>
+          </a:p>
+          <a:p>
+            <a:pPr marL="285750" indent="-285750">
+              <a:buFont typeface="Arial" panose="020B0604020202020204" pitchFamily="34" charset="0"/>
+              <a:buChar char="•"/>
+            </a:pPr>
+            <a:r>
+              <a:rPr lang="en-US" sz="1400" b="1" dirty="0">
+                <a:solidFill>
+                  <a:srgbClr val="FF0000"/>
+                </a:solidFill>
+              </a:rPr>
+              <a:t>Word embeddings</a:t>
+            </a:r>
+            <a:r>
+              <a:rPr lang="en-US" sz="1400" dirty="0"/>
+              <a:t> – even better. Maps words into an n-dimensional vector space (using deep learning).</a:t>
+            </a:r>
+            <a:br>
+              <a:rPr lang="en-US" sz="1400" dirty="0"/>
+            </a:br>
+            <a:r>
+              <a:rPr lang="en-US" sz="1400" dirty="0"/>
+              <a:t>Examples: </a:t>
+            </a:r>
+            <a:r>
+              <a:rPr lang="en-US" sz="1400" b="1" dirty="0">
+                <a:solidFill>
+                  <a:srgbClr val="0070C0"/>
+                </a:solidFill>
+              </a:rPr>
+              <a:t>Word2Vec</a:t>
+            </a:r>
+            <a:r>
+              <a:rPr lang="en-US" sz="1400" dirty="0"/>
+              <a:t> by Google, </a:t>
+            </a:r>
+            <a:r>
+              <a:rPr lang="en-US" sz="1400" b="1" dirty="0" err="1">
+                <a:solidFill>
+                  <a:srgbClr val="0070C0"/>
+                </a:solidFill>
+              </a:rPr>
+              <a:t>Fasttext</a:t>
+            </a:r>
+            <a:r>
+              <a:rPr lang="en-US" sz="1400" b="1" dirty="0">
+                <a:solidFill>
+                  <a:srgbClr val="0070C0"/>
+                </a:solidFill>
+              </a:rPr>
               <a:t> </a:t>
             </a:r>
-          </a:p>
-          <a:p>
-            <a:pPr marL="285750" indent="-285750">
-              <a:buFont typeface="Arial" panose="020B0604020202020204" pitchFamily="34" charset="0"/>
-              <a:buChar char="•"/>
-            </a:pPr>
-            <a:r>
-              <a:rPr lang="en-US" sz="1400" dirty="0"/>
-              <a:t>Understanding NLP Word Embeddings — Text Vectorization - by Prabhu </a:t>
-            </a:r>
-            <a:br>
-              <a:rPr lang="en-US" sz="1400" dirty="0"/>
-            </a:br>
-            <a:r>
-              <a:rPr lang="en-US" sz="1400" dirty="0"/>
-              <a:t>- </a:t>
-            </a:r>
-            <a:r>
-              <a:rPr lang="en-US" sz="1400" dirty="0">
-                <a:hlinkClick r:id="rId5"/>
-              </a:rPr>
-              <a:t>https://towardsdatascience.com/understanding-nlp-word-embeddings-text-vectorization-1a23744f7223</a:t>
-            </a:r>
-            <a:r>
-              <a:rPr lang="en-US" sz="1400" dirty="0"/>
-              <a:t> </a:t>
-            </a:r>
-          </a:p>
-          <a:p>
-            <a:pPr marL="285750" indent="-285750">
-              <a:buFont typeface="Arial" panose="020B0604020202020204" pitchFamily="34" charset="0"/>
-              <a:buChar char="•"/>
-            </a:pPr>
-            <a:r>
-              <a:rPr lang="en-US" sz="1400" dirty="0"/>
-              <a:t>The Curse of Dimensionality. Why High Dimensional Data Can Be So… - by Tony </a:t>
-            </a:r>
-            <a:r>
-              <a:rPr lang="en-US" sz="1400" dirty="0" err="1"/>
-              <a:t>Yiu</a:t>
-            </a:r>
-            <a:r>
-              <a:rPr lang="en-US" sz="1400" dirty="0"/>
-              <a:t> </a:t>
-            </a:r>
-            <a:br>
-              <a:rPr lang="en-US" sz="1400" dirty="0"/>
-            </a:br>
-            <a:r>
-              <a:rPr lang="en-US" sz="1400" dirty="0"/>
-              <a:t>- </a:t>
-            </a:r>
-            <a:r>
-              <a:rPr lang="en-US" sz="1400" dirty="0">
-                <a:hlinkClick r:id="rId6"/>
-              </a:rPr>
-              <a:t>https://towardsdatascience.com/the-curse-of-dimensionality-50dc6e49aa1e</a:t>
-            </a:r>
-            <a:r>
-              <a:rPr lang="en-US" sz="1400" dirty="0"/>
-              <a:t> </a:t>
-            </a:r>
-          </a:p>
-          <a:p>
-            <a:pPr marL="285750" indent="-285750">
-              <a:buFont typeface="Arial" panose="020B0604020202020204" pitchFamily="34" charset="0"/>
-              <a:buChar char="•"/>
-            </a:pPr>
-            <a:r>
-              <a:rPr lang="en-US" sz="1400" dirty="0"/>
-              <a:t>5 Heroic Python NLP Libraries (</a:t>
-            </a:r>
-            <a:r>
-              <a:rPr lang="en-US" sz="1400" dirty="0" err="1"/>
-              <a:t>elitedatascience.com</a:t>
-            </a:r>
-            <a:r>
-              <a:rPr lang="en-US" sz="1400" dirty="0"/>
-              <a:t>) </a:t>
-            </a:r>
-            <a:br>
-              <a:rPr lang="en-US" sz="1400" dirty="0"/>
-            </a:br>
-            <a:r>
-              <a:rPr lang="en-US" sz="1400" dirty="0"/>
-              <a:t>- </a:t>
-            </a:r>
-            <a:r>
-              <a:rPr lang="en-US" sz="1400" dirty="0">
-                <a:hlinkClick r:id="rId7"/>
-              </a:rPr>
-              <a:t>https://elitedatascience.com/python-nlp-libraries</a:t>
-            </a:r>
-            <a:r>
-              <a:rPr lang="en-US" sz="1400" dirty="0"/>
-              <a:t> </a:t>
-            </a:r>
-          </a:p>
-          <a:p>
-            <a:pPr marL="285750" indent="-285750">
-              <a:buFont typeface="Arial" panose="020B0604020202020204" pitchFamily="34" charset="0"/>
-              <a:buChar char="•"/>
-            </a:pPr>
-            <a:endParaRPr lang="en-US" sz="1400" dirty="0"/>
-          </a:p>
-        </p:txBody>
-      </p:sp>
-      <p:sp>
-        <p:nvSpPr>
-          <p:cNvPr id="5" name="TextBox 4">
-            <a:extLst>
-              <a:ext uri="{FF2B5EF4-FFF2-40B4-BE49-F238E27FC236}">
-                <a16:creationId xmlns:a16="http://schemas.microsoft.com/office/drawing/2014/main" id="{25BF9403-69C5-924D-9453-8FC2127BB793}"/>
-              </a:ext>
-            </a:extLst>
-          </p:cNvPr>
-          <p:cNvSpPr txBox="1"/>
-          <p:nvPr/>
-        </p:nvSpPr>
-        <p:spPr>
-          <a:xfrm>
-            <a:off x="9841028" y="1639075"/>
-            <a:ext cx="1828800" cy="4185761"/>
-          </a:xfrm>
-          <a:prstGeom prst="rect">
-            <a:avLst/>
-          </a:prstGeom>
-          <a:noFill/>
-        </p:spPr>
-        <p:txBody>
-          <a:bodyPr wrap="square" rtlCol="0">
-            <a:spAutoFit/>
-          </a:bodyPr>
-          <a:lstStyle/>
-          <a:p>
-            <a:r>
-              <a:rPr lang="en-US" sz="1400" dirty="0"/>
-              <a:t>Sci-kit learn</a:t>
-            </a:r>
-          </a:p>
-          <a:p>
-            <a:endParaRPr lang="en-US" sz="1400" dirty="0"/>
-          </a:p>
-          <a:p>
-            <a:endParaRPr lang="en-US" sz="1400" dirty="0"/>
-          </a:p>
-          <a:p>
-            <a:r>
-              <a:rPr lang="en-US" sz="1400" dirty="0"/>
-              <a:t>NLTK</a:t>
-            </a:r>
-          </a:p>
-          <a:p>
-            <a:endParaRPr lang="en-US" sz="1400" dirty="0"/>
-          </a:p>
-          <a:p>
-            <a:endParaRPr lang="en-US" sz="1400" dirty="0"/>
-          </a:p>
-          <a:p>
-            <a:endParaRPr lang="en-US" sz="1400" dirty="0"/>
-          </a:p>
-          <a:p>
-            <a:r>
-              <a:rPr lang="en-US" sz="1400" dirty="0" err="1"/>
-              <a:t>spaCy</a:t>
-            </a:r>
-            <a:endParaRPr lang="en-US" sz="1400" dirty="0"/>
-          </a:p>
-          <a:p>
-            <a:endParaRPr lang="en-US" sz="1400" dirty="0"/>
-          </a:p>
-          <a:p>
-            <a:endParaRPr lang="en-US" sz="1400" dirty="0"/>
-          </a:p>
-          <a:p>
-            <a:r>
-              <a:rPr lang="en-US" sz="1400" dirty="0" err="1"/>
-              <a:t>Gensim</a:t>
-            </a:r>
-            <a:endParaRPr lang="en-US" sz="1400" dirty="0"/>
-          </a:p>
-          <a:p>
-            <a:endParaRPr lang="en-US" sz="1400" dirty="0"/>
-          </a:p>
-          <a:p>
-            <a:endParaRPr lang="en-US" sz="1400" dirty="0"/>
-          </a:p>
-          <a:p>
-            <a:r>
-              <a:rPr lang="en-US" sz="1400" dirty="0" err="1"/>
-              <a:t>Textblob</a:t>
-            </a:r>
-            <a:endParaRPr lang="en-US" sz="1400" dirty="0"/>
-          </a:p>
-          <a:p>
-            <a:endParaRPr lang="en-US" sz="1400" dirty="0"/>
-          </a:p>
-          <a:p>
-            <a:endParaRPr lang="en-US" sz="1400" dirty="0"/>
-          </a:p>
-          <a:p>
-            <a:endParaRPr lang="en-US" sz="1400" dirty="0"/>
-          </a:p>
-          <a:p>
+            <a:r>
+              <a:rPr lang="en-US" sz="1400" dirty="0"/>
+              <a:t>by Facebook, </a:t>
+            </a:r>
+            <a:r>
+              <a:rPr lang="en-US" sz="1400" b="1" dirty="0">
+                <a:solidFill>
+                  <a:srgbClr val="0070C0"/>
+                </a:solidFill>
+              </a:rPr>
+              <a:t>Glove</a:t>
+            </a:r>
+            <a:r>
+              <a:rPr lang="en-US" sz="1400" dirty="0"/>
+              <a:t> by </a:t>
+            </a:r>
             <a:r>
               <a:rPr lang="en-US" sz="1400" dirty="0" err="1"/>
               <a:t>Standford</a:t>
             </a:r>
-            <a:r>
-              <a:rPr lang="en-US" sz="1400" dirty="0"/>
-              <a:t> </a:t>
-            </a:r>
-            <a:r>
-              <a:rPr lang="en-US" sz="1400" dirty="0" err="1"/>
-              <a:t>CoreNLP</a:t>
-            </a:r>
             <a:endParaRPr lang="en-US" sz="1400" dirty="0"/>
-          </a:p>
-          <a:p>
-            <a:endParaRPr lang="en-US" sz="1400" dirty="0"/>
-          </a:p>
-        </p:txBody>
-      </p:sp>
-      <p:pic>
-        <p:nvPicPr>
-          <p:cNvPr id="6" name="Google Shape;214;p34" descr="scikit-learn - Wikipedia">
-            <a:extLst>
-              <a:ext uri="{FF2B5EF4-FFF2-40B4-BE49-F238E27FC236}">
-                <a16:creationId xmlns:a16="http://schemas.microsoft.com/office/drawing/2014/main" id="{4418D238-DD05-2941-A9F8-D4CFE885A7CE}"/>
-              </a:ext>
-            </a:extLst>
-          </p:cNvPr>
-          <p:cNvPicPr preferRelativeResize="0"/>
-          <p:nvPr/>
-        </p:nvPicPr>
-        <p:blipFill>
-          <a:blip r:embed="rId8" cstate="email">
-            <a:alphaModFix/>
-            <a:extLst>
-              <a:ext uri="{28A0092B-C50C-407E-A947-70E740481C1C}">
-                <a14:useLocalDpi xmlns:a14="http://schemas.microsoft.com/office/drawing/2010/main"/>
-              </a:ext>
-            </a:extLst>
-          </a:blip>
-          <a:stretch>
-            <a:fillRect/>
-          </a:stretch>
-        </p:blipFill>
-        <p:spPr>
-          <a:xfrm>
-            <a:off x="8597712" y="1472030"/>
-            <a:ext cx="1014716" cy="547151"/>
-          </a:xfrm>
-          <a:prstGeom prst="rect">
-            <a:avLst/>
-          </a:prstGeom>
-          <a:noFill/>
-          <a:ln>
-            <a:noFill/>
-          </a:ln>
-        </p:spPr>
-      </p:pic>
-      <p:pic>
-        <p:nvPicPr>
-          <p:cNvPr id="7" name="Google Shape;215;p34" descr="spaCy - Wikipedia">
-            <a:extLst>
-              <a:ext uri="{FF2B5EF4-FFF2-40B4-BE49-F238E27FC236}">
-                <a16:creationId xmlns:a16="http://schemas.microsoft.com/office/drawing/2014/main" id="{4BB2C685-CAF5-4443-8449-D8755D639D7B}"/>
-              </a:ext>
-            </a:extLst>
-          </p:cNvPr>
-          <p:cNvPicPr preferRelativeResize="0"/>
-          <p:nvPr/>
-        </p:nvPicPr>
-        <p:blipFill>
-          <a:blip r:embed="rId9" cstate="email">
-            <a:alphaModFix/>
-            <a:extLst>
-              <a:ext uri="{28A0092B-C50C-407E-A947-70E740481C1C}">
-                <a14:useLocalDpi xmlns:a14="http://schemas.microsoft.com/office/drawing/2010/main"/>
-              </a:ext>
-            </a:extLst>
-          </a:blip>
-          <a:stretch>
-            <a:fillRect/>
-          </a:stretch>
-        </p:blipFill>
-        <p:spPr>
-          <a:xfrm>
-            <a:off x="8687951" y="3104169"/>
-            <a:ext cx="924477" cy="331920"/>
-          </a:xfrm>
-          <a:prstGeom prst="rect">
-            <a:avLst/>
-          </a:prstGeom>
-          <a:noFill/>
-          <a:ln>
-            <a:noFill/>
-          </a:ln>
-        </p:spPr>
-      </p:pic>
-      <p:pic>
-        <p:nvPicPr>
-          <p:cNvPr id="8" name="Google Shape;216;p34" descr="TextBlob: Simplified Text Processing — TextBlob 0.16.0 documentation">
-            <a:extLst>
-              <a:ext uri="{FF2B5EF4-FFF2-40B4-BE49-F238E27FC236}">
-                <a16:creationId xmlns:a16="http://schemas.microsoft.com/office/drawing/2014/main" id="{18576110-FE8E-AC47-A856-656599337B6B}"/>
-              </a:ext>
-            </a:extLst>
-          </p:cNvPr>
-          <p:cNvPicPr preferRelativeResize="0"/>
-          <p:nvPr/>
-        </p:nvPicPr>
-        <p:blipFill>
-          <a:blip r:embed="rId10" cstate="email">
-            <a:alphaModFix/>
-            <a:extLst>
-              <a:ext uri="{28A0092B-C50C-407E-A947-70E740481C1C}">
-                <a14:useLocalDpi xmlns:a14="http://schemas.microsoft.com/office/drawing/2010/main"/>
-              </a:ext>
-            </a:extLst>
-          </a:blip>
-          <a:stretch>
-            <a:fillRect/>
-          </a:stretch>
-        </p:blipFill>
-        <p:spPr>
-          <a:xfrm>
-            <a:off x="8823556" y="4310001"/>
-            <a:ext cx="653265" cy="596892"/>
-          </a:xfrm>
-          <a:prstGeom prst="rect">
-            <a:avLst/>
-          </a:prstGeom>
-          <a:noFill/>
-          <a:ln>
-            <a:noFill/>
-          </a:ln>
-        </p:spPr>
-      </p:pic>
-      <p:pic>
-        <p:nvPicPr>
-          <p:cNvPr id="9" name="Google Shape;217;p34" descr="Improving gensim's documentation. Between the months of January and April…  | by Manos Stergiadis | Medium">
-            <a:extLst>
-              <a:ext uri="{FF2B5EF4-FFF2-40B4-BE49-F238E27FC236}">
-                <a16:creationId xmlns:a16="http://schemas.microsoft.com/office/drawing/2014/main" id="{DF6DCACB-E8C3-2B45-BC10-78F180C5FF59}"/>
-              </a:ext>
-            </a:extLst>
-          </p:cNvPr>
-          <p:cNvPicPr preferRelativeResize="0"/>
-          <p:nvPr/>
-        </p:nvPicPr>
-        <p:blipFill>
-          <a:blip r:embed="rId11" cstate="email">
-            <a:alphaModFix/>
-            <a:extLst>
-              <a:ext uri="{28A0092B-C50C-407E-A947-70E740481C1C}">
-                <a14:useLocalDpi xmlns:a14="http://schemas.microsoft.com/office/drawing/2010/main"/>
-              </a:ext>
-            </a:extLst>
-          </a:blip>
-          <a:stretch>
-            <a:fillRect/>
-          </a:stretch>
-        </p:blipFill>
-        <p:spPr>
-          <a:xfrm>
-            <a:off x="8593507" y="3731956"/>
-            <a:ext cx="977587" cy="356724"/>
-          </a:xfrm>
-          <a:prstGeom prst="rect">
-            <a:avLst/>
-          </a:prstGeom>
-          <a:noFill/>
-          <a:ln>
-            <a:noFill/>
-          </a:ln>
-        </p:spPr>
-      </p:pic>
-      <p:pic>
-        <p:nvPicPr>
-          <p:cNvPr id="10" name="Google Shape;218;p34" descr="NLTK Tutorial —— A Python package - Clay-Technology World">
-            <a:extLst>
-              <a:ext uri="{FF2B5EF4-FFF2-40B4-BE49-F238E27FC236}">
-                <a16:creationId xmlns:a16="http://schemas.microsoft.com/office/drawing/2014/main" id="{6F2F5FA2-624F-9449-B51F-BF681F7E002A}"/>
-              </a:ext>
-            </a:extLst>
-          </p:cNvPr>
-          <p:cNvPicPr preferRelativeResize="0"/>
-          <p:nvPr/>
-        </p:nvPicPr>
-        <p:blipFill>
-          <a:blip r:embed="rId12" cstate="email">
-            <a:alphaModFix/>
-            <a:extLst>
-              <a:ext uri="{28A0092B-C50C-407E-A947-70E740481C1C}">
-                <a14:useLocalDpi xmlns:a14="http://schemas.microsoft.com/office/drawing/2010/main"/>
-              </a:ext>
-            </a:extLst>
-          </a:blip>
-          <a:stretch>
-            <a:fillRect/>
-          </a:stretch>
-        </p:blipFill>
-        <p:spPr>
-          <a:xfrm>
-            <a:off x="8765173" y="2136085"/>
-            <a:ext cx="679794" cy="739483"/>
-          </a:xfrm>
-          <a:prstGeom prst="rect">
-            <a:avLst/>
-          </a:prstGeom>
-          <a:noFill/>
-          <a:ln>
-            <a:noFill/>
-          </a:ln>
-        </p:spPr>
-      </p:pic>
-      <p:pic>
-        <p:nvPicPr>
-          <p:cNvPr id="1026" name="Picture 2" descr="GitHub - stanfordnlp/CoreNLP: Stanford CoreNLP: A Java suite of core NLP  tools.">
-            <a:extLst>
-              <a:ext uri="{FF2B5EF4-FFF2-40B4-BE49-F238E27FC236}">
-                <a16:creationId xmlns:a16="http://schemas.microsoft.com/office/drawing/2014/main" id="{EEC151A0-FC8D-6646-B396-B39C528C411B}"/>
-              </a:ext>
-            </a:extLst>
-          </p:cNvPr>
-          <p:cNvPicPr>
-            <a:picLocks noChangeAspect="1" noChangeArrowheads="1"/>
-          </p:cNvPicPr>
-          <p:nvPr/>
-        </p:nvPicPr>
-        <p:blipFill rotWithShape="1">
-          <a:blip r:embed="rId13" cstate="email">
-            <a:extLst>
-              <a:ext uri="{28A0092B-C50C-407E-A947-70E740481C1C}">
-                <a14:useLocalDpi xmlns:a14="http://schemas.microsoft.com/office/drawing/2010/main"/>
-              </a:ext>
-            </a:extLst>
-          </a:blip>
-          <a:srcRect/>
-          <a:stretch/>
-        </p:blipFill>
-        <p:spPr bwMode="auto">
-          <a:xfrm>
-            <a:off x="8777345" y="5148864"/>
-            <a:ext cx="793749" cy="500062"/>
-          </a:xfrm>
-          <a:prstGeom prst="rect">
-            <a:avLst/>
-          </a:prstGeom>
-          <a:noFill/>
-          <a:extLst>
-            <a:ext uri="{909E8E84-426E-40DD-AFC4-6F175D3DCCD1}">
-              <a14:hiddenFill xmlns:a14="http://schemas.microsoft.com/office/drawing/2010/main">
-                <a:solidFill>
-                  <a:srgbClr val="FFFFFF"/>
-                </a:solidFill>
-              </a14:hiddenFill>
-            </a:ext>
-          </a:extLst>
-        </p:spPr>
-      </p:pic>
-      <p:sp>
-        <p:nvSpPr>
-          <p:cNvPr id="11" name="TextBox 10">
-            <a:extLst>
-              <a:ext uri="{FF2B5EF4-FFF2-40B4-BE49-F238E27FC236}">
-                <a16:creationId xmlns:a16="http://schemas.microsoft.com/office/drawing/2014/main" id="{BA5C6CCE-95BE-0E41-929F-91FC06B49A0E}"/>
-              </a:ext>
-            </a:extLst>
-          </p:cNvPr>
-          <p:cNvSpPr txBox="1"/>
-          <p:nvPr/>
-        </p:nvSpPr>
-        <p:spPr>
-          <a:xfrm>
-            <a:off x="8687951" y="663832"/>
-            <a:ext cx="2057400" cy="369332"/>
-          </a:xfrm>
-          <a:prstGeom prst="rect">
-            <a:avLst/>
-          </a:prstGeom>
-          <a:noFill/>
-        </p:spPr>
-        <p:txBody>
-          <a:bodyPr wrap="square" rtlCol="0">
-            <a:spAutoFit/>
-          </a:bodyPr>
-          <a:lstStyle/>
-          <a:p>
-            <a:r>
-              <a:rPr lang="en-US" b="1" dirty="0"/>
-              <a:t>Common Libraries</a:t>
-            </a:r>
           </a:p>
         </p:txBody>
       </p:sp>
     </p:spTree>
     <p:extLst>
       <p:ext uri="{BB962C8B-B14F-4D97-AF65-F5344CB8AC3E}">
-        <p14:creationId xmlns:p14="http://schemas.microsoft.com/office/powerpoint/2010/main" val="24194840"/>
+        <p14:creationId xmlns:p14="http://schemas.microsoft.com/office/powerpoint/2010/main" val="3852478175"/>
       </p:ext>
     </p:extLst>
   </p:cSld>
@@ -6955,8 +8681,8 @@
         </p:nvSpPr>
         <p:spPr>
           <a:xfrm>
-            <a:off x="1425039" y="396647"/>
-            <a:ext cx="6096000" cy="523220"/>
+            <a:off x="-1" y="0"/>
+            <a:ext cx="5943601" cy="523220"/>
           </a:xfrm>
           <a:prstGeom prst="rect">
             <a:avLst/>
@@ -6969,10 +8695,9 @@
           </a:bodyPr>
           <a:lstStyle/>
           <a:p>
-            <a:pPr algn="ctr"/>
             <a:r>
               <a:rPr lang="en-US" sz="2800" b="1" dirty="0"/>
-              <a:t>H2O.ai – Automatic Feature Engineering</a:t>
+              <a:t>Extracting Features from Text - part 2</a:t>
             </a:r>
             <a:endParaRPr lang="el-GR" sz="2800" b="1" dirty="0">
               <a:solidFill>
@@ -6996,8 +8721,8 @@
         </p:nvSpPr>
         <p:spPr>
           <a:xfrm>
-            <a:off x="1101975" y="1647334"/>
-            <a:ext cx="9326696" cy="1323439"/>
+            <a:off x="654821" y="1012954"/>
+            <a:ext cx="6061716" cy="4832092"/>
           </a:xfrm>
           <a:prstGeom prst="rect">
             <a:avLst/>
@@ -7010,104 +8735,239 @@
           </a:bodyPr>
           <a:lstStyle/>
           <a:p>
-            <a:pPr marL="285750" indent="-285750">
-              <a:buFont typeface="Arial" panose="020B0604020202020204" pitchFamily="34" charset="0"/>
-              <a:buChar char="•"/>
-            </a:pPr>
-            <a:r>
-              <a:rPr lang="en-US" sz="1600" b="1" dirty="0">
-                <a:solidFill>
-                  <a:srgbClr val="FF0000"/>
-                </a:solidFill>
-              </a:rPr>
-              <a:t>New features are created</a:t>
-            </a:r>
-            <a:r>
-              <a:rPr lang="en-US" sz="1600" dirty="0"/>
-              <a:t> by doing </a:t>
-            </a:r>
-            <a:r>
-              <a:rPr lang="en-US" sz="1600" b="1" dirty="0">
-                <a:solidFill>
-                  <a:srgbClr val="FF0000"/>
-                </a:solidFill>
-              </a:rPr>
-              <a:t>transformations</a:t>
-            </a:r>
-            <a:r>
-              <a:rPr lang="en-US" sz="1600" dirty="0"/>
-              <a:t> and/or </a:t>
-            </a:r>
-            <a:r>
-              <a:rPr lang="en-US" sz="1600" b="1" dirty="0">
-                <a:solidFill>
-                  <a:srgbClr val="FF0000"/>
-                </a:solidFill>
-              </a:rPr>
-              <a:t>interactions</a:t>
-            </a:r>
-            <a:r>
-              <a:rPr lang="en-US" sz="1600" dirty="0"/>
-              <a:t> on the dataset columns. </a:t>
-            </a:r>
-          </a:p>
-          <a:p>
-            <a:pPr marL="285750" indent="-285750">
-              <a:buFont typeface="Arial" panose="020B0604020202020204" pitchFamily="34" charset="0"/>
-              <a:buChar char="•"/>
-            </a:pPr>
-            <a:r>
-              <a:rPr lang="en-US" sz="1600" dirty="0"/>
-              <a:t>Feature creation and selection is </a:t>
-            </a:r>
-            <a:r>
-              <a:rPr lang="en-US" sz="1600" b="1" dirty="0">
-                <a:solidFill>
-                  <a:srgbClr val="FF0000"/>
-                </a:solidFill>
-              </a:rPr>
-              <a:t>evolutionary</a:t>
-            </a:r>
-            <a:r>
-              <a:rPr lang="en-US" sz="1600" dirty="0"/>
-              <a:t> (based on variable importance of previous iteration)</a:t>
-            </a:r>
-          </a:p>
-          <a:p>
-            <a:pPr marL="285750" indent="-285750">
-              <a:buFont typeface="Arial" panose="020B0604020202020204" pitchFamily="34" charset="0"/>
-              <a:buChar char="•"/>
-            </a:pPr>
-            <a:r>
-              <a:rPr lang="en-US" sz="1600" dirty="0"/>
-              <a:t>Feature creation uses genetic algorithm to find the best set of feature transformations and model parameters for an experiment/dataset.</a:t>
+            <a:r>
+              <a:rPr lang="en-US" sz="1400" b="1" dirty="0"/>
+              <a:t>Resources:</a:t>
+            </a:r>
+          </a:p>
+          <a:p>
+            <a:pPr marL="285750" indent="-285750">
+              <a:buFont typeface="Arial" panose="020B0604020202020204" pitchFamily="34" charset="0"/>
+              <a:buChar char="•"/>
+            </a:pPr>
+            <a:endParaRPr lang="en-US" sz="1400" dirty="0"/>
+          </a:p>
+          <a:p>
+            <a:pPr marL="285750" indent="-285750">
+              <a:buFont typeface="Arial" panose="020B0604020202020204" pitchFamily="34" charset="0"/>
+              <a:buChar char="•"/>
+            </a:pPr>
+            <a:r>
+              <a:rPr lang="en-US" sz="1400" dirty="0"/>
+              <a:t>Continuous Numeric Data. Strategies for working with continuous … - by </a:t>
+            </a:r>
+            <a:r>
+              <a:rPr lang="en-US" sz="1400" dirty="0" err="1"/>
+              <a:t>Dipanjan</a:t>
+            </a:r>
+            <a:r>
+              <a:rPr lang="en-US" sz="1400" dirty="0"/>
+              <a:t> (DJ) Sarkar </a:t>
             </a:r>
             <a:br>
-              <a:rPr lang="en-US" sz="1600" dirty="0"/>
+              <a:rPr lang="en-US" sz="1400" dirty="0"/>
             </a:br>
             <a:r>
               <a:rPr lang="en-US" sz="1400" dirty="0"/>
-              <a:t> - </a:t>
+              <a:t>- </a:t>
             </a:r>
             <a:r>
               <a:rPr lang="en-US" sz="1400" dirty="0">
                 <a:hlinkClick r:id="rId2"/>
               </a:rPr>
-              <a:t>https://docs.h2o.ai/driverless-ai/latest-stable/docs/userguide/feature-engineering.html</a:t>
+              <a:t>https://towardsdatascience.com/understanding-feature-engineering-part-1-continuous-numeric-data-da4e47099a7b</a:t>
             </a:r>
             <a:r>
               <a:rPr lang="en-US" sz="1400" dirty="0"/>
               <a:t> </a:t>
             </a:r>
+          </a:p>
+          <a:p>
+            <a:pPr marL="285750" indent="-285750">
+              <a:buFont typeface="Arial" panose="020B0604020202020204" pitchFamily="34" charset="0"/>
+              <a:buChar char="•"/>
+            </a:pPr>
+            <a:r>
+              <a:rPr lang="en-US" sz="1400" dirty="0"/>
+              <a:t>Traditional Methods for Text Data - by </a:t>
+            </a:r>
+            <a:r>
+              <a:rPr lang="en-US" sz="1400" dirty="0" err="1"/>
+              <a:t>Dipanjan</a:t>
+            </a:r>
+            <a:r>
+              <a:rPr lang="en-US" sz="1400" dirty="0"/>
+              <a:t> (DJ) Sarkar</a:t>
+            </a:r>
+            <a:br>
+              <a:rPr lang="en-US" sz="1400" dirty="0"/>
+            </a:br>
+            <a:r>
+              <a:rPr lang="en-US" sz="1400" dirty="0"/>
+              <a:t> - </a:t>
+            </a:r>
+            <a:r>
+              <a:rPr lang="en-US" sz="1400" dirty="0">
+                <a:hlinkClick r:id="rId3"/>
+              </a:rPr>
+              <a:t>https://towardsdatascience.com/understanding-feature-engineering-part-3-traditional-methods-for-text-data-f6f7d70acd41</a:t>
+            </a:r>
+            <a:r>
+              <a:rPr lang="en-US" sz="1400" dirty="0"/>
+              <a:t> </a:t>
+            </a:r>
+          </a:p>
+          <a:p>
+            <a:pPr marL="285750" indent="-285750">
+              <a:buFont typeface="Arial" panose="020B0604020202020204" pitchFamily="34" charset="0"/>
+              <a:buChar char="•"/>
+            </a:pPr>
+            <a:r>
+              <a:rPr lang="en-US" sz="1400" dirty="0"/>
+              <a:t>Text Vectorization: Bag of Words (</a:t>
+            </a:r>
+            <a:r>
+              <a:rPr lang="en-US" sz="1400" dirty="0" err="1"/>
+              <a:t>BoW</a:t>
+            </a:r>
+            <a:r>
+              <a:rPr lang="en-US" sz="1400" dirty="0"/>
+              <a:t>) - by Vaibhav </a:t>
+            </a:r>
+            <a:r>
+              <a:rPr lang="en-US" sz="1400" dirty="0" err="1"/>
+              <a:t>Jayaswal</a:t>
+            </a:r>
+            <a:br>
+              <a:rPr lang="en-US" sz="1400" dirty="0"/>
+            </a:br>
+            <a:r>
+              <a:rPr lang="en-US" sz="1400" dirty="0"/>
+              <a:t> - </a:t>
+            </a:r>
+            <a:r>
+              <a:rPr lang="en-US" sz="1400" dirty="0">
+                <a:hlinkClick r:id="rId4"/>
+              </a:rPr>
+              <a:t>https://towardsdatascience.com/text-vectorization-bag-of-words-bow-441d1bfce897</a:t>
+            </a:r>
+            <a:r>
+              <a:rPr lang="en-US" sz="1400" dirty="0"/>
+              <a:t> </a:t>
+            </a:r>
+          </a:p>
+          <a:p>
+            <a:pPr marL="285750" indent="-285750">
+              <a:buFont typeface="Arial" panose="020B0604020202020204" pitchFamily="34" charset="0"/>
+              <a:buChar char="•"/>
+            </a:pPr>
+            <a:r>
+              <a:rPr lang="en-US" sz="1400" dirty="0"/>
+              <a:t>Understanding NLP Word Embeddings — Text Vectorization - by Prabhu </a:t>
+            </a:r>
+            <a:br>
+              <a:rPr lang="en-US" sz="1400" dirty="0"/>
+            </a:br>
+            <a:r>
+              <a:rPr lang="en-US" sz="1400" dirty="0"/>
+              <a:t>- </a:t>
+            </a:r>
+            <a:r>
+              <a:rPr lang="en-US" sz="1400" dirty="0">
+                <a:hlinkClick r:id="rId5"/>
+              </a:rPr>
+              <a:t>https://towardsdatascience.com/understanding-nlp-word-embeddings-text-vectorization-1a23744f7223</a:t>
+            </a:r>
+            <a:r>
+              <a:rPr lang="en-US" sz="1400" dirty="0"/>
+              <a:t> </a:t>
+            </a:r>
+          </a:p>
+          <a:p>
+            <a:pPr marL="285750" indent="-285750">
+              <a:buFont typeface="Arial" panose="020B0604020202020204" pitchFamily="34" charset="0"/>
+              <a:buChar char="•"/>
+            </a:pPr>
+            <a:r>
+              <a:rPr lang="en-US" sz="1400" dirty="0"/>
+              <a:t>The Curse of Dimensionality. Why High Dimensional Data Can Be So… - by Tony </a:t>
+            </a:r>
+            <a:r>
+              <a:rPr lang="en-US" sz="1400" dirty="0" err="1"/>
+              <a:t>Yiu</a:t>
+            </a:r>
+            <a:r>
+              <a:rPr lang="en-US" sz="1400" dirty="0"/>
+              <a:t> </a:t>
+            </a:r>
+            <a:br>
+              <a:rPr lang="en-US" sz="1400" dirty="0"/>
+            </a:br>
+            <a:r>
+              <a:rPr lang="en-US" sz="1400" dirty="0"/>
+              <a:t>- </a:t>
+            </a:r>
+            <a:r>
+              <a:rPr lang="en-US" sz="1400" dirty="0">
+                <a:hlinkClick r:id="rId6"/>
+              </a:rPr>
+              <a:t>https://towardsdatascience.com/the-curse-of-dimensionality-50dc6e49aa1e</a:t>
+            </a:r>
+            <a:r>
+              <a:rPr lang="en-US" sz="1400" dirty="0"/>
+              <a:t> </a:t>
+            </a:r>
+          </a:p>
+          <a:p>
+            <a:pPr marL="285750" indent="-285750">
+              <a:buFont typeface="Arial" panose="020B0604020202020204" pitchFamily="34" charset="0"/>
+              <a:buChar char="•"/>
+            </a:pPr>
+            <a:r>
+              <a:rPr lang="en-US" sz="1400" dirty="0"/>
+              <a:t>5 Heroic Python NLP Libraries (</a:t>
+            </a:r>
+            <a:r>
+              <a:rPr lang="en-US" sz="1400" dirty="0" err="1"/>
+              <a:t>elitedatascience.com</a:t>
+            </a:r>
+            <a:r>
+              <a:rPr lang="en-US" sz="1400" dirty="0"/>
+              <a:t>) </a:t>
+            </a:r>
+            <a:br>
+              <a:rPr lang="en-US" sz="1400" dirty="0"/>
+            </a:br>
+            <a:r>
+              <a:rPr lang="en-US" sz="1400" dirty="0"/>
+              <a:t>- </a:t>
+            </a:r>
+            <a:r>
+              <a:rPr lang="en-US" sz="1400" dirty="0">
+                <a:hlinkClick r:id="rId7"/>
+              </a:rPr>
+              <a:t>https://elitedatascience.com/python-nlp-libraries</a:t>
+            </a:r>
+            <a:r>
+              <a:rPr lang="en-US" sz="1400" dirty="0"/>
+              <a:t> </a:t>
+            </a:r>
+          </a:p>
+          <a:p>
+            <a:pPr marL="285750" indent="-285750">
+              <a:buFont typeface="Arial" panose="020B0604020202020204" pitchFamily="34" charset="0"/>
+              <a:buChar char="•"/>
+            </a:pPr>
+            <a:endParaRPr lang="en-US" sz="1400" dirty="0"/>
           </a:p>
         </p:txBody>
       </p:sp>
       <p:sp>
         <p:nvSpPr>
-          <p:cNvPr id="7" name="TextBox 6">
-            <a:extLst>
-              <a:ext uri="{FF2B5EF4-FFF2-40B4-BE49-F238E27FC236}">
-                <a16:creationId xmlns:a16="http://schemas.microsoft.com/office/drawing/2014/main" id="{BF029EBF-BE31-8345-BEE6-7450D26D1A39}"/>
+          <p:cNvPr id="5" name="TextBox 4">
+            <a:extLst>
+              <a:ext uri="{FF2B5EF4-FFF2-40B4-BE49-F238E27FC236}">
+                <a16:creationId xmlns:a16="http://schemas.microsoft.com/office/drawing/2014/main" id="{25BF9403-69C5-924D-9453-8FC2127BB793}"/>
               </a:ext>
             </a:extLst>
           </p:cNvPr>
@@ -7116,8 +8976,8 @@
         </p:nvSpPr>
         <p:spPr>
           <a:xfrm>
-            <a:off x="1101975" y="3442902"/>
-            <a:ext cx="10499474" cy="1508105"/>
+            <a:off x="9841028" y="1639075"/>
+            <a:ext cx="1828800" cy="4185761"/>
           </a:xfrm>
           <a:prstGeom prst="rect">
             <a:avLst/>
@@ -7130,81 +8990,295 @@
           </a:bodyPr>
           <a:lstStyle/>
           <a:p>
-            <a:pPr marL="285750" indent="-285750">
-              <a:buFont typeface="Arial" panose="020B0604020202020204" pitchFamily="34" charset="0"/>
-              <a:buChar char="•"/>
-            </a:pPr>
-            <a:r>
-              <a:rPr lang="en-US" sz="1600" dirty="0"/>
-              <a:t>Driverless AI Transformers (Numeric, Categorical, Time &amp; Date, NLP (text), Image)</a:t>
-            </a:r>
-            <a:br>
-              <a:rPr lang="en-US" sz="1600" dirty="0"/>
-            </a:br>
-            <a:r>
-              <a:rPr lang="en-US" sz="1600" dirty="0"/>
-              <a:t>See big list of transformers here: </a:t>
-            </a:r>
-            <a:br>
-              <a:rPr lang="en-US" sz="1600" dirty="0"/>
-            </a:br>
-            <a:r>
-              <a:rPr lang="en-US" sz="1400" dirty="0"/>
-              <a:t> - </a:t>
-            </a:r>
-            <a:r>
-              <a:rPr lang="en-US" sz="1400" dirty="0">
-                <a:hlinkClick r:id="rId3"/>
-              </a:rPr>
-              <a:t>https://docs.h2o.ai/driverless-ai/latest-stable/docs/userguide/transformations.html#transformations</a:t>
+            <a:r>
+              <a:rPr lang="en-US" sz="1400" dirty="0"/>
+              <a:t>Sci-kit learn</a:t>
+            </a:r>
+          </a:p>
+          <a:p>
+            <a:endParaRPr lang="en-US" sz="1400" dirty="0"/>
+          </a:p>
+          <a:p>
+            <a:endParaRPr lang="en-US" sz="1400" dirty="0"/>
+          </a:p>
+          <a:p>
+            <a:r>
+              <a:rPr lang="en-US" sz="1400" dirty="0"/>
+              <a:t>NLTK</a:t>
+            </a:r>
+          </a:p>
+          <a:p>
+            <a:endParaRPr lang="en-US" sz="1400" dirty="0"/>
+          </a:p>
+          <a:p>
+            <a:endParaRPr lang="en-US" sz="1400" dirty="0"/>
+          </a:p>
+          <a:p>
+            <a:endParaRPr lang="en-US" sz="1400" dirty="0"/>
+          </a:p>
+          <a:p>
+            <a:r>
+              <a:rPr lang="en-US" sz="1400" dirty="0" err="1"/>
+              <a:t>spaCy</a:t>
+            </a:r>
+            <a:endParaRPr lang="en-US" sz="1400" dirty="0"/>
+          </a:p>
+          <a:p>
+            <a:endParaRPr lang="en-US" sz="1400" dirty="0"/>
+          </a:p>
+          <a:p>
+            <a:endParaRPr lang="en-US" sz="1400" dirty="0"/>
+          </a:p>
+          <a:p>
+            <a:r>
+              <a:rPr lang="en-US" sz="1400" dirty="0" err="1"/>
+              <a:t>Gensim</a:t>
+            </a:r>
+            <a:endParaRPr lang="en-US" sz="1400" dirty="0"/>
+          </a:p>
+          <a:p>
+            <a:endParaRPr lang="en-US" sz="1400" dirty="0"/>
+          </a:p>
+          <a:p>
+            <a:endParaRPr lang="en-US" sz="1400" dirty="0"/>
+          </a:p>
+          <a:p>
+            <a:r>
+              <a:rPr lang="en-US" sz="1400" dirty="0" err="1"/>
+              <a:t>Textblob</a:t>
+            </a:r>
+            <a:endParaRPr lang="en-US" sz="1400" dirty="0"/>
+          </a:p>
+          <a:p>
+            <a:endParaRPr lang="en-US" sz="1400" dirty="0"/>
+          </a:p>
+          <a:p>
+            <a:endParaRPr lang="en-US" sz="1400" dirty="0"/>
+          </a:p>
+          <a:p>
+            <a:endParaRPr lang="en-US" sz="1400" dirty="0"/>
+          </a:p>
+          <a:p>
+            <a:r>
+              <a:rPr lang="en-US" sz="1400" dirty="0" err="1"/>
+              <a:t>Standford</a:t>
             </a:r>
             <a:r>
               <a:rPr lang="en-US" sz="1400" dirty="0"/>
               <a:t> </a:t>
             </a:r>
-          </a:p>
-          <a:p>
-            <a:pPr marL="285750" indent="-285750">
-              <a:buFont typeface="Arial" panose="020B0604020202020204" pitchFamily="34" charset="0"/>
-              <a:buChar char="•"/>
-            </a:pPr>
-            <a:endParaRPr lang="en-US" sz="1600" dirty="0"/>
-          </a:p>
-          <a:p>
-            <a:pPr marL="285750" indent="-285750">
-              <a:buFont typeface="Arial" panose="020B0604020202020204" pitchFamily="34" charset="0"/>
-              <a:buChar char="•"/>
-            </a:pPr>
-            <a:r>
-              <a:rPr lang="en-US" sz="1600" dirty="0"/>
-              <a:t>Feature Interactions:</a:t>
-            </a:r>
-            <a:br>
-              <a:rPr lang="en-US" sz="1600" dirty="0"/>
-            </a:br>
-            <a:r>
-              <a:rPr lang="en-US" sz="1400" dirty="0"/>
-              <a:t> - </a:t>
-            </a:r>
-            <a:r>
-              <a:rPr lang="en-US" sz="1400" dirty="0">
-                <a:hlinkClick r:id="rId4"/>
-              </a:rPr>
-              <a:t>https://docs.h2o.ai/driverless-ai/latest-stable/docs/userguide/expert_settings/features_settings.html#max-feature-interaction-depth</a:t>
-            </a:r>
-            <a:r>
-              <a:rPr lang="en-US" sz="1400" dirty="0"/>
-              <a:t> </a:t>
-            </a:r>
+            <a:r>
+              <a:rPr lang="en-US" sz="1400" dirty="0" err="1"/>
+              <a:t>CoreNLP</a:t>
+            </a:r>
+            <a:endParaRPr lang="en-US" sz="1400" dirty="0"/>
+          </a:p>
+          <a:p>
+            <a:endParaRPr lang="en-US" sz="1400" dirty="0"/>
           </a:p>
         </p:txBody>
       </p:sp>
       <p:pic>
         <p:nvPicPr>
-          <p:cNvPr id="2050" name="Picture 2" descr="H2O.ai is the Open Source Leader in AI and ML">
-            <a:extLst>
-              <a:ext uri="{FF2B5EF4-FFF2-40B4-BE49-F238E27FC236}">
-                <a16:creationId xmlns:a16="http://schemas.microsoft.com/office/drawing/2014/main" id="{D8E9EA95-5147-4142-9255-0C2DAD08E313}"/>
+          <p:cNvPr id="6" name="Google Shape;214;p34" descr="scikit-learn - Wikipedia">
+            <a:extLst>
+              <a:ext uri="{FF2B5EF4-FFF2-40B4-BE49-F238E27FC236}">
+                <a16:creationId xmlns:a16="http://schemas.microsoft.com/office/drawing/2014/main" id="{4418D238-DD05-2941-A9F8-D4CFE885A7CE}"/>
+              </a:ext>
+            </a:extLst>
+          </p:cNvPr>
+          <p:cNvPicPr preferRelativeResize="0"/>
+          <p:nvPr/>
+        </p:nvPicPr>
+        <p:blipFill>
+          <a:blip r:embed="rId8" cstate="email">
+            <a:alphaModFix/>
+            <a:extLst>
+              <a:ext uri="{28A0092B-C50C-407E-A947-70E740481C1C}">
+                <a14:useLocalDpi xmlns:a14="http://schemas.microsoft.com/office/drawing/2010/main"/>
+              </a:ext>
+            </a:extLst>
+          </a:blip>
+          <a:stretch>
+            <a:fillRect/>
+          </a:stretch>
+        </p:blipFill>
+        <p:spPr>
+          <a:xfrm>
+            <a:off x="8597712" y="1472030"/>
+            <a:ext cx="1014716" cy="547151"/>
+          </a:xfrm>
+          <a:prstGeom prst="rect">
+            <a:avLst/>
+          </a:prstGeom>
+          <a:noFill/>
+          <a:ln>
+            <a:noFill/>
+          </a:ln>
+        </p:spPr>
+      </p:pic>
+      <p:pic>
+        <p:nvPicPr>
+          <p:cNvPr id="7" name="Google Shape;215;p34" descr="spaCy - Wikipedia">
+            <a:extLst>
+              <a:ext uri="{FF2B5EF4-FFF2-40B4-BE49-F238E27FC236}">
+                <a16:creationId xmlns:a16="http://schemas.microsoft.com/office/drawing/2014/main" id="{4BB2C685-CAF5-4443-8449-D8755D639D7B}"/>
+              </a:ext>
+            </a:extLst>
+          </p:cNvPr>
+          <p:cNvPicPr preferRelativeResize="0"/>
+          <p:nvPr/>
+        </p:nvPicPr>
+        <p:blipFill>
+          <a:blip r:embed="rId9" cstate="email">
+            <a:alphaModFix/>
+            <a:extLst>
+              <a:ext uri="{28A0092B-C50C-407E-A947-70E740481C1C}">
+                <a14:useLocalDpi xmlns:a14="http://schemas.microsoft.com/office/drawing/2010/main"/>
+              </a:ext>
+            </a:extLst>
+          </a:blip>
+          <a:stretch>
+            <a:fillRect/>
+          </a:stretch>
+        </p:blipFill>
+        <p:spPr>
+          <a:xfrm>
+            <a:off x="8687951" y="3104169"/>
+            <a:ext cx="924477" cy="331920"/>
+          </a:xfrm>
+          <a:prstGeom prst="rect">
+            <a:avLst/>
+          </a:prstGeom>
+          <a:noFill/>
+          <a:ln>
+            <a:noFill/>
+          </a:ln>
+        </p:spPr>
+      </p:pic>
+      <p:pic>
+        <p:nvPicPr>
+          <p:cNvPr id="8" name="Google Shape;216;p34" descr="TextBlob: Simplified Text Processing — TextBlob 0.16.0 documentation">
+            <a:extLst>
+              <a:ext uri="{FF2B5EF4-FFF2-40B4-BE49-F238E27FC236}">
+                <a16:creationId xmlns:a16="http://schemas.microsoft.com/office/drawing/2014/main" id="{18576110-FE8E-AC47-A856-656599337B6B}"/>
+              </a:ext>
+            </a:extLst>
+          </p:cNvPr>
+          <p:cNvPicPr preferRelativeResize="0"/>
+          <p:nvPr/>
+        </p:nvPicPr>
+        <p:blipFill>
+          <a:blip r:embed="rId10" cstate="email">
+            <a:alphaModFix/>
+            <a:extLst>
+              <a:ext uri="{28A0092B-C50C-407E-A947-70E740481C1C}">
+                <a14:useLocalDpi xmlns:a14="http://schemas.microsoft.com/office/drawing/2010/main"/>
+              </a:ext>
+            </a:extLst>
+          </a:blip>
+          <a:stretch>
+            <a:fillRect/>
+          </a:stretch>
+        </p:blipFill>
+        <p:spPr>
+          <a:xfrm>
+            <a:off x="8823556" y="4310001"/>
+            <a:ext cx="653265" cy="596892"/>
+          </a:xfrm>
+          <a:prstGeom prst="rect">
+            <a:avLst/>
+          </a:prstGeom>
+          <a:noFill/>
+          <a:ln>
+            <a:noFill/>
+          </a:ln>
+        </p:spPr>
+      </p:pic>
+      <p:pic>
+        <p:nvPicPr>
+          <p:cNvPr id="9" name="Google Shape;217;p34" descr="Improving gensim's documentation. Between the months of January and April…  | by Manos Stergiadis | Medium">
+            <a:extLst>
+              <a:ext uri="{FF2B5EF4-FFF2-40B4-BE49-F238E27FC236}">
+                <a16:creationId xmlns:a16="http://schemas.microsoft.com/office/drawing/2014/main" id="{DF6DCACB-E8C3-2B45-BC10-78F180C5FF59}"/>
+              </a:ext>
+            </a:extLst>
+          </p:cNvPr>
+          <p:cNvPicPr preferRelativeResize="0"/>
+          <p:nvPr/>
+        </p:nvPicPr>
+        <p:blipFill>
+          <a:blip r:embed="rId11" cstate="email">
+            <a:alphaModFix/>
+            <a:extLst>
+              <a:ext uri="{28A0092B-C50C-407E-A947-70E740481C1C}">
+                <a14:useLocalDpi xmlns:a14="http://schemas.microsoft.com/office/drawing/2010/main"/>
+              </a:ext>
+            </a:extLst>
+          </a:blip>
+          <a:stretch>
+            <a:fillRect/>
+          </a:stretch>
+        </p:blipFill>
+        <p:spPr>
+          <a:xfrm>
+            <a:off x="8593507" y="3731956"/>
+            <a:ext cx="977587" cy="356724"/>
+          </a:xfrm>
+          <a:prstGeom prst="rect">
+            <a:avLst/>
+          </a:prstGeom>
+          <a:noFill/>
+          <a:ln>
+            <a:noFill/>
+          </a:ln>
+        </p:spPr>
+      </p:pic>
+      <p:pic>
+        <p:nvPicPr>
+          <p:cNvPr id="10" name="Google Shape;218;p34" descr="NLTK Tutorial —— A Python package - Clay-Technology World">
+            <a:extLst>
+              <a:ext uri="{FF2B5EF4-FFF2-40B4-BE49-F238E27FC236}">
+                <a16:creationId xmlns:a16="http://schemas.microsoft.com/office/drawing/2014/main" id="{6F2F5FA2-624F-9449-B51F-BF681F7E002A}"/>
+              </a:ext>
+            </a:extLst>
+          </p:cNvPr>
+          <p:cNvPicPr preferRelativeResize="0"/>
+          <p:nvPr/>
+        </p:nvPicPr>
+        <p:blipFill>
+          <a:blip r:embed="rId12" cstate="email">
+            <a:alphaModFix/>
+            <a:extLst>
+              <a:ext uri="{28A0092B-C50C-407E-A947-70E740481C1C}">
+                <a14:useLocalDpi xmlns:a14="http://schemas.microsoft.com/office/drawing/2010/main"/>
+              </a:ext>
+            </a:extLst>
+          </a:blip>
+          <a:stretch>
+            <a:fillRect/>
+          </a:stretch>
+        </p:blipFill>
+        <p:spPr>
+          <a:xfrm>
+            <a:off x="8765173" y="2136085"/>
+            <a:ext cx="679794" cy="739483"/>
+          </a:xfrm>
+          <a:prstGeom prst="rect">
+            <a:avLst/>
+          </a:prstGeom>
+          <a:noFill/>
+          <a:ln>
+            <a:noFill/>
+          </a:ln>
+        </p:spPr>
+      </p:pic>
+      <p:pic>
+        <p:nvPicPr>
+          <p:cNvPr id="1026" name="Picture 2" descr="GitHub - stanfordnlp/CoreNLP: Stanford CoreNLP: A Java suite of core NLP  tools.">
+            <a:extLst>
+              <a:ext uri="{FF2B5EF4-FFF2-40B4-BE49-F238E27FC236}">
+                <a16:creationId xmlns:a16="http://schemas.microsoft.com/office/drawing/2014/main" id="{EEC151A0-FC8D-6646-B396-B39C528C411B}"/>
               </a:ext>
             </a:extLst>
           </p:cNvPr>
@@ -7213,8 +9287,8 @@
           </p:cNvPicPr>
           <p:nvPr/>
         </p:nvPicPr>
-        <p:blipFill>
-          <a:blip r:embed="rId5" cstate="email">
+        <p:blipFill rotWithShape="1">
+          <a:blip r:embed="rId13" cstate="email">
             <a:extLst>
               <a:ext uri="{28A0092B-C50C-407E-A947-70E740481C1C}">
                 <a14:useLocalDpi xmlns:a14="http://schemas.microsoft.com/office/drawing/2010/main"/>
@@ -7222,14 +9296,12 @@
             </a:extLst>
           </a:blip>
           <a:srcRect/>
-          <a:stretch>
-            <a:fillRect/>
-          </a:stretch>
+          <a:stretch/>
         </p:blipFill>
         <p:spPr bwMode="auto">
           <a:xfrm>
-            <a:off x="128200" y="141310"/>
-            <a:ext cx="1033895" cy="1033895"/>
+            <a:off x="8777345" y="5148864"/>
+            <a:ext cx="793749" cy="500062"/>
           </a:xfrm>
           <a:prstGeom prst="rect">
             <a:avLst/>
@@ -7246,10 +9318,45 @@
           </a:extLst>
         </p:spPr>
       </p:pic>
+      <p:sp>
+        <p:nvSpPr>
+          <p:cNvPr id="11" name="TextBox 10">
+            <a:extLst>
+              <a:ext uri="{FF2B5EF4-FFF2-40B4-BE49-F238E27FC236}">
+                <a16:creationId xmlns:a16="http://schemas.microsoft.com/office/drawing/2014/main" id="{BA5C6CCE-95BE-0E41-929F-91FC06B49A0E}"/>
+              </a:ext>
+            </a:extLst>
+          </p:cNvPr>
+          <p:cNvSpPr txBox="1"/>
+          <p:nvPr/>
+        </p:nvSpPr>
+        <p:spPr>
+          <a:xfrm>
+            <a:off x="8687951" y="663832"/>
+            <a:ext cx="2057400" cy="369332"/>
+          </a:xfrm>
+          <a:prstGeom prst="rect">
+            <a:avLst/>
+          </a:prstGeom>
+          <a:noFill/>
+        </p:spPr>
+        <p:txBody>
+          <a:bodyPr wrap="square" rtlCol="0">
+            <a:spAutoFit/>
+          </a:bodyPr>
+          <a:lstStyle/>
+          <a:p>
+            <a:r>
+              <a:rPr lang="en-US" b="1" dirty="0"/>
+              <a:t>Common Libraries</a:t>
+            </a:r>
+          </a:p>
+        </p:txBody>
+      </p:sp>
     </p:spTree>
     <p:extLst>
       <p:ext uri="{BB962C8B-B14F-4D97-AF65-F5344CB8AC3E}">
-        <p14:creationId xmlns:p14="http://schemas.microsoft.com/office/powerpoint/2010/main" val="2431340564"/>
+        <p14:creationId xmlns:p14="http://schemas.microsoft.com/office/powerpoint/2010/main" val="24194840"/>
       </p:ext>
     </p:extLst>
   </p:cSld>
@@ -7290,8 +9397,8 @@
         </p:nvSpPr>
         <p:spPr>
           <a:xfrm>
-            <a:off x="0" y="0"/>
-            <a:ext cx="3135086" cy="523220"/>
+            <a:off x="1425039" y="396647"/>
+            <a:ext cx="6096000" cy="523220"/>
           </a:xfrm>
           <a:prstGeom prst="rect">
             <a:avLst/>
@@ -7304,9 +9411,10 @@
           </a:bodyPr>
           <a:lstStyle/>
           <a:p>
+            <a:pPr algn="ctr"/>
             <a:r>
               <a:rPr lang="en-US" sz="2800" b="1" dirty="0"/>
-              <a:t>Resources</a:t>
+              <a:t>H2O.ai – Automatic Feature Engineering</a:t>
             </a:r>
             <a:endParaRPr lang="el-GR" sz="2800" b="1" dirty="0">
               <a:solidFill>
@@ -7318,10 +9426,10 @@
       </p:sp>
       <p:sp>
         <p:nvSpPr>
-          <p:cNvPr id="2" name="TextBox 1">
-            <a:extLst>
-              <a:ext uri="{FF2B5EF4-FFF2-40B4-BE49-F238E27FC236}">
-                <a16:creationId xmlns:a16="http://schemas.microsoft.com/office/drawing/2014/main" id="{F14F1150-0EE7-4D40-865A-EF7356C76267}"/>
+          <p:cNvPr id="3" name="TextBox 2">
+            <a:extLst>
+              <a:ext uri="{FF2B5EF4-FFF2-40B4-BE49-F238E27FC236}">
+                <a16:creationId xmlns:a16="http://schemas.microsoft.com/office/drawing/2014/main" id="{1D4B9042-755B-8142-9C51-9DBAA5CBE393}"/>
               </a:ext>
             </a:extLst>
           </p:cNvPr>
@@ -7330,8 +9438,8 @@
         </p:nvSpPr>
         <p:spPr>
           <a:xfrm>
-            <a:off x="562096" y="1181500"/>
-            <a:ext cx="10683837" cy="2677656"/>
+            <a:off x="1101975" y="1647334"/>
+            <a:ext cx="9326696" cy="1323439"/>
           </a:xfrm>
           <a:prstGeom prst="rect">
             <a:avLst/>
@@ -7349,26 +9457,148 @@
               <a:buChar char="•"/>
             </a:pPr>
             <a:r>
+              <a:rPr lang="en-US" sz="1600" b="1" dirty="0">
+                <a:solidFill>
+                  <a:srgbClr val="FF0000"/>
+                </a:solidFill>
+              </a:rPr>
+              <a:t>New features are created</a:t>
+            </a:r>
+            <a:r>
+              <a:rPr lang="en-US" sz="1600" dirty="0"/>
+              <a:t> by doing </a:t>
+            </a:r>
+            <a:r>
+              <a:rPr lang="en-US" sz="1600" b="1" dirty="0">
+                <a:solidFill>
+                  <a:srgbClr val="FF0000"/>
+                </a:solidFill>
+              </a:rPr>
+              <a:t>transformations</a:t>
+            </a:r>
+            <a:r>
+              <a:rPr lang="en-US" sz="1600" dirty="0"/>
+              <a:t> and/or </a:t>
+            </a:r>
+            <a:r>
+              <a:rPr lang="en-US" sz="1600" b="1" dirty="0">
+                <a:solidFill>
+                  <a:srgbClr val="FF0000"/>
+                </a:solidFill>
+              </a:rPr>
+              <a:t>interactions</a:t>
+            </a:r>
+            <a:r>
+              <a:rPr lang="en-US" sz="1600" dirty="0"/>
+              <a:t> on the dataset columns. </a:t>
+            </a:r>
+          </a:p>
+          <a:p>
+            <a:pPr marL="285750" indent="-285750">
+              <a:buFont typeface="Arial" panose="020B0604020202020204" pitchFamily="34" charset="0"/>
+              <a:buChar char="•"/>
+            </a:pPr>
+            <a:r>
+              <a:rPr lang="en-US" sz="1600" dirty="0"/>
+              <a:t>Feature creation and selection is </a:t>
+            </a:r>
+            <a:r>
+              <a:rPr lang="en-US" sz="1600" b="1" dirty="0">
+                <a:solidFill>
+                  <a:srgbClr val="FF0000"/>
+                </a:solidFill>
+              </a:rPr>
+              <a:t>evolutionary</a:t>
+            </a:r>
+            <a:r>
+              <a:rPr lang="en-US" sz="1600" dirty="0"/>
+              <a:t> (based on variable importance of previous iteration)</a:t>
+            </a:r>
+          </a:p>
+          <a:p>
+            <a:pPr marL="285750" indent="-285750">
+              <a:buFont typeface="Arial" panose="020B0604020202020204" pitchFamily="34" charset="0"/>
+              <a:buChar char="•"/>
+            </a:pPr>
+            <a:r>
+              <a:rPr lang="en-US" sz="1600" dirty="0"/>
+              <a:t>Feature creation uses genetic algorithm to find the best set of feature transformations and model parameters for an experiment/dataset.</a:t>
+            </a:r>
+            <a:br>
+              <a:rPr lang="en-US" sz="1600" dirty="0"/>
+            </a:br>
+            <a:r>
+              <a:rPr lang="en-US" sz="1400" dirty="0"/>
+              <a:t> - </a:t>
+            </a:r>
+            <a:r>
               <a:rPr lang="en-US" sz="1400" dirty="0">
                 <a:hlinkClick r:id="rId2"/>
               </a:rPr>
-              <a:t>https://stackoverflow.com/questions/65472200/when-should-data-binning-be-used-in-data-processing</a:t>
+              <a:t>https://docs.h2o.ai/driverless-ai/latest-stable/docs/userguide/feature-engineering.html</a:t>
             </a:r>
             <a:r>
               <a:rPr lang="en-US" sz="1400" dirty="0"/>
               <a:t> </a:t>
             </a:r>
           </a:p>
-          <a:p>
-            <a:pPr marL="285750" indent="-285750">
-              <a:buFont typeface="Arial" panose="020B0604020202020204" pitchFamily="34" charset="0"/>
-              <a:buChar char="•"/>
-            </a:pPr>
+        </p:txBody>
+      </p:sp>
+      <p:sp>
+        <p:nvSpPr>
+          <p:cNvPr id="7" name="TextBox 6">
+            <a:extLst>
+              <a:ext uri="{FF2B5EF4-FFF2-40B4-BE49-F238E27FC236}">
+                <a16:creationId xmlns:a16="http://schemas.microsoft.com/office/drawing/2014/main" id="{BF029EBF-BE31-8345-BEE6-7450D26D1A39}"/>
+              </a:ext>
+            </a:extLst>
+          </p:cNvPr>
+          <p:cNvSpPr txBox="1"/>
+          <p:nvPr/>
+        </p:nvSpPr>
+        <p:spPr>
+          <a:xfrm>
+            <a:off x="1101975" y="3442902"/>
+            <a:ext cx="10499474" cy="1508105"/>
+          </a:xfrm>
+          <a:prstGeom prst="rect">
+            <a:avLst/>
+          </a:prstGeom>
+          <a:noFill/>
+        </p:spPr>
+        <p:txBody>
+          <a:bodyPr wrap="square" rtlCol="0">
+            <a:spAutoFit/>
+          </a:bodyPr>
+          <a:lstStyle/>
+          <a:p>
+            <a:pPr marL="285750" indent="-285750">
+              <a:buFont typeface="Arial" panose="020B0604020202020204" pitchFamily="34" charset="0"/>
+              <a:buChar char="•"/>
+            </a:pPr>
+            <a:r>
+              <a:rPr lang="en-US" sz="1600" dirty="0"/>
+              <a:t>Driverless AI Transformers (Numeric, Categorical, Time &amp; Date, NLP (text), Image)</a:t>
+            </a:r>
+            <a:br>
+              <a:rPr lang="en-US" sz="1600" dirty="0"/>
+            </a:br>
+            <a:r>
+              <a:rPr lang="en-US" sz="1600" dirty="0"/>
+              <a:t>See big list of transformers here: </a:t>
+            </a:r>
+            <a:br>
+              <a:rPr lang="en-US" sz="1600" dirty="0"/>
+            </a:br>
+            <a:r>
+              <a:rPr lang="en-US" sz="1400" dirty="0"/>
+              <a:t> - </a:t>
+            </a:r>
             <a:r>
               <a:rPr lang="en-US" sz="1400" dirty="0">
                 <a:hlinkClick r:id="rId3"/>
               </a:rPr>
-              <a:t>https://docs.tibco.com/pub/spotfire/7.0.1/doc/html/bin/bin_what_is_binning.htm</a:t>
+              <a:t>https://docs.h2o.ai/driverless-ai/latest-stable/docs/userguide/transformations.html#transformations</a:t>
             </a:r>
             <a:r>
               <a:rPr lang="en-US" sz="1400" dirty="0"/>
@@ -7380,27 +9610,378 @@
               <a:buFont typeface="Arial" panose="020B0604020202020204" pitchFamily="34" charset="0"/>
               <a:buChar char="•"/>
             </a:pPr>
+            <a:endParaRPr lang="en-US" sz="1600" dirty="0"/>
+          </a:p>
+          <a:p>
+            <a:pPr marL="285750" indent="-285750">
+              <a:buFont typeface="Arial" panose="020B0604020202020204" pitchFamily="34" charset="0"/>
+              <a:buChar char="•"/>
+            </a:pPr>
+            <a:r>
+              <a:rPr lang="en-US" sz="1600" dirty="0"/>
+              <a:t>Feature Interactions:</a:t>
+            </a:r>
+            <a:br>
+              <a:rPr lang="en-US" sz="1600" dirty="0"/>
+            </a:br>
+            <a:r>
+              <a:rPr lang="en-US" sz="1400" dirty="0"/>
+              <a:t> - </a:t>
+            </a:r>
             <a:r>
               <a:rPr lang="en-US" sz="1400" dirty="0">
                 <a:hlinkClick r:id="rId4"/>
               </a:rPr>
-              <a:t>https://cxl.com/blog/outliers/</a:t>
+              <a:t>https://docs.h2o.ai/driverless-ai/latest-stable/docs/userguide/expert_settings/features_settings.html#max-feature-interaction-depth</a:t>
             </a:r>
             <a:r>
               <a:rPr lang="en-US" sz="1400" dirty="0"/>
               <a:t> </a:t>
             </a:r>
           </a:p>
-          <a:p>
-            <a:pPr marL="285750" indent="-285750">
-              <a:buFont typeface="Arial" panose="020B0604020202020204" pitchFamily="34" charset="0"/>
-              <a:buChar char="•"/>
-            </a:pPr>
+        </p:txBody>
+      </p:sp>
+      <p:pic>
+        <p:nvPicPr>
+          <p:cNvPr id="2050" name="Picture 2" descr="H2O.ai is the Open Source Leader in AI and ML">
+            <a:extLst>
+              <a:ext uri="{FF2B5EF4-FFF2-40B4-BE49-F238E27FC236}">
+                <a16:creationId xmlns:a16="http://schemas.microsoft.com/office/drawing/2014/main" id="{D8E9EA95-5147-4142-9255-0C2DAD08E313}"/>
+              </a:ext>
+            </a:extLst>
+          </p:cNvPr>
+          <p:cNvPicPr>
+            <a:picLocks noChangeAspect="1" noChangeArrowheads="1"/>
+          </p:cNvPicPr>
+          <p:nvPr/>
+        </p:nvPicPr>
+        <p:blipFill>
+          <a:blip r:embed="rId5" cstate="email">
+            <a:extLst>
+              <a:ext uri="{28A0092B-C50C-407E-A947-70E740481C1C}">
+                <a14:useLocalDpi xmlns:a14="http://schemas.microsoft.com/office/drawing/2010/main"/>
+              </a:ext>
+            </a:extLst>
+          </a:blip>
+          <a:srcRect/>
+          <a:stretch>
+            <a:fillRect/>
+          </a:stretch>
+        </p:blipFill>
+        <p:spPr bwMode="auto">
+          <a:xfrm>
+            <a:off x="128200" y="141310"/>
+            <a:ext cx="1033895" cy="1033895"/>
+          </a:xfrm>
+          <a:prstGeom prst="rect">
+            <a:avLst/>
+          </a:prstGeom>
+          <a:noFill/>
+          <a:extLst>
+            <a:ext uri="{909E8E84-426E-40DD-AFC4-6F175D3DCCD1}">
+              <a14:hiddenFill xmlns:a14="http://schemas.microsoft.com/office/drawing/2010/main">
+                <a:solidFill>
+                  <a:srgbClr val="FFFFFF"/>
+                </a:solidFill>
+              </a14:hiddenFill>
+            </a:ext>
+          </a:extLst>
+        </p:spPr>
+      </p:pic>
+    </p:spTree>
+    <p:extLst>
+      <p:ext uri="{BB962C8B-B14F-4D97-AF65-F5344CB8AC3E}">
+        <p14:creationId xmlns:p14="http://schemas.microsoft.com/office/powerpoint/2010/main" val="2431340564"/>
+      </p:ext>
+    </p:extLst>
+  </p:cSld>
+  <p:clrMapOvr>
+    <a:masterClrMapping/>
+  </p:clrMapOvr>
+</p:sld>
+</file>
+
+<file path=ppt/slides/slide8.xml><?xml version="1.0" encoding="utf-8"?>
+<p:sld xmlns:a="http://schemas.openxmlformats.org/drawingml/2006/main" xmlns:r="http://schemas.openxmlformats.org/officeDocument/2006/relationships" xmlns:p="http://schemas.openxmlformats.org/presentationml/2006/main">
+  <p:cSld>
+    <p:spTree>
+      <p:nvGrpSpPr>
+        <p:cNvPr id="1" name=""/>
+        <p:cNvGrpSpPr/>
+        <p:nvPr/>
+      </p:nvGrpSpPr>
+      <p:grpSpPr>
+        <a:xfrm>
+          <a:off x="0" y="0"/>
+          <a:ext cx="0" cy="0"/>
+          <a:chOff x="0" y="0"/>
+          <a:chExt cx="0" cy="0"/>
+        </a:xfrm>
+      </p:grpSpPr>
+      <p:sp>
+        <p:nvSpPr>
+          <p:cNvPr id="4" name="TextBox 3">
+            <a:extLst>
+              <a:ext uri="{FF2B5EF4-FFF2-40B4-BE49-F238E27FC236}">
+                <a16:creationId xmlns:a16="http://schemas.microsoft.com/office/drawing/2014/main" id="{D1E58F78-8F27-2D4A-BD36-154CD23B3E50}"/>
+              </a:ext>
+            </a:extLst>
+          </p:cNvPr>
+          <p:cNvSpPr txBox="1"/>
+          <p:nvPr/>
+        </p:nvSpPr>
+        <p:spPr>
+          <a:xfrm>
+            <a:off x="145984" y="19735"/>
+            <a:ext cx="6096000" cy="523220"/>
+          </a:xfrm>
+          <a:prstGeom prst="rect">
+            <a:avLst/>
+          </a:prstGeom>
+          <a:noFill/>
+        </p:spPr>
+        <p:txBody>
+          <a:bodyPr wrap="square" rtlCol="0">
+            <a:spAutoFit/>
+          </a:bodyPr>
+          <a:lstStyle/>
+          <a:p>
+            <a:r>
+              <a:rPr lang="en-US" sz="2800" b="1" dirty="0"/>
+              <a:t>Feature Importance – part 1</a:t>
+            </a:r>
+            <a:endParaRPr lang="el-GR" sz="2800" b="1" dirty="0">
+              <a:solidFill>
+                <a:srgbClr val="0070C0"/>
+              </a:solidFill>
+            </a:endParaRPr>
+          </a:p>
+        </p:txBody>
+      </p:sp>
+      <p:sp>
+        <p:nvSpPr>
+          <p:cNvPr id="7" name="TextBox 6">
+            <a:extLst>
+              <a:ext uri="{FF2B5EF4-FFF2-40B4-BE49-F238E27FC236}">
+                <a16:creationId xmlns:a16="http://schemas.microsoft.com/office/drawing/2014/main" id="{BF029EBF-BE31-8345-BEE6-7450D26D1A39}"/>
+              </a:ext>
+            </a:extLst>
+          </p:cNvPr>
+          <p:cNvSpPr txBox="1"/>
+          <p:nvPr/>
+        </p:nvSpPr>
+        <p:spPr>
+          <a:xfrm>
+            <a:off x="846263" y="920496"/>
+            <a:ext cx="10499474" cy="2031325"/>
+          </a:xfrm>
+          <a:prstGeom prst="rect">
+            <a:avLst/>
+          </a:prstGeom>
+          <a:noFill/>
+        </p:spPr>
+        <p:txBody>
+          <a:bodyPr wrap="square" rtlCol="0">
+            <a:spAutoFit/>
+          </a:bodyPr>
+          <a:lstStyle/>
+          <a:p>
+            <a:r>
+              <a:rPr lang="en-US" sz="1400" dirty="0"/>
+              <a:t> ice cream</a:t>
+            </a:r>
+          </a:p>
+          <a:p>
+            <a:br>
+              <a:rPr lang="en-US" sz="1400" dirty="0"/>
+            </a:br>
+            <a:r>
+              <a:rPr lang="en-US" sz="1400" dirty="0"/>
+              <a:t>The 5 Feature Selection Algorithms every Data Scientist should know</a:t>
+            </a:r>
+          </a:p>
+          <a:p>
+            <a:r>
+              <a:rPr lang="en-US" sz="1100" dirty="0"/>
+              <a:t>- </a:t>
+            </a:r>
+            <a:r>
+              <a:rPr lang="en-US" sz="1100" dirty="0">
+                <a:hlinkClick r:id="rId2"/>
+              </a:rPr>
+              <a:t>https://towardsdatascience.com/the-5-feature-selection-algorithms-every-data-scientist-need-to-know-3a6b566efd2</a:t>
+            </a:r>
+            <a:r>
+              <a:rPr lang="en-US" sz="1100" dirty="0"/>
+              <a:t> </a:t>
+            </a:r>
+          </a:p>
+          <a:p>
+            <a:endParaRPr lang="en-US" sz="1400" dirty="0"/>
+          </a:p>
+          <a:p>
+            <a:pPr marL="342900" indent="-342900">
+              <a:buFont typeface="+mj-lt"/>
+              <a:buAutoNum type="arabicPeriod"/>
+            </a:pPr>
+            <a:r>
+              <a:rPr lang="en-US" sz="1400" dirty="0"/>
+              <a:t>Curse of dimensionality, Overfitting. If </a:t>
+            </a:r>
+            <a:r>
+              <a:rPr lang="en-US" sz="1400" dirty="0" err="1"/>
+              <a:t>Ncols</a:t>
+            </a:r>
+            <a:r>
+              <a:rPr lang="en-US" sz="1400" dirty="0"/>
+              <a:t> &gt; </a:t>
+            </a:r>
+            <a:r>
+              <a:rPr lang="en-US" sz="1400" dirty="0" err="1"/>
+              <a:t>Nrows</a:t>
+            </a:r>
+            <a:r>
+              <a:rPr lang="en-US" sz="1400" dirty="0"/>
+              <a:t>, we can fit data perfectly, but that won’t generalize to the new samples. Thus we learn absolutely nothing.</a:t>
+            </a:r>
+          </a:p>
+          <a:p>
+            <a:pPr marL="342900" indent="-342900">
+              <a:buFont typeface="+mj-lt"/>
+              <a:buAutoNum type="arabicPeriod"/>
+            </a:pPr>
+            <a:r>
+              <a:rPr lang="en-US" sz="1400" dirty="0"/>
+              <a:t>Occam’s Razor. We want our models to be simple and explainable. We lose </a:t>
+            </a:r>
+            <a:r>
+              <a:rPr lang="en-US" sz="1400" dirty="0" err="1"/>
+              <a:t>explainability</a:t>
+            </a:r>
+            <a:r>
+              <a:rPr lang="en-US" sz="1400" dirty="0"/>
+              <a:t> when we have a lot of features.</a:t>
+            </a:r>
+          </a:p>
+          <a:p>
+            <a:pPr marL="342900" indent="-342900">
+              <a:buFont typeface="+mj-lt"/>
+              <a:buAutoNum type="arabicPeriod"/>
+            </a:pPr>
+            <a:r>
+              <a:rPr lang="en-US" sz="1400" dirty="0"/>
+              <a:t>Garbage In Garbage out. Many non-informative features (name, Id, etc.) add noise and reduce the quality of the model.</a:t>
+            </a:r>
+          </a:p>
+        </p:txBody>
+      </p:sp>
+      <p:sp>
+        <p:nvSpPr>
+          <p:cNvPr id="2" name="TextBox 1">
+            <a:extLst>
+              <a:ext uri="{FF2B5EF4-FFF2-40B4-BE49-F238E27FC236}">
+                <a16:creationId xmlns:a16="http://schemas.microsoft.com/office/drawing/2014/main" id="{F2809594-AAC5-3145-9B03-83D04EFFCF31}"/>
+              </a:ext>
+            </a:extLst>
+          </p:cNvPr>
+          <p:cNvSpPr txBox="1"/>
+          <p:nvPr/>
+        </p:nvSpPr>
+        <p:spPr>
+          <a:xfrm>
+            <a:off x="950976" y="3183684"/>
+            <a:ext cx="6620256" cy="1600438"/>
+          </a:xfrm>
+          <a:prstGeom prst="rect">
+            <a:avLst/>
+          </a:prstGeom>
+          <a:noFill/>
+        </p:spPr>
+        <p:txBody>
+          <a:bodyPr wrap="square" rtlCol="0">
+            <a:spAutoFit/>
+          </a:bodyPr>
+          <a:lstStyle/>
+          <a:p>
+            <a:r>
+              <a:rPr lang="en-US" sz="1400" dirty="0"/>
+              <a:t>Some Feature Selection Methods:</a:t>
+            </a:r>
+          </a:p>
+          <a:p>
+            <a:pPr marL="285750" indent="-285750">
+              <a:buFont typeface="Arial" panose="020B0604020202020204" pitchFamily="34" charset="0"/>
+              <a:buChar char="•"/>
+            </a:pPr>
+            <a:r>
+              <a:rPr lang="en-US" sz="1400" b="1" dirty="0">
+                <a:solidFill>
+                  <a:srgbClr val="FF0000"/>
+                </a:solidFill>
+              </a:rPr>
+              <a:t>Correlation, Kolmogorov-Smirnov, chi-square</a:t>
+            </a:r>
+            <a:r>
+              <a:rPr lang="en-US" sz="1400" dirty="0"/>
+              <a:t>, or some other filtering</a:t>
+            </a:r>
+          </a:p>
+          <a:p>
+            <a:pPr marL="285750" indent="-285750">
+              <a:buFont typeface="Arial" panose="020B0604020202020204" pitchFamily="34" charset="0"/>
+              <a:buChar char="•"/>
+            </a:pPr>
+            <a:r>
+              <a:rPr lang="en-US" sz="1400" b="1" dirty="0">
+                <a:solidFill>
+                  <a:srgbClr val="FF0000"/>
+                </a:solidFill>
+              </a:rPr>
+              <a:t>Recursive Feature Elimination</a:t>
+            </a:r>
+            <a:r>
+              <a:rPr lang="en-US" sz="1400" dirty="0"/>
+              <a:t> or some other "search" method</a:t>
+            </a:r>
+          </a:p>
+          <a:p>
+            <a:pPr marL="285750" indent="-285750">
+              <a:buFont typeface="Arial" panose="020B0604020202020204" pitchFamily="34" charset="0"/>
+              <a:buChar char="•"/>
+            </a:pPr>
+            <a:r>
+              <a:rPr lang="en-US" sz="1400" b="1" dirty="0">
+                <a:solidFill>
+                  <a:srgbClr val="FF0000"/>
+                </a:solidFill>
+              </a:rPr>
+              <a:t>SHAP (</a:t>
+            </a:r>
+            <a:r>
+              <a:rPr lang="en-US" sz="1400" b="1" dirty="0" err="1">
+                <a:solidFill>
+                  <a:srgbClr val="FF0000"/>
+                </a:solidFill>
+              </a:rPr>
+              <a:t>SHapley</a:t>
+            </a:r>
+            <a:r>
+              <a:rPr lang="en-US" sz="1400" b="1" dirty="0">
+                <a:solidFill>
+                  <a:srgbClr val="FF0000"/>
+                </a:solidFill>
+              </a:rPr>
+              <a:t>)</a:t>
+            </a:r>
+            <a:r>
+              <a:rPr lang="en-US" sz="1400" dirty="0"/>
+              <a:t> - </a:t>
+            </a:r>
             <a:r>
               <a:rPr lang="en-US" sz="1400" dirty="0">
-                <a:hlinkClick r:id="rId5"/>
-              </a:rPr>
-              <a:t>https://en.wikipedia.org/wiki/Data_binning</a:t>
+                <a:hlinkClick r:id="rId3"/>
+              </a:rPr>
+              <a:t>https://christophm.github.io/interpretable-ml-book/shap.html</a:t>
             </a:r>
             <a:r>
               <a:rPr lang="en-US" sz="1400" dirty="0"/>
@@ -7413,126 +9994,529 @@
               <a:buChar char="•"/>
             </a:pPr>
             <a:r>
+              <a:rPr lang="en-US" sz="1400" b="1" dirty="0">
+                <a:solidFill>
+                  <a:srgbClr val="FF0000"/>
+                </a:solidFill>
+              </a:rPr>
+              <a:t>Random Forest</a:t>
+            </a:r>
+            <a:r>
+              <a:rPr lang="en-US" sz="1400" dirty="0"/>
+              <a:t> has built-in feature importance mechanism </a:t>
+            </a:r>
+            <a:br>
+              <a:rPr lang="en-US" sz="1400" dirty="0"/>
+            </a:br>
+            <a:r>
+              <a:rPr lang="en-US" sz="1400" dirty="0"/>
+              <a:t>(idea - try features randomly, see which ones contribute more)</a:t>
+            </a:r>
+          </a:p>
+          <a:p>
+            <a:pPr marL="285750" indent="-285750">
+              <a:buFont typeface="Arial" panose="020B0604020202020204" pitchFamily="34" charset="0"/>
+              <a:buChar char="•"/>
+            </a:pPr>
+            <a:r>
+              <a:rPr lang="en-US" sz="1400" b="1" dirty="0">
+                <a:solidFill>
+                  <a:srgbClr val="FF0000"/>
+                </a:solidFill>
+              </a:rPr>
+              <a:t>Lasso</a:t>
+            </a:r>
+            <a:r>
+              <a:rPr lang="en-US" sz="1400" dirty="0"/>
+              <a:t> has its own internal feature selection method</a:t>
+            </a:r>
+          </a:p>
+        </p:txBody>
+      </p:sp>
+      <p:pic>
+        <p:nvPicPr>
+          <p:cNvPr id="5" name="Picture 2" descr="Why does Lasso regression lead to sparse solutions? - Quora">
+            <a:extLst>
+              <a:ext uri="{FF2B5EF4-FFF2-40B4-BE49-F238E27FC236}">
+                <a16:creationId xmlns:a16="http://schemas.microsoft.com/office/drawing/2014/main" id="{4A5353B2-1B33-814C-9E06-6CCC38D454F4}"/>
+              </a:ext>
+            </a:extLst>
+          </p:cNvPr>
+          <p:cNvPicPr>
+            <a:picLocks noChangeAspect="1" noChangeArrowheads="1"/>
+          </p:cNvPicPr>
+          <p:nvPr/>
+        </p:nvPicPr>
+        <p:blipFill>
+          <a:blip r:embed="rId4" cstate="email">
+            <a:extLst>
+              <a:ext uri="{28A0092B-C50C-407E-A947-70E740481C1C}">
+                <a14:useLocalDpi xmlns:a14="http://schemas.microsoft.com/office/drawing/2010/main"/>
+              </a:ext>
+            </a:extLst>
+          </a:blip>
+          <a:srcRect/>
+          <a:stretch>
+            <a:fillRect/>
+          </a:stretch>
+        </p:blipFill>
+        <p:spPr bwMode="auto">
+          <a:xfrm>
+            <a:off x="5381632" y="4800542"/>
+            <a:ext cx="2403468" cy="1592996"/>
+          </a:xfrm>
+          <a:prstGeom prst="rect">
+            <a:avLst/>
+          </a:prstGeom>
+          <a:noFill/>
+          <a:extLst>
+            <a:ext uri="{909E8E84-426E-40DD-AFC4-6F175D3DCCD1}">
+              <a14:hiddenFill xmlns:a14="http://schemas.microsoft.com/office/drawing/2010/main">
+                <a:solidFill>
+                  <a:srgbClr val="FFFFFF"/>
+                </a:solidFill>
+              </a14:hiddenFill>
+            </a:ext>
+          </a:extLst>
+        </p:spPr>
+      </p:pic>
+    </p:spTree>
+    <p:extLst>
+      <p:ext uri="{BB962C8B-B14F-4D97-AF65-F5344CB8AC3E}">
+        <p14:creationId xmlns:p14="http://schemas.microsoft.com/office/powerpoint/2010/main" val="2210214989"/>
+      </p:ext>
+    </p:extLst>
+  </p:cSld>
+  <p:clrMapOvr>
+    <a:masterClrMapping/>
+  </p:clrMapOvr>
+</p:sld>
+</file>
+
+<file path=ppt/slides/slide9.xml><?xml version="1.0" encoding="utf-8"?>
+<p:sld xmlns:a="http://schemas.openxmlformats.org/drawingml/2006/main" xmlns:r="http://schemas.openxmlformats.org/officeDocument/2006/relationships" xmlns:p="http://schemas.openxmlformats.org/presentationml/2006/main">
+  <p:cSld>
+    <p:spTree>
+      <p:nvGrpSpPr>
+        <p:cNvPr id="1" name=""/>
+        <p:cNvGrpSpPr/>
+        <p:nvPr/>
+      </p:nvGrpSpPr>
+      <p:grpSpPr>
+        <a:xfrm>
+          <a:off x="0" y="0"/>
+          <a:ext cx="0" cy="0"/>
+          <a:chOff x="0" y="0"/>
+          <a:chExt cx="0" cy="0"/>
+        </a:xfrm>
+      </p:grpSpPr>
+      <p:sp>
+        <p:nvSpPr>
+          <p:cNvPr id="4" name="TextBox 3">
+            <a:extLst>
+              <a:ext uri="{FF2B5EF4-FFF2-40B4-BE49-F238E27FC236}">
+                <a16:creationId xmlns:a16="http://schemas.microsoft.com/office/drawing/2014/main" id="{D1E58F78-8F27-2D4A-BD36-154CD23B3E50}"/>
+              </a:ext>
+            </a:extLst>
+          </p:cNvPr>
+          <p:cNvSpPr txBox="1"/>
+          <p:nvPr/>
+        </p:nvSpPr>
+        <p:spPr>
+          <a:xfrm>
+            <a:off x="145984" y="19735"/>
+            <a:ext cx="6096000" cy="523220"/>
+          </a:xfrm>
+          <a:prstGeom prst="rect">
+            <a:avLst/>
+          </a:prstGeom>
+          <a:noFill/>
+        </p:spPr>
+        <p:txBody>
+          <a:bodyPr wrap="square" rtlCol="0">
+            <a:spAutoFit/>
+          </a:bodyPr>
+          <a:lstStyle/>
+          <a:p>
+            <a:r>
+              <a:rPr lang="en-US" sz="2800" b="1" dirty="0"/>
+              <a:t>Feature Importance – part 2</a:t>
+            </a:r>
+            <a:endParaRPr lang="el-GR" sz="2800" b="1" dirty="0">
+              <a:solidFill>
+                <a:srgbClr val="0070C0"/>
+              </a:solidFill>
+            </a:endParaRPr>
+          </a:p>
+        </p:txBody>
+      </p:sp>
+      <p:sp>
+        <p:nvSpPr>
+          <p:cNvPr id="7" name="TextBox 6">
+            <a:extLst>
+              <a:ext uri="{FF2B5EF4-FFF2-40B4-BE49-F238E27FC236}">
+                <a16:creationId xmlns:a16="http://schemas.microsoft.com/office/drawing/2014/main" id="{BF029EBF-BE31-8345-BEE6-7450D26D1A39}"/>
+              </a:ext>
+            </a:extLst>
+          </p:cNvPr>
+          <p:cNvSpPr txBox="1"/>
+          <p:nvPr/>
+        </p:nvSpPr>
+        <p:spPr>
+          <a:xfrm>
+            <a:off x="280416" y="1406509"/>
+            <a:ext cx="8693135" cy="3539430"/>
+          </a:xfrm>
+          <a:prstGeom prst="rect">
+            <a:avLst/>
+          </a:prstGeom>
+          <a:noFill/>
+        </p:spPr>
+        <p:txBody>
+          <a:bodyPr wrap="square" rtlCol="0">
+            <a:spAutoFit/>
+          </a:bodyPr>
+          <a:lstStyle/>
+          <a:p>
+            <a:r>
+              <a:rPr lang="en-US" sz="1400" b="1" dirty="0">
+                <a:solidFill>
+                  <a:srgbClr val="FF0000"/>
+                </a:solidFill>
+              </a:rPr>
+              <a:t>Backward Elimination</a:t>
+            </a:r>
+            <a:r>
+              <a:rPr lang="en-US" sz="1400" dirty="0"/>
+              <a:t> – method of reducing the number of features.</a:t>
+            </a:r>
+          </a:p>
+          <a:p>
+            <a:r>
+              <a:rPr lang="en-US" sz="1400" dirty="0"/>
+              <a:t>We remove least significant features one by one and retrain the model.</a:t>
+            </a:r>
+          </a:p>
+          <a:p>
+            <a:r>
+              <a:rPr lang="en-US" sz="1400" dirty="0"/>
+              <a:t>The purpose is to get good model with smaller number of features. </a:t>
+            </a:r>
+          </a:p>
+          <a:p>
+            <a:endParaRPr lang="en-US" sz="1400" dirty="0"/>
+          </a:p>
+          <a:p>
+            <a:r>
+              <a:rPr lang="en-US" sz="1400" b="1" dirty="0">
+                <a:solidFill>
+                  <a:srgbClr val="FF0000"/>
+                </a:solidFill>
+              </a:rPr>
+              <a:t>Caution</a:t>
+            </a:r>
+            <a:r>
+              <a:rPr lang="en-US" sz="1400" dirty="0"/>
+              <a:t>. </a:t>
+            </a:r>
+          </a:p>
+          <a:p>
+            <a:r>
+              <a:rPr lang="en-US" sz="1400" b="1" dirty="0">
+                <a:solidFill>
+                  <a:srgbClr val="00B050"/>
+                </a:solidFill>
+              </a:rPr>
+              <a:t>Dropping out features can give us wrong results when features are correlated</a:t>
+            </a:r>
+            <a:r>
               <a:rPr lang="en-US" sz="1400" dirty="0">
-                <a:hlinkClick r:id="rId6"/>
-              </a:rPr>
-              <a:t>https://www.simplypsychology.org/boxplots.html</a:t>
-            </a:r>
-            <a:r>
-              <a:rPr lang="en-US" sz="1400" dirty="0"/>
-              <a:t> </a:t>
-            </a:r>
-          </a:p>
-          <a:p>
-            <a:pPr marL="285750" indent="-285750">
-              <a:buFont typeface="Arial" panose="020B0604020202020204" pitchFamily="34" charset="0"/>
-              <a:buChar char="•"/>
-            </a:pPr>
-            <a:r>
-              <a:rPr lang="en-US" sz="1400" dirty="0">
-                <a:hlinkClick r:id="rId7"/>
-              </a:rPr>
-              <a:t>https://www.researchgate.net/figure/Examples-of-various-outliers-found-in-regression-analysis-Case-1-is-an-outlier-with_fig2_50946372</a:t>
-            </a:r>
-            <a:r>
-              <a:rPr lang="en-US" sz="1400" dirty="0"/>
-              <a:t> </a:t>
-            </a:r>
-          </a:p>
-          <a:p>
-            <a:pPr marL="285750" indent="-285750">
-              <a:buFont typeface="Arial" panose="020B0604020202020204" pitchFamily="34" charset="0"/>
-              <a:buChar char="•"/>
-            </a:pPr>
-            <a:r>
-              <a:rPr lang="en-US" sz="1400" dirty="0">
-                <a:hlinkClick r:id="rId8"/>
-              </a:rPr>
-              <a:t>https://probabilityandstats.wordpress.com/2015/05/09/the-skewness-of-a-probability-distribution/</a:t>
-            </a:r>
-            <a:r>
-              <a:rPr lang="en-US" sz="1400" dirty="0"/>
-              <a:t> </a:t>
-            </a:r>
-          </a:p>
-          <a:p>
-            <a:pPr marL="285750" indent="-285750">
-              <a:buFont typeface="Arial" panose="020B0604020202020204" pitchFamily="34" charset="0"/>
-              <a:buChar char="•"/>
-            </a:pPr>
-            <a:r>
-              <a:rPr lang="en-US" sz="1400" dirty="0">
-                <a:hlinkClick r:id="rId9"/>
-              </a:rPr>
-              <a:t>https://towardsdatascience.com/feature-engineering-for-machine-learning-3a5e293a5114</a:t>
-            </a:r>
-            <a:r>
-              <a:rPr lang="en-US" sz="1400" dirty="0"/>
-              <a:t> </a:t>
-            </a:r>
-          </a:p>
-          <a:p>
-            <a:pPr marL="285750" indent="-285750">
-              <a:buFont typeface="Arial" panose="020B0604020202020204" pitchFamily="34" charset="0"/>
-              <a:buChar char="•"/>
-            </a:pPr>
-            <a:r>
-              <a:rPr lang="en-US" sz="1400" dirty="0">
-                <a:hlinkClick r:id="rId10"/>
-              </a:rPr>
-              <a:t>https://www.kaggle.com/ryanholbrook/what-is-feature-engineering</a:t>
-            </a:r>
-            <a:r>
-              <a:rPr lang="en-US" sz="1400" dirty="0"/>
-              <a:t> </a:t>
-            </a:r>
-          </a:p>
-          <a:p>
-            <a:pPr marL="285750" indent="-285750">
-              <a:buFont typeface="Arial" panose="020B0604020202020204" pitchFamily="34" charset="0"/>
-              <a:buChar char="•"/>
-            </a:pPr>
-            <a:r>
-              <a:rPr lang="en-US" sz="1400" dirty="0">
-                <a:hlinkClick r:id="rId11"/>
-              </a:rPr>
-              <a:t>https://medium.com/@kyawsawhtoon/log-transformation-purpose-and-interpretation-9444b4b049c9</a:t>
-            </a:r>
-            <a:r>
-              <a:rPr lang="en-US" sz="1400" dirty="0"/>
-              <a:t> </a:t>
-            </a:r>
-          </a:p>
-          <a:p>
-            <a:pPr marL="285750" indent="-285750">
-              <a:buFont typeface="Arial" panose="020B0604020202020204" pitchFamily="34" charset="0"/>
-              <a:buChar char="•"/>
-            </a:pPr>
-            <a:r>
-              <a:rPr lang="en-US" sz="1400" dirty="0">
-                <a:hlinkClick r:id="rId12"/>
-              </a:rPr>
-              <a:t>https://machinelearningmastery.com/why-one-hot-encode-data-in-machine-learning/</a:t>
-            </a:r>
-            <a:r>
-              <a:rPr lang="en-US" sz="1400" dirty="0"/>
-              <a:t> </a:t>
-            </a:r>
-          </a:p>
-          <a:p>
-            <a:pPr marL="285750" indent="-285750">
-              <a:buFont typeface="Arial" panose="020B0604020202020204" pitchFamily="34" charset="0"/>
-              <a:buChar char="•"/>
-            </a:pPr>
-            <a:r>
-              <a:rPr lang="en-US" sz="1400" dirty="0">
-                <a:hlinkClick r:id="rId13"/>
-              </a:rPr>
-              <a:t>https://www.kaggle.com/dansbecker/using-categorical-data-with-one-hot-encoding</a:t>
-            </a:r>
-            <a:r>
-              <a:rPr lang="en-US" sz="1400" dirty="0"/>
-              <a:t> </a:t>
+                <a:solidFill>
+                  <a:srgbClr val="00B050"/>
+                </a:solidFill>
+              </a:rPr>
+              <a:t>.</a:t>
+            </a:r>
+          </a:p>
+          <a:p>
+            <a:endParaRPr lang="en-US" sz="1400" dirty="0"/>
+          </a:p>
+          <a:p>
+            <a:r>
+              <a:rPr lang="en-US" sz="1400" dirty="0"/>
+              <a:t>Example:</a:t>
+            </a:r>
+          </a:p>
+          <a:p>
+            <a:r>
+              <a:rPr lang="en-US" sz="1400" dirty="0"/>
+              <a:t>We have two </a:t>
+            </a:r>
+            <a:r>
+              <a:rPr lang="en-US" sz="1400" b="1" dirty="0">
+                <a:solidFill>
+                  <a:srgbClr val="00B050"/>
+                </a:solidFill>
+              </a:rPr>
+              <a:t>ice cream</a:t>
+            </a:r>
+            <a:r>
+              <a:rPr lang="en-US" sz="1400" dirty="0"/>
+              <a:t> columns (features): </a:t>
+            </a:r>
+            <a:r>
+              <a:rPr lang="en-US" sz="1400" b="1" dirty="0">
+                <a:solidFill>
+                  <a:srgbClr val="FF0000"/>
+                </a:solidFill>
+              </a:rPr>
+              <a:t>chocolate and vanilla</a:t>
+            </a:r>
+            <a:r>
+              <a:rPr lang="en-US" sz="1400" dirty="0"/>
+              <a:t>.</a:t>
+            </a:r>
+          </a:p>
+          <a:p>
+            <a:r>
+              <a:rPr lang="en-US" sz="1400" dirty="0"/>
+              <a:t>Having ice-cream present has strong influence on the target (label) column.</a:t>
+            </a:r>
+          </a:p>
+          <a:p>
+            <a:r>
+              <a:rPr lang="en-US" sz="1400" dirty="0"/>
+              <a:t>We evaluate the importance by removing each individual feature – and retraining the model.</a:t>
+            </a:r>
+          </a:p>
+          <a:p>
+            <a:endParaRPr lang="en-US" sz="1400" dirty="0"/>
+          </a:p>
+          <a:p>
+            <a:r>
+              <a:rPr lang="en-US" sz="1400" dirty="0"/>
+              <a:t>Suppose that these two columns are tightly correlated (</a:t>
+            </a:r>
+            <a:r>
+              <a:rPr lang="en-US" sz="1400" b="1" dirty="0">
+                <a:solidFill>
+                  <a:srgbClr val="FF0000"/>
+                </a:solidFill>
+              </a:rPr>
+              <a:t>chocolate</a:t>
+            </a:r>
+            <a:r>
+              <a:rPr lang="en-US" sz="1400" dirty="0"/>
+              <a:t> and </a:t>
+            </a:r>
+            <a:r>
+              <a:rPr lang="en-US" sz="1400" b="1" dirty="0">
+                <a:solidFill>
+                  <a:srgbClr val="FF0000"/>
+                </a:solidFill>
+              </a:rPr>
+              <a:t>vanilla</a:t>
+            </a:r>
+            <a:r>
+              <a:rPr lang="en-US" sz="1400" dirty="0"/>
+              <a:t> either come together – or don't come).</a:t>
+            </a:r>
+          </a:p>
+          <a:p>
+            <a:r>
+              <a:rPr lang="en-US" sz="1400" dirty="0"/>
+              <a:t>If we drop </a:t>
+            </a:r>
+            <a:r>
+              <a:rPr lang="en-US" sz="1400" b="1" dirty="0">
+                <a:solidFill>
+                  <a:srgbClr val="FF0000"/>
+                </a:solidFill>
+              </a:rPr>
+              <a:t>vanilla</a:t>
+            </a:r>
+            <a:r>
+              <a:rPr lang="en-US" sz="1400" dirty="0"/>
+              <a:t> column – and re-train, the model will still work because </a:t>
+            </a:r>
+            <a:r>
+              <a:rPr lang="en-US" sz="1400" b="1" dirty="0">
+                <a:solidFill>
+                  <a:srgbClr val="FF0000"/>
+                </a:solidFill>
+              </a:rPr>
+              <a:t>chocolate</a:t>
+            </a:r>
+            <a:r>
+              <a:rPr lang="en-US" sz="1400" dirty="0"/>
+              <a:t> column is still present.</a:t>
+            </a:r>
+          </a:p>
+          <a:p>
+            <a:r>
+              <a:rPr lang="en-US" sz="1400" dirty="0"/>
+              <a:t>So we will wrongly conclude that </a:t>
+            </a:r>
+            <a:r>
+              <a:rPr lang="en-US" sz="1400" b="1" dirty="0">
+                <a:solidFill>
+                  <a:srgbClr val="FF0000"/>
+                </a:solidFill>
+              </a:rPr>
+              <a:t>vanilla</a:t>
+            </a:r>
+            <a:r>
+              <a:rPr lang="en-US" sz="1400" dirty="0"/>
+              <a:t> column is not important.</a:t>
+            </a:r>
+          </a:p>
+          <a:p>
+            <a:r>
+              <a:rPr lang="en-US" sz="1400" dirty="0"/>
+              <a:t>Similarly we will wrongly conclude that </a:t>
+            </a:r>
+            <a:r>
+              <a:rPr lang="en-US" sz="1400" b="1" dirty="0">
+                <a:solidFill>
+                  <a:srgbClr val="FF0000"/>
+                </a:solidFill>
+              </a:rPr>
+              <a:t>chocolate</a:t>
+            </a:r>
+            <a:r>
+              <a:rPr lang="en-US" sz="1400" dirty="0"/>
+              <a:t> column is not important for the same reason.</a:t>
+            </a:r>
+          </a:p>
+        </p:txBody>
+      </p:sp>
+      <p:pic>
+        <p:nvPicPr>
+          <p:cNvPr id="2052" name="Picture 4">
+            <a:extLst>
+              <a:ext uri="{FF2B5EF4-FFF2-40B4-BE49-F238E27FC236}">
+                <a16:creationId xmlns:a16="http://schemas.microsoft.com/office/drawing/2014/main" id="{5B1FD3EE-1DB0-6C48-8A50-ECEA69247BA7}"/>
+              </a:ext>
+            </a:extLst>
+          </p:cNvPr>
+          <p:cNvPicPr>
+            <a:picLocks noChangeAspect="1" noChangeArrowheads="1"/>
+          </p:cNvPicPr>
+          <p:nvPr/>
+        </p:nvPicPr>
+        <p:blipFill rotWithShape="1">
+          <a:blip r:embed="rId2" cstate="email">
+            <a:extLst>
+              <a:ext uri="{28A0092B-C50C-407E-A947-70E740481C1C}">
+                <a14:useLocalDpi xmlns:a14="http://schemas.microsoft.com/office/drawing/2010/main"/>
+              </a:ext>
+            </a:extLst>
+          </a:blip>
+          <a:srcRect/>
+          <a:stretch/>
+        </p:blipFill>
+        <p:spPr bwMode="auto">
+          <a:xfrm>
+            <a:off x="9058896" y="3098959"/>
+            <a:ext cx="2767343" cy="1631537"/>
+          </a:xfrm>
+          <a:prstGeom prst="rect">
+            <a:avLst/>
+          </a:prstGeom>
+          <a:noFill/>
+          <a:extLst>
+            <a:ext uri="{909E8E84-426E-40DD-AFC4-6F175D3DCCD1}">
+              <a14:hiddenFill xmlns:a14="http://schemas.microsoft.com/office/drawing/2010/main">
+                <a:solidFill>
+                  <a:srgbClr val="FFFFFF"/>
+                </a:solidFill>
+              </a14:hiddenFill>
+            </a:ext>
+          </a:extLst>
+        </p:spPr>
+      </p:pic>
+      <p:pic>
+        <p:nvPicPr>
+          <p:cNvPr id="2056" name="Picture 8" descr="Feature Selection in Python — Recursive Feature Elimination | by Dario  Radečić | Towards Data Science">
+            <a:extLst>
+              <a:ext uri="{FF2B5EF4-FFF2-40B4-BE49-F238E27FC236}">
+                <a16:creationId xmlns:a16="http://schemas.microsoft.com/office/drawing/2014/main" id="{A1AC0FD9-C3E4-DF4C-A9C6-7AB1821C2FD9}"/>
+              </a:ext>
+            </a:extLst>
+          </p:cNvPr>
+          <p:cNvPicPr>
+            <a:picLocks noChangeAspect="1" noChangeArrowheads="1"/>
+          </p:cNvPicPr>
+          <p:nvPr/>
+        </p:nvPicPr>
+        <p:blipFill>
+          <a:blip r:embed="rId3" cstate="email">
+            <a:extLst>
+              <a:ext uri="{28A0092B-C50C-407E-A947-70E740481C1C}">
+                <a14:useLocalDpi xmlns:a14="http://schemas.microsoft.com/office/drawing/2010/main"/>
+              </a:ext>
+            </a:extLst>
+          </a:blip>
+          <a:srcRect/>
+          <a:stretch>
+            <a:fillRect/>
+          </a:stretch>
+        </p:blipFill>
+        <p:spPr bwMode="auto">
+          <a:xfrm>
+            <a:off x="9359519" y="837342"/>
+            <a:ext cx="1861538" cy="1631537"/>
+          </a:xfrm>
+          <a:prstGeom prst="rect">
+            <a:avLst/>
+          </a:prstGeom>
+          <a:noFill/>
+          <a:extLst>
+            <a:ext uri="{909E8E84-426E-40DD-AFC4-6F175D3DCCD1}">
+              <a14:hiddenFill xmlns:a14="http://schemas.microsoft.com/office/drawing/2010/main">
+                <a:solidFill>
+                  <a:srgbClr val="FFFFFF"/>
+                </a:solidFill>
+              </a14:hiddenFill>
+            </a:ext>
+          </a:extLst>
+        </p:spPr>
+      </p:pic>
+      <p:sp>
+        <p:nvSpPr>
+          <p:cNvPr id="6" name="TextBox 5">
+            <a:extLst>
+              <a:ext uri="{FF2B5EF4-FFF2-40B4-BE49-F238E27FC236}">
+                <a16:creationId xmlns:a16="http://schemas.microsoft.com/office/drawing/2014/main" id="{DB66D921-61C3-4540-83A4-F52A5B554688}"/>
+              </a:ext>
+            </a:extLst>
+          </p:cNvPr>
+          <p:cNvSpPr txBox="1"/>
+          <p:nvPr/>
+        </p:nvSpPr>
+        <p:spPr>
+          <a:xfrm>
+            <a:off x="9205200" y="468010"/>
+            <a:ext cx="2170176" cy="369332"/>
+          </a:xfrm>
+          <a:prstGeom prst="rect">
+            <a:avLst/>
+          </a:prstGeom>
+          <a:noFill/>
+        </p:spPr>
+        <p:txBody>
+          <a:bodyPr wrap="square" rtlCol="0">
+            <a:spAutoFit/>
+          </a:bodyPr>
+          <a:lstStyle/>
+          <a:p>
+            <a:r>
+              <a:rPr lang="en-US" b="1" dirty="0">
+                <a:solidFill>
+                  <a:srgbClr val="FF0000"/>
+                </a:solidFill>
+              </a:rPr>
+              <a:t>Feature Importance</a:t>
             </a:r>
           </a:p>
         </p:txBody>
@@ -7540,7 +10524,7 @@
     </p:spTree>
     <p:extLst>
       <p:ext uri="{BB962C8B-B14F-4D97-AF65-F5344CB8AC3E}">
-        <p14:creationId xmlns:p14="http://schemas.microsoft.com/office/powerpoint/2010/main" val="2185265922"/>
+        <p14:creationId xmlns:p14="http://schemas.microsoft.com/office/powerpoint/2010/main" val="3205691429"/>
       </p:ext>
     </p:extLst>
   </p:cSld>

--- a/Feature_Engineering.pptx
+++ b/Feature_Engineering.pptx
@@ -208,7 +208,7 @@
           <a:p>
             <a:fld id="{C2E15B94-D9E4-E149-8081-23A720D1EE5F}" type="datetimeFigureOut">
               <a:rPr lang="en-US" smtClean="0"/>
-              <a:t>4/5/21</a:t>
+              <a:t>4/7/21</a:t>
             </a:fld>
             <a:endParaRPr lang="en-US"/>
           </a:p>
@@ -622,7 +622,7 @@
           <a:p>
             <a:fld id="{FBD852D7-E694-214E-8A12-510E0A0329D2}" type="datetimeFigureOut">
               <a:rPr lang="en-US" smtClean="0"/>
-              <a:t>4/5/21</a:t>
+              <a:t>4/7/21</a:t>
             </a:fld>
             <a:endParaRPr lang="en-US"/>
           </a:p>
@@ -820,7 +820,7 @@
           <a:p>
             <a:fld id="{FBD852D7-E694-214E-8A12-510E0A0329D2}" type="datetimeFigureOut">
               <a:rPr lang="en-US" smtClean="0"/>
-              <a:t>4/5/21</a:t>
+              <a:t>4/7/21</a:t>
             </a:fld>
             <a:endParaRPr lang="en-US"/>
           </a:p>
@@ -1028,7 +1028,7 @@
           <a:p>
             <a:fld id="{FBD852D7-E694-214E-8A12-510E0A0329D2}" type="datetimeFigureOut">
               <a:rPr lang="en-US" smtClean="0"/>
-              <a:t>4/5/21</a:t>
+              <a:t>4/7/21</a:t>
             </a:fld>
             <a:endParaRPr lang="en-US"/>
           </a:p>
@@ -1226,7 +1226,7 @@
           <a:p>
             <a:fld id="{FBD852D7-E694-214E-8A12-510E0A0329D2}" type="datetimeFigureOut">
               <a:rPr lang="en-US" smtClean="0"/>
-              <a:t>4/5/21</a:t>
+              <a:t>4/7/21</a:t>
             </a:fld>
             <a:endParaRPr lang="en-US"/>
           </a:p>
@@ -1501,7 +1501,7 @@
           <a:p>
             <a:fld id="{FBD852D7-E694-214E-8A12-510E0A0329D2}" type="datetimeFigureOut">
               <a:rPr lang="en-US" smtClean="0"/>
-              <a:t>4/5/21</a:t>
+              <a:t>4/7/21</a:t>
             </a:fld>
             <a:endParaRPr lang="en-US"/>
           </a:p>
@@ -1766,7 +1766,7 @@
           <a:p>
             <a:fld id="{FBD852D7-E694-214E-8A12-510E0A0329D2}" type="datetimeFigureOut">
               <a:rPr lang="en-US" smtClean="0"/>
-              <a:t>4/5/21</a:t>
+              <a:t>4/7/21</a:t>
             </a:fld>
             <a:endParaRPr lang="en-US"/>
           </a:p>
@@ -2178,7 +2178,7 @@
           <a:p>
             <a:fld id="{FBD852D7-E694-214E-8A12-510E0A0329D2}" type="datetimeFigureOut">
               <a:rPr lang="en-US" smtClean="0"/>
-              <a:t>4/5/21</a:t>
+              <a:t>4/7/21</a:t>
             </a:fld>
             <a:endParaRPr lang="en-US"/>
           </a:p>
@@ -2319,7 +2319,7 @@
           <a:p>
             <a:fld id="{FBD852D7-E694-214E-8A12-510E0A0329D2}" type="datetimeFigureOut">
               <a:rPr lang="en-US" smtClean="0"/>
-              <a:t>4/5/21</a:t>
+              <a:t>4/7/21</a:t>
             </a:fld>
             <a:endParaRPr lang="en-US"/>
           </a:p>
@@ -2432,7 +2432,7 @@
           <a:p>
             <a:fld id="{FBD852D7-E694-214E-8A12-510E0A0329D2}" type="datetimeFigureOut">
               <a:rPr lang="en-US" smtClean="0"/>
-              <a:t>4/5/21</a:t>
+              <a:t>4/7/21</a:t>
             </a:fld>
             <a:endParaRPr lang="en-US"/>
           </a:p>
@@ -2743,7 +2743,7 @@
           <a:p>
             <a:fld id="{FBD852D7-E694-214E-8A12-510E0A0329D2}" type="datetimeFigureOut">
               <a:rPr lang="en-US" smtClean="0"/>
-              <a:t>4/5/21</a:t>
+              <a:t>4/7/21</a:t>
             </a:fld>
             <a:endParaRPr lang="en-US"/>
           </a:p>
@@ -3031,7 +3031,7 @@
           <a:p>
             <a:fld id="{FBD852D7-E694-214E-8A12-510E0A0329D2}" type="datetimeFigureOut">
               <a:rPr lang="en-US" smtClean="0"/>
-              <a:t>4/5/21</a:t>
+              <a:t>4/7/21</a:t>
             </a:fld>
             <a:endParaRPr lang="en-US"/>
           </a:p>
@@ -3272,7 +3272,7 @@
           <a:p>
             <a:fld id="{FBD852D7-E694-214E-8A12-510E0A0329D2}" type="datetimeFigureOut">
               <a:rPr lang="en-US" smtClean="0"/>
-              <a:t>4/5/21</a:t>
+              <a:t>4/7/21</a:t>
             </a:fld>
             <a:endParaRPr lang="en-US"/>
           </a:p>
